--- a/data/talk.pptx
+++ b/data/talk.pptx
@@ -7,7 +7,7 @@
     <p:sldMasterId id="2147483723" r:id="rId3"/>
   </p:sldMasterIdLst>
   <p:notesMasterIdLst>
-    <p:notesMasterId r:id="rId28"/>
+    <p:notesMasterId r:id="rId29"/>
   </p:notesMasterIdLst>
   <p:sldIdLst>
     <p:sldId id="273" r:id="rId4"/>
@@ -34,6 +34,7 @@
     <p:sldId id="278" r:id="rId25"/>
     <p:sldId id="279" r:id="rId26"/>
     <p:sldId id="280" r:id="rId27"/>
+    <p:sldId id="281" r:id="rId28"/>
   </p:sldIdLst>
   <p:sldSz cx="9144000" cy="6858000" type="screen4x3"/>
   <p:notesSz cx="6858000" cy="9144000"/>
@@ -222,7 +223,7 @@
           <a:p>
             <a:fld id="{EFE6E835-27B1-4873-AA5B-D1A973D9666F}" type="datetimeFigureOut">
               <a:rPr lang="en-IN" smtClean="0"/>
-              <a:t>08-03-2020</a:t>
+              <a:t>10-03-2020</a:t>
             </a:fld>
             <a:endParaRPr lang="en-IN"/>
           </a:p>
@@ -660,7 +661,7 @@
           <a:p>
             <a:fld id="{47147380-C9A6-4292-80AD-55D5D6A2AAE3}" type="datetime1">
               <a:rPr lang="en-US" smtClean="0"/>
-              <a:t>3/8/2020</a:t>
+              <a:t>3/10/2020</a:t>
             </a:fld>
             <a:endParaRPr lang="en-US" dirty="0"/>
           </a:p>
@@ -931,7 +932,7 @@
           <a:p>
             <a:fld id="{7094CD8F-F50E-4E4E-A619-C83536A21564}" type="datetime1">
               <a:rPr lang="en-US" smtClean="0"/>
-              <a:t>3/8/2020</a:t>
+              <a:t>3/10/2020</a:t>
             </a:fld>
             <a:endParaRPr lang="en-US" dirty="0"/>
           </a:p>
@@ -1166,7 +1167,7 @@
           <a:p>
             <a:fld id="{369190F8-86C8-482D-94FF-2357E3904808}" type="datetime1">
               <a:rPr lang="en-US" smtClean="0"/>
-              <a:t>3/8/2020</a:t>
+              <a:t>3/10/2020</a:t>
             </a:fld>
             <a:endParaRPr lang="en-US" dirty="0"/>
           </a:p>
@@ -1480,7 +1481,7 @@
           <a:p>
             <a:fld id="{7DCCB83B-D0C2-4A7D-ACE4-394E031D1D6D}" type="datetime1">
               <a:rPr lang="en-US" smtClean="0"/>
-              <a:t>3/8/2020</a:t>
+              <a:t>3/10/2020</a:t>
             </a:fld>
             <a:endParaRPr lang="en-US" dirty="0"/>
           </a:p>
@@ -1957,7 +1958,7 @@
           <a:p>
             <a:fld id="{A562CC47-EB05-49E7-BB79-D60F887758B3}" type="datetime1">
               <a:rPr lang="en-US" smtClean="0"/>
-              <a:t>3/8/2020</a:t>
+              <a:t>3/10/2020</a:t>
             </a:fld>
             <a:endParaRPr lang="en-US" dirty="0"/>
           </a:p>
@@ -2508,7 +2509,7 @@
           <a:p>
             <a:fld id="{62DB895A-F06A-4C22-B764-5FE32A2A5F48}" type="datetime1">
               <a:rPr lang="en-US" smtClean="0"/>
-              <a:t>3/8/2020</a:t>
+              <a:t>3/10/2020</a:t>
             </a:fld>
             <a:endParaRPr lang="en-US" dirty="0"/>
           </a:p>
@@ -3286,7 +3287,7 @@
           <a:p>
             <a:fld id="{5D42CFDC-1EF5-4A06-BF89-EF8A8F6CD796}" type="datetime1">
               <a:rPr lang="en-US" smtClean="0"/>
-              <a:t>3/8/2020</a:t>
+              <a:t>3/10/2020</a:t>
             </a:fld>
             <a:endParaRPr lang="en-US" dirty="0"/>
           </a:p>
@@ -3465,7 +3466,7 @@
           <a:p>
             <a:fld id="{13815C30-DF68-4F98-AF35-879B076E4017}" type="datetime1">
               <a:rPr lang="en-US" smtClean="0"/>
-              <a:t>3/8/2020</a:t>
+              <a:t>3/10/2020</a:t>
             </a:fld>
             <a:endParaRPr lang="en-US" dirty="0"/>
           </a:p>
@@ -3692,7 +3693,7 @@
           <a:p>
             <a:fld id="{EC5DC2D5-0D2B-43CA-B09F-4232E3D1DD6E}" type="datetime1">
               <a:rPr lang="en-US" smtClean="0"/>
-              <a:t>3/8/2020</a:t>
+              <a:t>3/10/2020</a:t>
             </a:fld>
             <a:endParaRPr lang="en-US" dirty="0"/>
           </a:p>
@@ -3824,7 +3825,7 @@
           <a:noFill/>
           <a:extLst>
             <a:ext uri="{909E8E84-426E-40dd-AFC4-6F175D3DCCD1}">
-              <a14:hiddenFill xmlns:a14="http://schemas.microsoft.com/office/drawing/2010/main" xmlns="">
+              <a14:hiddenFill xmlns="" xmlns:a14="http://schemas.microsoft.com/office/drawing/2010/main">
                 <a:solidFill>
                   <a:srgbClr val="FFFFFF"/>
                 </a:solidFill>
@@ -3883,7 +3884,7 @@
             </a:ln>
             <a:extLst>
               <a:ext uri="{91240B29-F687-4f45-9708-019B960494DF}">
-                <a14:hiddenLine xmlns:a14="http://schemas.microsoft.com/office/drawing/2010/main" xmlns="" w="9525">
+                <a14:hiddenLine xmlns="" xmlns:a14="http://schemas.microsoft.com/office/drawing/2010/main" w="9525">
                   <a:solidFill>
                     <a:srgbClr val="000000"/>
                   </a:solidFill>
@@ -3973,7 +3974,7 @@
             </a:ln>
             <a:extLst>
               <a:ext uri="{91240B29-F687-4f45-9708-019B960494DF}">
-                <a14:hiddenLine xmlns:a14="http://schemas.microsoft.com/office/drawing/2010/main" xmlns="" w="9525">
+                <a14:hiddenLine xmlns="" xmlns:a14="http://schemas.microsoft.com/office/drawing/2010/main" w="9525">
                   <a:solidFill>
                     <a:srgbClr val="000000"/>
                   </a:solidFill>
@@ -4063,7 +4064,7 @@
             </a:ln>
             <a:extLst>
               <a:ext uri="{91240B29-F687-4f45-9708-019B960494DF}">
-                <a14:hiddenLine xmlns:a14="http://schemas.microsoft.com/office/drawing/2010/main" xmlns="" w="9525">
+                <a14:hiddenLine xmlns="" xmlns:a14="http://schemas.microsoft.com/office/drawing/2010/main" w="9525">
                   <a:solidFill>
                     <a:srgbClr val="000000"/>
                   </a:solidFill>
@@ -4097,7 +4098,7 @@
             </a:ln>
             <a:extLst>
               <a:ext uri="{91240B29-F687-4f45-9708-019B960494DF}">
-                <a14:hiddenLine xmlns:a14="http://schemas.microsoft.com/office/drawing/2010/main" xmlns="" w="9525">
+                <a14:hiddenLine xmlns="" xmlns:a14="http://schemas.microsoft.com/office/drawing/2010/main" w="9525">
                   <a:solidFill>
                     <a:srgbClr val="000000"/>
                   </a:solidFill>
@@ -4187,7 +4188,7 @@
             </a:ln>
             <a:extLst>
               <a:ext uri="{91240B29-F687-4f45-9708-019B960494DF}">
-                <a14:hiddenLine xmlns:a14="http://schemas.microsoft.com/office/drawing/2010/main" xmlns="" w="9525">
+                <a14:hiddenLine xmlns="" xmlns:a14="http://schemas.microsoft.com/office/drawing/2010/main" w="9525">
                   <a:solidFill>
                     <a:srgbClr val="000000"/>
                   </a:solidFill>
@@ -4249,7 +4250,7 @@
             </a:ln>
             <a:extLst>
               <a:ext uri="{91240B29-F687-4f45-9708-019B960494DF}">
-                <a14:hiddenLine xmlns:a14="http://schemas.microsoft.com/office/drawing/2010/main" xmlns="" w="9525">
+                <a14:hiddenLine xmlns="" xmlns:a14="http://schemas.microsoft.com/office/drawing/2010/main" w="9525">
                   <a:solidFill>
                     <a:srgbClr val="000000"/>
                   </a:solidFill>
@@ -4311,7 +4312,7 @@
             </a:ln>
             <a:extLst>
               <a:ext uri="{91240B29-F687-4f45-9708-019B960494DF}">
-                <a14:hiddenLine xmlns:a14="http://schemas.microsoft.com/office/drawing/2010/main" xmlns="" w="9525">
+                <a14:hiddenLine xmlns="" xmlns:a14="http://schemas.microsoft.com/office/drawing/2010/main" w="9525">
                   <a:solidFill>
                     <a:srgbClr val="000000"/>
                   </a:solidFill>
@@ -4401,7 +4402,7 @@
             </a:ln>
             <a:extLst>
               <a:ext uri="{91240B29-F687-4f45-9708-019B960494DF}">
-                <a14:hiddenLine xmlns:a14="http://schemas.microsoft.com/office/drawing/2010/main" xmlns="" w="9525">
+                <a14:hiddenLine xmlns="" xmlns:a14="http://schemas.microsoft.com/office/drawing/2010/main" w="9525">
                   <a:solidFill>
                     <a:srgbClr val="000000"/>
                   </a:solidFill>
@@ -4463,7 +4464,7 @@
             </a:ln>
             <a:extLst>
               <a:ext uri="{91240B29-F687-4f45-9708-019B960494DF}">
-                <a14:hiddenLine xmlns:a14="http://schemas.microsoft.com/office/drawing/2010/main" xmlns="" w="9525">
+                <a14:hiddenLine xmlns="" xmlns:a14="http://schemas.microsoft.com/office/drawing/2010/main" w="9525">
                   <a:solidFill>
                     <a:srgbClr val="000000"/>
                   </a:solidFill>
@@ -4525,7 +4526,7 @@
             </a:ln>
             <a:extLst>
               <a:ext uri="{91240B29-F687-4f45-9708-019B960494DF}">
-                <a14:hiddenLine xmlns:a14="http://schemas.microsoft.com/office/drawing/2010/main" xmlns="" w="9525">
+                <a14:hiddenLine xmlns="" xmlns:a14="http://schemas.microsoft.com/office/drawing/2010/main" w="9525">
                   <a:solidFill>
                     <a:srgbClr val="000000"/>
                   </a:solidFill>
@@ -4615,7 +4616,7 @@
             </a:ln>
             <a:extLst>
               <a:ext uri="{91240B29-F687-4f45-9708-019B960494DF}">
-                <a14:hiddenLine xmlns:a14="http://schemas.microsoft.com/office/drawing/2010/main" xmlns="" w="9525">
+                <a14:hiddenLine xmlns="" xmlns:a14="http://schemas.microsoft.com/office/drawing/2010/main" w="9525">
                   <a:solidFill>
                     <a:srgbClr val="000000"/>
                   </a:solidFill>
@@ -4705,7 +4706,7 @@
             </a:ln>
             <a:extLst>
               <a:ext uri="{91240B29-F687-4f45-9708-019B960494DF}">
-                <a14:hiddenLine xmlns:a14="http://schemas.microsoft.com/office/drawing/2010/main" xmlns="" w="9525">
+                <a14:hiddenLine xmlns="" xmlns:a14="http://schemas.microsoft.com/office/drawing/2010/main" w="9525">
                   <a:solidFill>
                     <a:srgbClr val="000000"/>
                   </a:solidFill>
@@ -4767,7 +4768,7 @@
             </a:ln>
             <a:extLst>
               <a:ext uri="{91240B29-F687-4f45-9708-019B960494DF}">
-                <a14:hiddenLine xmlns:a14="http://schemas.microsoft.com/office/drawing/2010/main" xmlns="" w="9525">
+                <a14:hiddenLine xmlns="" xmlns:a14="http://schemas.microsoft.com/office/drawing/2010/main" w="9525">
                   <a:solidFill>
                     <a:srgbClr val="000000"/>
                   </a:solidFill>
@@ -4877,7 +4878,7 @@
             </a:ln>
             <a:extLst>
               <a:ext uri="{91240B29-F687-4f45-9708-019B960494DF}">
-                <a14:hiddenLine xmlns:a14="http://schemas.microsoft.com/office/drawing/2010/main" xmlns="" w="9525">
+                <a14:hiddenLine xmlns="" xmlns:a14="http://schemas.microsoft.com/office/drawing/2010/main" w="9525">
                   <a:solidFill>
                     <a:srgbClr val="000000"/>
                   </a:solidFill>
@@ -4939,7 +4940,7 @@
             </a:ln>
             <a:extLst>
               <a:ext uri="{91240B29-F687-4f45-9708-019B960494DF}">
-                <a14:hiddenLine xmlns:a14="http://schemas.microsoft.com/office/drawing/2010/main" xmlns="" w="9525">
+                <a14:hiddenLine xmlns="" xmlns:a14="http://schemas.microsoft.com/office/drawing/2010/main" w="9525">
                   <a:solidFill>
                     <a:srgbClr val="000000"/>
                   </a:solidFill>
@@ -5029,7 +5030,7 @@
             </a:ln>
             <a:extLst>
               <a:ext uri="{91240B29-F687-4f45-9708-019B960494DF}">
-                <a14:hiddenLine xmlns:a14="http://schemas.microsoft.com/office/drawing/2010/main" xmlns="" w="9525">
+                <a14:hiddenLine xmlns="" xmlns:a14="http://schemas.microsoft.com/office/drawing/2010/main" w="9525">
                   <a:solidFill>
                     <a:srgbClr val="000000"/>
                   </a:solidFill>
@@ -5119,7 +5120,7 @@
             </a:ln>
             <a:extLst>
               <a:ext uri="{91240B29-F687-4f45-9708-019B960494DF}">
-                <a14:hiddenLine xmlns:a14="http://schemas.microsoft.com/office/drawing/2010/main" xmlns="" w="9525">
+                <a14:hiddenLine xmlns="" xmlns:a14="http://schemas.microsoft.com/office/drawing/2010/main" w="9525">
                   <a:solidFill>
                     <a:srgbClr val="000000"/>
                   </a:solidFill>
@@ -5181,7 +5182,7 @@
             </a:ln>
             <a:extLst>
               <a:ext uri="{91240B29-F687-4f45-9708-019B960494DF}">
-                <a14:hiddenLine xmlns:a14="http://schemas.microsoft.com/office/drawing/2010/main" xmlns="" w="9525">
+                <a14:hiddenLine xmlns="" xmlns:a14="http://schemas.microsoft.com/office/drawing/2010/main" w="9525">
                   <a:solidFill>
                     <a:srgbClr val="000000"/>
                   </a:solidFill>
@@ -5271,7 +5272,7 @@
             </a:ln>
             <a:extLst>
               <a:ext uri="{91240B29-F687-4f45-9708-019B960494DF}">
-                <a14:hiddenLine xmlns:a14="http://schemas.microsoft.com/office/drawing/2010/main" xmlns="" w="9525">
+                <a14:hiddenLine xmlns="" xmlns:a14="http://schemas.microsoft.com/office/drawing/2010/main" w="9525">
                   <a:solidFill>
                     <a:srgbClr val="000000"/>
                   </a:solidFill>
@@ -5361,7 +5362,7 @@
             </a:ln>
             <a:extLst>
               <a:ext uri="{91240B29-F687-4f45-9708-019B960494DF}">
-                <a14:hiddenLine xmlns:a14="http://schemas.microsoft.com/office/drawing/2010/main" xmlns="" w="9525">
+                <a14:hiddenLine xmlns="" xmlns:a14="http://schemas.microsoft.com/office/drawing/2010/main" w="9525">
                   <a:solidFill>
                     <a:srgbClr val="000000"/>
                   </a:solidFill>
@@ -5417,7 +5418,7 @@
             </a:ln>
             <a:extLst>
               <a:ext uri="{91240B29-F687-4f45-9708-019B960494DF}">
-                <a14:hiddenLine xmlns:a14="http://schemas.microsoft.com/office/drawing/2010/main" xmlns="" w="9525">
+                <a14:hiddenLine xmlns="" xmlns:a14="http://schemas.microsoft.com/office/drawing/2010/main" w="9525">
                   <a:solidFill>
                     <a:srgbClr val="000000"/>
                   </a:solidFill>
@@ -5507,7 +5508,7 @@
             </a:ln>
             <a:extLst>
               <a:ext uri="{91240B29-F687-4f45-9708-019B960494DF}">
-                <a14:hiddenLine xmlns:a14="http://schemas.microsoft.com/office/drawing/2010/main" xmlns="" w="9525">
+                <a14:hiddenLine xmlns="" xmlns:a14="http://schemas.microsoft.com/office/drawing/2010/main" w="9525">
                   <a:solidFill>
                     <a:srgbClr val="000000"/>
                   </a:solidFill>
@@ -5563,7 +5564,7 @@
             </a:ln>
             <a:extLst>
               <a:ext uri="{91240B29-F687-4f45-9708-019B960494DF}">
-                <a14:hiddenLine xmlns:a14="http://schemas.microsoft.com/office/drawing/2010/main" xmlns="" w="9525">
+                <a14:hiddenLine xmlns="" xmlns:a14="http://schemas.microsoft.com/office/drawing/2010/main" w="9525">
                   <a:solidFill>
                     <a:srgbClr val="000000"/>
                   </a:solidFill>
@@ -5653,7 +5654,7 @@
             </a:ln>
             <a:extLst>
               <a:ext uri="{91240B29-F687-4f45-9708-019B960494DF}">
-                <a14:hiddenLine xmlns:a14="http://schemas.microsoft.com/office/drawing/2010/main" xmlns="" w="9525">
+                <a14:hiddenLine xmlns="" xmlns:a14="http://schemas.microsoft.com/office/drawing/2010/main" w="9525">
                   <a:solidFill>
                     <a:srgbClr val="000000"/>
                   </a:solidFill>
@@ -5721,7 +5722,7 @@
             </a:ln>
             <a:extLst>
               <a:ext uri="{91240B29-F687-4f45-9708-019B960494DF}">
-                <a14:hiddenLine xmlns:a14="http://schemas.microsoft.com/office/drawing/2010/main" xmlns="" w="9525">
+                <a14:hiddenLine xmlns="" xmlns:a14="http://schemas.microsoft.com/office/drawing/2010/main" w="9525">
                   <a:solidFill>
                     <a:srgbClr val="000000"/>
                   </a:solidFill>
@@ -5811,7 +5812,7 @@
             </a:ln>
             <a:extLst>
               <a:ext uri="{91240B29-F687-4f45-9708-019B960494DF}">
-                <a14:hiddenLine xmlns:a14="http://schemas.microsoft.com/office/drawing/2010/main" xmlns="" w="9525">
+                <a14:hiddenLine xmlns="" xmlns:a14="http://schemas.microsoft.com/office/drawing/2010/main" w="9525">
                   <a:solidFill>
                     <a:srgbClr val="000000"/>
                   </a:solidFill>
@@ -5879,7 +5880,7 @@
             </a:ln>
             <a:extLst>
               <a:ext uri="{91240B29-F687-4f45-9708-019B960494DF}">
-                <a14:hiddenLine xmlns:a14="http://schemas.microsoft.com/office/drawing/2010/main" xmlns="" w="9525">
+                <a14:hiddenLine xmlns="" xmlns:a14="http://schemas.microsoft.com/office/drawing/2010/main" w="9525">
                   <a:solidFill>
                     <a:srgbClr val="000000"/>
                   </a:solidFill>
@@ -5969,7 +5970,7 @@
             </a:ln>
             <a:extLst>
               <a:ext uri="{91240B29-F687-4f45-9708-019B960494DF}">
-                <a14:hiddenLine xmlns:a14="http://schemas.microsoft.com/office/drawing/2010/main" xmlns="" w="9525">
+                <a14:hiddenLine xmlns="" xmlns:a14="http://schemas.microsoft.com/office/drawing/2010/main" w="9525">
                   <a:solidFill>
                     <a:srgbClr val="000000"/>
                   </a:solidFill>
@@ -6003,7 +6004,7 @@
             </a:ln>
             <a:extLst>
               <a:ext uri="{91240B29-F687-4f45-9708-019B960494DF}">
-                <a14:hiddenLine xmlns:a14="http://schemas.microsoft.com/office/drawing/2010/main" xmlns="" w="9525">
+                <a14:hiddenLine xmlns="" xmlns:a14="http://schemas.microsoft.com/office/drawing/2010/main" w="9525">
                   <a:solidFill>
                     <a:srgbClr val="000000"/>
                   </a:solidFill>
@@ -6093,7 +6094,7 @@
             </a:ln>
             <a:extLst>
               <a:ext uri="{91240B29-F687-4f45-9708-019B960494DF}">
-                <a14:hiddenLine xmlns:a14="http://schemas.microsoft.com/office/drawing/2010/main" xmlns="" w="9525">
+                <a14:hiddenLine xmlns="" xmlns:a14="http://schemas.microsoft.com/office/drawing/2010/main" w="9525">
                   <a:solidFill>
                     <a:srgbClr val="000000"/>
                   </a:solidFill>
@@ -6155,7 +6156,7 @@
             </a:ln>
             <a:extLst>
               <a:ext uri="{91240B29-F687-4f45-9708-019B960494DF}">
-                <a14:hiddenLine xmlns:a14="http://schemas.microsoft.com/office/drawing/2010/main" xmlns="" w="9525">
+                <a14:hiddenLine xmlns="" xmlns:a14="http://schemas.microsoft.com/office/drawing/2010/main" w="9525">
                   <a:solidFill>
                     <a:srgbClr val="000000"/>
                   </a:solidFill>
@@ -6217,7 +6218,7 @@
             </a:ln>
             <a:extLst>
               <a:ext uri="{91240B29-F687-4f45-9708-019B960494DF}">
-                <a14:hiddenLine xmlns:a14="http://schemas.microsoft.com/office/drawing/2010/main" xmlns="" w="9525">
+                <a14:hiddenLine xmlns="" xmlns:a14="http://schemas.microsoft.com/office/drawing/2010/main" w="9525">
                   <a:solidFill>
                     <a:srgbClr val="000000"/>
                   </a:solidFill>
@@ -6307,7 +6308,7 @@
             </a:ln>
             <a:extLst>
               <a:ext uri="{91240B29-F687-4f45-9708-019B960494DF}">
-                <a14:hiddenLine xmlns:a14="http://schemas.microsoft.com/office/drawing/2010/main" xmlns="" w="9525">
+                <a14:hiddenLine xmlns="" xmlns:a14="http://schemas.microsoft.com/office/drawing/2010/main" w="9525">
                   <a:solidFill>
                     <a:srgbClr val="000000"/>
                   </a:solidFill>
@@ -6375,7 +6376,7 @@
             </a:ln>
             <a:extLst>
               <a:ext uri="{91240B29-F687-4f45-9708-019B960494DF}">
-                <a14:hiddenLine xmlns:a14="http://schemas.microsoft.com/office/drawing/2010/main" xmlns="" w="9525">
+                <a14:hiddenLine xmlns="" xmlns:a14="http://schemas.microsoft.com/office/drawing/2010/main" w="9525">
                   <a:solidFill>
                     <a:srgbClr val="000000"/>
                   </a:solidFill>
@@ -6437,7 +6438,7 @@
             </a:ln>
             <a:extLst>
               <a:ext uri="{91240B29-F687-4f45-9708-019B960494DF}">
-                <a14:hiddenLine xmlns:a14="http://schemas.microsoft.com/office/drawing/2010/main" xmlns="" w="9525">
+                <a14:hiddenLine xmlns="" xmlns:a14="http://schemas.microsoft.com/office/drawing/2010/main" w="9525">
                   <a:solidFill>
                     <a:srgbClr val="000000"/>
                   </a:solidFill>
@@ -6527,7 +6528,7 @@
             </a:ln>
             <a:extLst>
               <a:ext uri="{91240B29-F687-4f45-9708-019B960494DF}">
-                <a14:hiddenLine xmlns:a14="http://schemas.microsoft.com/office/drawing/2010/main" xmlns="" w="9525">
+                <a14:hiddenLine xmlns="" xmlns:a14="http://schemas.microsoft.com/office/drawing/2010/main" w="9525">
                   <a:solidFill>
                     <a:srgbClr val="000000"/>
                   </a:solidFill>
@@ -6589,7 +6590,7 @@
             </a:ln>
             <a:extLst>
               <a:ext uri="{91240B29-F687-4f45-9708-019B960494DF}">
-                <a14:hiddenLine xmlns:a14="http://schemas.microsoft.com/office/drawing/2010/main" xmlns="" w="9525">
+                <a14:hiddenLine xmlns="" xmlns:a14="http://schemas.microsoft.com/office/drawing/2010/main" w="9525">
                   <a:solidFill>
                     <a:srgbClr val="000000"/>
                   </a:solidFill>
@@ -6679,7 +6680,7 @@
             </a:ln>
             <a:extLst>
               <a:ext uri="{91240B29-F687-4f45-9708-019B960494DF}">
-                <a14:hiddenLine xmlns:a14="http://schemas.microsoft.com/office/drawing/2010/main" xmlns="" w="9525">
+                <a14:hiddenLine xmlns="" xmlns:a14="http://schemas.microsoft.com/office/drawing/2010/main" w="9525">
                   <a:solidFill>
                     <a:srgbClr val="000000"/>
                   </a:solidFill>
@@ -6741,7 +6742,7 @@
             </a:ln>
             <a:extLst>
               <a:ext uri="{91240B29-F687-4f45-9708-019B960494DF}">
-                <a14:hiddenLine xmlns:a14="http://schemas.microsoft.com/office/drawing/2010/main" xmlns="" w="9525">
+                <a14:hiddenLine xmlns="" xmlns:a14="http://schemas.microsoft.com/office/drawing/2010/main" w="9525">
                   <a:solidFill>
                     <a:srgbClr val="000000"/>
                   </a:solidFill>
@@ -6831,7 +6832,7 @@
             </a:ln>
             <a:extLst>
               <a:ext uri="{91240B29-F687-4f45-9708-019B960494DF}">
-                <a14:hiddenLine xmlns:a14="http://schemas.microsoft.com/office/drawing/2010/main" xmlns="" w="9525">
+                <a14:hiddenLine xmlns="" xmlns:a14="http://schemas.microsoft.com/office/drawing/2010/main" w="9525">
                   <a:solidFill>
                     <a:srgbClr val="000000"/>
                   </a:solidFill>
@@ -6865,7 +6866,7 @@
             </a:ln>
             <a:extLst>
               <a:ext uri="{91240B29-F687-4f45-9708-019B960494DF}">
-                <a14:hiddenLine xmlns:a14="http://schemas.microsoft.com/office/drawing/2010/main" xmlns="" w="9525">
+                <a14:hiddenLine xmlns="" xmlns:a14="http://schemas.microsoft.com/office/drawing/2010/main" w="9525">
                   <a:solidFill>
                     <a:srgbClr val="000000"/>
                   </a:solidFill>
@@ -6930,7 +6931,7 @@
             </a:ln>
             <a:extLst>
               <a:ext uri="{91240B29-F687-4f45-9708-019B960494DF}">
-                <a14:hiddenLine xmlns:a14="http://schemas.microsoft.com/office/drawing/2010/main" xmlns="" w="9525">
+                <a14:hiddenLine xmlns="" xmlns:a14="http://schemas.microsoft.com/office/drawing/2010/main" w="9525">
                   <a:solidFill>
                     <a:srgbClr val="000000"/>
                   </a:solidFill>
@@ -7020,7 +7021,7 @@
             </a:ln>
             <a:extLst>
               <a:ext uri="{91240B29-F687-4f45-9708-019B960494DF}">
-                <a14:hiddenLine xmlns:a14="http://schemas.microsoft.com/office/drawing/2010/main" xmlns="" w="9525">
+                <a14:hiddenLine xmlns="" xmlns:a14="http://schemas.microsoft.com/office/drawing/2010/main" w="9525">
                   <a:solidFill>
                     <a:srgbClr val="000000"/>
                   </a:solidFill>
@@ -7082,7 +7083,7 @@
             </a:ln>
             <a:extLst>
               <a:ext uri="{91240B29-F687-4f45-9708-019B960494DF}">
-                <a14:hiddenLine xmlns:a14="http://schemas.microsoft.com/office/drawing/2010/main" xmlns="" w="9525">
+                <a14:hiddenLine xmlns="" xmlns:a14="http://schemas.microsoft.com/office/drawing/2010/main" w="9525">
                   <a:solidFill>
                     <a:srgbClr val="000000"/>
                   </a:solidFill>
@@ -7172,7 +7173,7 @@
             </a:ln>
             <a:extLst>
               <a:ext uri="{91240B29-F687-4f45-9708-019B960494DF}">
-                <a14:hiddenLine xmlns:a14="http://schemas.microsoft.com/office/drawing/2010/main" xmlns="" w="9525">
+                <a14:hiddenLine xmlns="" xmlns:a14="http://schemas.microsoft.com/office/drawing/2010/main" w="9525">
                   <a:solidFill>
                     <a:srgbClr val="000000"/>
                   </a:solidFill>
@@ -7262,7 +7263,7 @@
             </a:ln>
             <a:extLst>
               <a:ext uri="{91240B29-F687-4f45-9708-019B960494DF}">
-                <a14:hiddenLine xmlns:a14="http://schemas.microsoft.com/office/drawing/2010/main" xmlns="" w="9525">
+                <a14:hiddenLine xmlns="" xmlns:a14="http://schemas.microsoft.com/office/drawing/2010/main" w="9525">
                   <a:solidFill>
                     <a:srgbClr val="000000"/>
                   </a:solidFill>
@@ -7327,7 +7328,7 @@
             </a:ln>
             <a:extLst>
               <a:ext uri="{91240B29-F687-4f45-9708-019B960494DF}">
-                <a14:hiddenLine xmlns:a14="http://schemas.microsoft.com/office/drawing/2010/main" xmlns="" w="9525">
+                <a14:hiddenLine xmlns="" xmlns:a14="http://schemas.microsoft.com/office/drawing/2010/main" w="9525">
                   <a:solidFill>
                     <a:srgbClr val="000000"/>
                   </a:solidFill>
@@ -7389,7 +7390,7 @@
             </a:ln>
             <a:extLst>
               <a:ext uri="{91240B29-F687-4f45-9708-019B960494DF}">
-                <a14:hiddenLine xmlns:a14="http://schemas.microsoft.com/office/drawing/2010/main" xmlns="" w="9525">
+                <a14:hiddenLine xmlns="" xmlns:a14="http://schemas.microsoft.com/office/drawing/2010/main" w="9525">
                   <a:solidFill>
                     <a:srgbClr val="000000"/>
                   </a:solidFill>
@@ -7479,7 +7480,7 @@
             </a:ln>
             <a:extLst>
               <a:ext uri="{91240B29-F687-4f45-9708-019B960494DF}">
-                <a14:hiddenLine xmlns:a14="http://schemas.microsoft.com/office/drawing/2010/main" xmlns="" w="9525">
+                <a14:hiddenLine xmlns="" xmlns:a14="http://schemas.microsoft.com/office/drawing/2010/main" w="9525">
                   <a:solidFill>
                     <a:srgbClr val="000000"/>
                   </a:solidFill>
@@ -7569,7 +7570,7 @@
             </a:ln>
             <a:extLst>
               <a:ext uri="{91240B29-F687-4f45-9708-019B960494DF}">
-                <a14:hiddenLine xmlns:a14="http://schemas.microsoft.com/office/drawing/2010/main" xmlns="" w="9525">
+                <a14:hiddenLine xmlns="" xmlns:a14="http://schemas.microsoft.com/office/drawing/2010/main" w="9525">
                   <a:solidFill>
                     <a:srgbClr val="000000"/>
                   </a:solidFill>
@@ -7631,7 +7632,7 @@
             </a:ln>
             <a:extLst>
               <a:ext uri="{91240B29-F687-4f45-9708-019B960494DF}">
-                <a14:hiddenLine xmlns:a14="http://schemas.microsoft.com/office/drawing/2010/main" xmlns="" w="9525">
+                <a14:hiddenLine xmlns="" xmlns:a14="http://schemas.microsoft.com/office/drawing/2010/main" w="9525">
                   <a:solidFill>
                     <a:srgbClr val="000000"/>
                   </a:solidFill>
@@ -7751,7 +7752,7 @@
             </a:ln>
             <a:extLst>
               <a:ext uri="{91240B29-F687-4f45-9708-019B960494DF}">
-                <a14:hiddenLine xmlns:a14="http://schemas.microsoft.com/office/drawing/2010/main" xmlns="" w="9525">
+                <a14:hiddenLine xmlns="" xmlns:a14="http://schemas.microsoft.com/office/drawing/2010/main" w="9525">
                   <a:solidFill>
                     <a:srgbClr val="000000"/>
                   </a:solidFill>
@@ -7819,7 +7820,7 @@
             </a:ln>
             <a:extLst>
               <a:ext uri="{91240B29-F687-4f45-9708-019B960494DF}">
-                <a14:hiddenLine xmlns:a14="http://schemas.microsoft.com/office/drawing/2010/main" xmlns="" w="9525">
+                <a14:hiddenLine xmlns="" xmlns:a14="http://schemas.microsoft.com/office/drawing/2010/main" w="9525">
                   <a:solidFill>
                     <a:srgbClr val="000000"/>
                   </a:solidFill>
@@ -7909,7 +7910,7 @@
             </a:ln>
             <a:extLst>
               <a:ext uri="{91240B29-F687-4f45-9708-019B960494DF}">
-                <a14:hiddenLine xmlns:a14="http://schemas.microsoft.com/office/drawing/2010/main" xmlns="" w="9525">
+                <a14:hiddenLine xmlns="" xmlns:a14="http://schemas.microsoft.com/office/drawing/2010/main" w="9525">
                   <a:solidFill>
                     <a:srgbClr val="000000"/>
                   </a:solidFill>
@@ -8049,7 +8050,7 @@
           <a:p>
             <a:fld id="{47147380-C9A6-4292-80AD-55D5D6A2AAE3}" type="datetime1">
               <a:rPr lang="en-US" smtClean="0"/>
-              <a:t>3/8/2020</a:t>
+              <a:t>3/10/2020</a:t>
             </a:fld>
             <a:endParaRPr lang="en-US" dirty="0"/>
           </a:p>
@@ -8248,7 +8249,7 @@
           <a:p>
             <a:fld id="{4E46DBC0-D5DE-45A0-9330-4563F7536B4E}" type="datetime1">
               <a:rPr lang="en-US" smtClean="0"/>
-              <a:t>3/8/2020</a:t>
+              <a:t>3/10/2020</a:t>
             </a:fld>
             <a:endParaRPr lang="en-US" dirty="0"/>
           </a:p>
@@ -8432,7 +8433,7 @@
           <a:p>
             <a:fld id="{4E46DBC0-D5DE-45A0-9330-4563F7536B4E}" type="datetime1">
               <a:rPr lang="en-US" smtClean="0"/>
-              <a:t>3/8/2020</a:t>
+              <a:t>3/10/2020</a:t>
             </a:fld>
             <a:endParaRPr lang="en-US" dirty="0"/>
           </a:p>
@@ -8686,7 +8687,7 @@
           <a:p>
             <a:fld id="{E9AB3734-E0AF-4094-B819-76ED29494144}" type="datetime1">
               <a:rPr lang="en-US" smtClean="0"/>
-              <a:t>3/8/2020</a:t>
+              <a:t>3/10/2020</a:t>
             </a:fld>
             <a:endParaRPr lang="en-US" dirty="0"/>
           </a:p>
@@ -8922,7 +8923,7 @@
           <a:p>
             <a:fld id="{46249C16-8A15-4B1C-86DD-7EF5F36FF546}" type="datetime1">
               <a:rPr lang="en-US" smtClean="0"/>
-              <a:t>3/8/2020</a:t>
+              <a:t>3/10/2020</a:t>
             </a:fld>
             <a:endParaRPr lang="en-US" dirty="0"/>
           </a:p>
@@ -9307,7 +9308,7 @@
           <a:p>
             <a:fld id="{1AB8A156-96D8-493F-98C7-4297A490F926}" type="datetime1">
               <a:rPr lang="en-US" smtClean="0"/>
-              <a:t>3/8/2020</a:t>
+              <a:t>3/10/2020</a:t>
             </a:fld>
             <a:endParaRPr lang="en-US" dirty="0"/>
           </a:p>
@@ -9429,7 +9430,7 @@
           <a:p>
             <a:fld id="{6EFEADFD-5DAD-460C-9ABC-D0BAD649D43B}" type="datetime1">
               <a:rPr lang="en-US" smtClean="0"/>
-              <a:t>3/8/2020</a:t>
+              <a:t>3/10/2020</a:t>
             </a:fld>
             <a:endParaRPr lang="en-US" dirty="0"/>
           </a:p>
@@ -9528,7 +9529,7 @@
           <a:p>
             <a:fld id="{AD9DEACD-BF6D-423A-A9B6-F7FDB2F8FA86}" type="datetime1">
               <a:rPr lang="en-US" smtClean="0"/>
-              <a:t>3/8/2020</a:t>
+              <a:t>3/10/2020</a:t>
             </a:fld>
             <a:endParaRPr lang="en-US" dirty="0"/>
           </a:p>
@@ -9781,7 +9782,7 @@
           <a:p>
             <a:fld id="{24886110-DB48-415B-AE51-1D16DEC2A997}" type="datetime1">
               <a:rPr lang="en-US" smtClean="0"/>
-              <a:t>3/8/2020</a:t>
+              <a:t>3/10/2020</a:t>
             </a:fld>
             <a:endParaRPr lang="en-US" dirty="0"/>
           </a:p>
@@ -10037,7 +10038,7 @@
           <a:p>
             <a:fld id="{16A03D9E-D050-45A3-B8FE-A436082DC5B5}" type="datetime1">
               <a:rPr lang="en-US" smtClean="0"/>
-              <a:t>3/8/2020</a:t>
+              <a:t>3/10/2020</a:t>
             </a:fld>
             <a:endParaRPr lang="en-US" dirty="0"/>
           </a:p>
@@ -10298,7 +10299,7 @@
           <a:p>
             <a:fld id="{7094CD8F-F50E-4E4E-A619-C83536A21564}" type="datetime1">
               <a:rPr lang="en-US" smtClean="0"/>
-              <a:t>3/8/2020</a:t>
+              <a:t>3/10/2020</a:t>
             </a:fld>
             <a:endParaRPr lang="en-US" dirty="0"/>
           </a:p>
@@ -10498,7 +10499,7 @@
           <a:p>
             <a:fld id="{369190F8-86C8-482D-94FF-2357E3904808}" type="datetime1">
               <a:rPr lang="en-US" smtClean="0"/>
-              <a:t>3/8/2020</a:t>
+              <a:t>3/10/2020</a:t>
             </a:fld>
             <a:endParaRPr lang="en-US" dirty="0"/>
           </a:p>
@@ -10765,7 +10766,7 @@
           <a:p>
             <a:fld id="{7DCCB83B-D0C2-4A7D-ACE4-394E031D1D6D}" type="datetime1">
               <a:rPr lang="en-US" smtClean="0"/>
-              <a:t>3/8/2020</a:t>
+              <a:t>3/10/2020</a:t>
             </a:fld>
             <a:endParaRPr lang="en-US" dirty="0"/>
           </a:p>
@@ -11296,7 +11297,7 @@
           <a:p>
             <a:fld id="{E9AB3734-E0AF-4094-B819-76ED29494144}" type="datetime1">
               <a:rPr lang="en-US" smtClean="0"/>
-              <a:t>3/8/2020</a:t>
+              <a:t>3/10/2020</a:t>
             </a:fld>
             <a:endParaRPr lang="en-US" dirty="0"/>
           </a:p>
@@ -11506,7 +11507,7 @@
           <a:p>
             <a:fld id="{A562CC47-EB05-49E7-BB79-D60F887758B3}" type="datetime1">
               <a:rPr lang="en-US" smtClean="0"/>
-              <a:t>3/8/2020</a:t>
+              <a:t>3/10/2020</a:t>
             </a:fld>
             <a:endParaRPr lang="en-US" dirty="0"/>
           </a:p>
@@ -12056,7 +12057,7 @@
           <a:p>
             <a:fld id="{62DB895A-F06A-4C22-B764-5FE32A2A5F48}" type="datetime1">
               <a:rPr lang="en-US" smtClean="0"/>
-              <a:t>3/8/2020</a:t>
+              <a:t>3/10/2020</a:t>
             </a:fld>
             <a:endParaRPr lang="en-US" dirty="0"/>
           </a:p>
@@ -12780,7 +12781,7 @@
           <a:p>
             <a:fld id="{5D42CFDC-1EF5-4A06-BF89-EF8A8F6CD796}" type="datetime1">
               <a:rPr lang="en-US" smtClean="0"/>
-              <a:t>3/8/2020</a:t>
+              <a:t>3/10/2020</a:t>
             </a:fld>
             <a:endParaRPr lang="en-US" dirty="0"/>
           </a:p>
@@ -12958,7 +12959,7 @@
           <a:p>
             <a:fld id="{13815C30-DF68-4F98-AF35-879B076E4017}" type="datetime1">
               <a:rPr lang="en-US" smtClean="0"/>
-              <a:t>3/8/2020</a:t>
+              <a:t>3/10/2020</a:t>
             </a:fld>
             <a:endParaRPr lang="en-US" dirty="0"/>
           </a:p>
@@ -13142,7 +13143,7 @@
           <a:p>
             <a:fld id="{EC5DC2D5-0D2B-43CA-B09F-4232E3D1DD6E}" type="datetime1">
               <a:rPr lang="en-US" smtClean="0"/>
-              <a:t>3/8/2020</a:t>
+              <a:t>3/10/2020</a:t>
             </a:fld>
             <a:endParaRPr lang="en-US" dirty="0"/>
           </a:p>
@@ -13264,7 +13265,7 @@
           <a:noFill/>
           <a:extLst>
             <a:ext uri="{909E8E84-426E-40dd-AFC4-6F175D3DCCD1}">
-              <a14:hiddenFill xmlns:a14="http://schemas.microsoft.com/office/drawing/2010/main" xmlns="">
+              <a14:hiddenFill xmlns="" xmlns:a14="http://schemas.microsoft.com/office/drawing/2010/main">
                 <a:solidFill>
                   <a:srgbClr val="FFFFFF"/>
                 </a:solidFill>
@@ -13324,7 +13325,7 @@
             </a:ln>
             <a:extLst>
               <a:ext uri="{91240B29-F687-4f45-9708-019B960494DF}">
-                <a14:hiddenLine xmlns:a14="http://schemas.microsoft.com/office/drawing/2010/main" xmlns="" w="9525">
+                <a14:hiddenLine xmlns="" xmlns:a14="http://schemas.microsoft.com/office/drawing/2010/main" w="9525">
                   <a:solidFill>
                     <a:srgbClr val="000000"/>
                   </a:solidFill>
@@ -13414,7 +13415,7 @@
             </a:ln>
             <a:extLst>
               <a:ext uri="{91240B29-F687-4f45-9708-019B960494DF}">
-                <a14:hiddenLine xmlns:a14="http://schemas.microsoft.com/office/drawing/2010/main" xmlns="" w="9525">
+                <a14:hiddenLine xmlns="" xmlns:a14="http://schemas.microsoft.com/office/drawing/2010/main" w="9525">
                   <a:solidFill>
                     <a:srgbClr val="000000"/>
                   </a:solidFill>
@@ -13504,7 +13505,7 @@
             </a:ln>
             <a:extLst>
               <a:ext uri="{91240B29-F687-4f45-9708-019B960494DF}">
-                <a14:hiddenLine xmlns:a14="http://schemas.microsoft.com/office/drawing/2010/main" xmlns="" w="9525">
+                <a14:hiddenLine xmlns="" xmlns:a14="http://schemas.microsoft.com/office/drawing/2010/main" w="9525">
                   <a:solidFill>
                     <a:srgbClr val="000000"/>
                   </a:solidFill>
@@ -13538,7 +13539,7 @@
             </a:ln>
             <a:extLst>
               <a:ext uri="{91240B29-F687-4f45-9708-019B960494DF}">
-                <a14:hiddenLine xmlns:a14="http://schemas.microsoft.com/office/drawing/2010/main" xmlns="" w="9525">
+                <a14:hiddenLine xmlns="" xmlns:a14="http://schemas.microsoft.com/office/drawing/2010/main" w="9525">
                   <a:solidFill>
                     <a:srgbClr val="000000"/>
                   </a:solidFill>
@@ -13628,7 +13629,7 @@
             </a:ln>
             <a:extLst>
               <a:ext uri="{91240B29-F687-4f45-9708-019B960494DF}">
-                <a14:hiddenLine xmlns:a14="http://schemas.microsoft.com/office/drawing/2010/main" xmlns="" w="9525">
+                <a14:hiddenLine xmlns="" xmlns:a14="http://schemas.microsoft.com/office/drawing/2010/main" w="9525">
                   <a:solidFill>
                     <a:srgbClr val="000000"/>
                   </a:solidFill>
@@ -13690,7 +13691,7 @@
             </a:ln>
             <a:extLst>
               <a:ext uri="{91240B29-F687-4f45-9708-019B960494DF}">
-                <a14:hiddenLine xmlns:a14="http://schemas.microsoft.com/office/drawing/2010/main" xmlns="" w="9525">
+                <a14:hiddenLine xmlns="" xmlns:a14="http://schemas.microsoft.com/office/drawing/2010/main" w="9525">
                   <a:solidFill>
                     <a:srgbClr val="000000"/>
                   </a:solidFill>
@@ -13752,7 +13753,7 @@
             </a:ln>
             <a:extLst>
               <a:ext uri="{91240B29-F687-4f45-9708-019B960494DF}">
-                <a14:hiddenLine xmlns:a14="http://schemas.microsoft.com/office/drawing/2010/main" xmlns="" w="9525">
+                <a14:hiddenLine xmlns="" xmlns:a14="http://schemas.microsoft.com/office/drawing/2010/main" w="9525">
                   <a:solidFill>
                     <a:srgbClr val="000000"/>
                   </a:solidFill>
@@ -13842,7 +13843,7 @@
             </a:ln>
             <a:extLst>
               <a:ext uri="{91240B29-F687-4f45-9708-019B960494DF}">
-                <a14:hiddenLine xmlns:a14="http://schemas.microsoft.com/office/drawing/2010/main" xmlns="" w="9525">
+                <a14:hiddenLine xmlns="" xmlns:a14="http://schemas.microsoft.com/office/drawing/2010/main" w="9525">
                   <a:solidFill>
                     <a:srgbClr val="000000"/>
                   </a:solidFill>
@@ -13904,7 +13905,7 @@
             </a:ln>
             <a:extLst>
               <a:ext uri="{91240B29-F687-4f45-9708-019B960494DF}">
-                <a14:hiddenLine xmlns:a14="http://schemas.microsoft.com/office/drawing/2010/main" xmlns="" w="9525">
+                <a14:hiddenLine xmlns="" xmlns:a14="http://schemas.microsoft.com/office/drawing/2010/main" w="9525">
                   <a:solidFill>
                     <a:srgbClr val="000000"/>
                   </a:solidFill>
@@ -13966,7 +13967,7 @@
             </a:ln>
             <a:extLst>
               <a:ext uri="{91240B29-F687-4f45-9708-019B960494DF}">
-                <a14:hiddenLine xmlns:a14="http://schemas.microsoft.com/office/drawing/2010/main" xmlns="" w="9525">
+                <a14:hiddenLine xmlns="" xmlns:a14="http://schemas.microsoft.com/office/drawing/2010/main" w="9525">
                   <a:solidFill>
                     <a:srgbClr val="000000"/>
                   </a:solidFill>
@@ -14056,7 +14057,7 @@
             </a:ln>
             <a:extLst>
               <a:ext uri="{91240B29-F687-4f45-9708-019B960494DF}">
-                <a14:hiddenLine xmlns:a14="http://schemas.microsoft.com/office/drawing/2010/main" xmlns="" w="9525">
+                <a14:hiddenLine xmlns="" xmlns:a14="http://schemas.microsoft.com/office/drawing/2010/main" w="9525">
                   <a:solidFill>
                     <a:srgbClr val="000000"/>
                   </a:solidFill>
@@ -14146,7 +14147,7 @@
             </a:ln>
             <a:extLst>
               <a:ext uri="{91240B29-F687-4f45-9708-019B960494DF}">
-                <a14:hiddenLine xmlns:a14="http://schemas.microsoft.com/office/drawing/2010/main" xmlns="" w="9525">
+                <a14:hiddenLine xmlns="" xmlns:a14="http://schemas.microsoft.com/office/drawing/2010/main" w="9525">
                   <a:solidFill>
                     <a:srgbClr val="000000"/>
                   </a:solidFill>
@@ -14208,7 +14209,7 @@
             </a:ln>
             <a:extLst>
               <a:ext uri="{91240B29-F687-4f45-9708-019B960494DF}">
-                <a14:hiddenLine xmlns:a14="http://schemas.microsoft.com/office/drawing/2010/main" xmlns="" w="9525">
+                <a14:hiddenLine xmlns="" xmlns:a14="http://schemas.microsoft.com/office/drawing/2010/main" w="9525">
                   <a:solidFill>
                     <a:srgbClr val="000000"/>
                   </a:solidFill>
@@ -14318,7 +14319,7 @@
             </a:ln>
             <a:extLst>
               <a:ext uri="{91240B29-F687-4f45-9708-019B960494DF}">
-                <a14:hiddenLine xmlns:a14="http://schemas.microsoft.com/office/drawing/2010/main" xmlns="" w="9525">
+                <a14:hiddenLine xmlns="" xmlns:a14="http://schemas.microsoft.com/office/drawing/2010/main" w="9525">
                   <a:solidFill>
                     <a:srgbClr val="000000"/>
                   </a:solidFill>
@@ -14380,7 +14381,7 @@
             </a:ln>
             <a:extLst>
               <a:ext uri="{91240B29-F687-4f45-9708-019B960494DF}">
-                <a14:hiddenLine xmlns:a14="http://schemas.microsoft.com/office/drawing/2010/main" xmlns="" w="9525">
+                <a14:hiddenLine xmlns="" xmlns:a14="http://schemas.microsoft.com/office/drawing/2010/main" w="9525">
                   <a:solidFill>
                     <a:srgbClr val="000000"/>
                   </a:solidFill>
@@ -14470,7 +14471,7 @@
             </a:ln>
             <a:extLst>
               <a:ext uri="{91240B29-F687-4f45-9708-019B960494DF}">
-                <a14:hiddenLine xmlns:a14="http://schemas.microsoft.com/office/drawing/2010/main" xmlns="" w="9525">
+                <a14:hiddenLine xmlns="" xmlns:a14="http://schemas.microsoft.com/office/drawing/2010/main" w="9525">
                   <a:solidFill>
                     <a:srgbClr val="000000"/>
                   </a:solidFill>
@@ -14560,7 +14561,7 @@
             </a:ln>
             <a:extLst>
               <a:ext uri="{91240B29-F687-4f45-9708-019B960494DF}">
-                <a14:hiddenLine xmlns:a14="http://schemas.microsoft.com/office/drawing/2010/main" xmlns="" w="9525">
+                <a14:hiddenLine xmlns="" xmlns:a14="http://schemas.microsoft.com/office/drawing/2010/main" w="9525">
                   <a:solidFill>
                     <a:srgbClr val="000000"/>
                   </a:solidFill>
@@ -14622,7 +14623,7 @@
             </a:ln>
             <a:extLst>
               <a:ext uri="{91240B29-F687-4f45-9708-019B960494DF}">
-                <a14:hiddenLine xmlns:a14="http://schemas.microsoft.com/office/drawing/2010/main" xmlns="" w="9525">
+                <a14:hiddenLine xmlns="" xmlns:a14="http://schemas.microsoft.com/office/drawing/2010/main" w="9525">
                   <a:solidFill>
                     <a:srgbClr val="000000"/>
                   </a:solidFill>
@@ -14712,7 +14713,7 @@
             </a:ln>
             <a:extLst>
               <a:ext uri="{91240B29-F687-4f45-9708-019B960494DF}">
-                <a14:hiddenLine xmlns:a14="http://schemas.microsoft.com/office/drawing/2010/main" xmlns="" w="9525">
+                <a14:hiddenLine xmlns="" xmlns:a14="http://schemas.microsoft.com/office/drawing/2010/main" w="9525">
                   <a:solidFill>
                     <a:srgbClr val="000000"/>
                   </a:solidFill>
@@ -14802,7 +14803,7 @@
             </a:ln>
             <a:extLst>
               <a:ext uri="{91240B29-F687-4f45-9708-019B960494DF}">
-                <a14:hiddenLine xmlns:a14="http://schemas.microsoft.com/office/drawing/2010/main" xmlns="" w="9525">
+                <a14:hiddenLine xmlns="" xmlns:a14="http://schemas.microsoft.com/office/drawing/2010/main" w="9525">
                   <a:solidFill>
                     <a:srgbClr val="000000"/>
                   </a:solidFill>
@@ -14858,7 +14859,7 @@
             </a:ln>
             <a:extLst>
               <a:ext uri="{91240B29-F687-4f45-9708-019B960494DF}">
-                <a14:hiddenLine xmlns:a14="http://schemas.microsoft.com/office/drawing/2010/main" xmlns="" w="9525">
+                <a14:hiddenLine xmlns="" xmlns:a14="http://schemas.microsoft.com/office/drawing/2010/main" w="9525">
                   <a:solidFill>
                     <a:srgbClr val="000000"/>
                   </a:solidFill>
@@ -14948,7 +14949,7 @@
             </a:ln>
             <a:extLst>
               <a:ext uri="{91240B29-F687-4f45-9708-019B960494DF}">
-                <a14:hiddenLine xmlns:a14="http://schemas.microsoft.com/office/drawing/2010/main" xmlns="" w="9525">
+                <a14:hiddenLine xmlns="" xmlns:a14="http://schemas.microsoft.com/office/drawing/2010/main" w="9525">
                   <a:solidFill>
                     <a:srgbClr val="000000"/>
                   </a:solidFill>
@@ -15004,7 +15005,7 @@
             </a:ln>
             <a:extLst>
               <a:ext uri="{91240B29-F687-4f45-9708-019B960494DF}">
-                <a14:hiddenLine xmlns:a14="http://schemas.microsoft.com/office/drawing/2010/main" xmlns="" w="9525">
+                <a14:hiddenLine xmlns="" xmlns:a14="http://schemas.microsoft.com/office/drawing/2010/main" w="9525">
                   <a:solidFill>
                     <a:srgbClr val="000000"/>
                   </a:solidFill>
@@ -15094,7 +15095,7 @@
             </a:ln>
             <a:extLst>
               <a:ext uri="{91240B29-F687-4f45-9708-019B960494DF}">
-                <a14:hiddenLine xmlns:a14="http://schemas.microsoft.com/office/drawing/2010/main" xmlns="" w="9525">
+                <a14:hiddenLine xmlns="" xmlns:a14="http://schemas.microsoft.com/office/drawing/2010/main" w="9525">
                   <a:solidFill>
                     <a:srgbClr val="000000"/>
                   </a:solidFill>
@@ -15162,7 +15163,7 @@
             </a:ln>
             <a:extLst>
               <a:ext uri="{91240B29-F687-4f45-9708-019B960494DF}">
-                <a14:hiddenLine xmlns:a14="http://schemas.microsoft.com/office/drawing/2010/main" xmlns="" w="9525">
+                <a14:hiddenLine xmlns="" xmlns:a14="http://schemas.microsoft.com/office/drawing/2010/main" w="9525">
                   <a:solidFill>
                     <a:srgbClr val="000000"/>
                   </a:solidFill>
@@ -15252,7 +15253,7 @@
             </a:ln>
             <a:extLst>
               <a:ext uri="{91240B29-F687-4f45-9708-019B960494DF}">
-                <a14:hiddenLine xmlns:a14="http://schemas.microsoft.com/office/drawing/2010/main" xmlns="" w="9525">
+                <a14:hiddenLine xmlns="" xmlns:a14="http://schemas.microsoft.com/office/drawing/2010/main" w="9525">
                   <a:solidFill>
                     <a:srgbClr val="000000"/>
                   </a:solidFill>
@@ -15320,7 +15321,7 @@
             </a:ln>
             <a:extLst>
               <a:ext uri="{91240B29-F687-4f45-9708-019B960494DF}">
-                <a14:hiddenLine xmlns:a14="http://schemas.microsoft.com/office/drawing/2010/main" xmlns="" w="9525">
+                <a14:hiddenLine xmlns="" xmlns:a14="http://schemas.microsoft.com/office/drawing/2010/main" w="9525">
                   <a:solidFill>
                     <a:srgbClr val="000000"/>
                   </a:solidFill>
@@ -15410,7 +15411,7 @@
             </a:ln>
             <a:extLst>
               <a:ext uri="{91240B29-F687-4f45-9708-019B960494DF}">
-                <a14:hiddenLine xmlns:a14="http://schemas.microsoft.com/office/drawing/2010/main" xmlns="" w="9525">
+                <a14:hiddenLine xmlns="" xmlns:a14="http://schemas.microsoft.com/office/drawing/2010/main" w="9525">
                   <a:solidFill>
                     <a:srgbClr val="000000"/>
                   </a:solidFill>
@@ -15444,7 +15445,7 @@
             </a:ln>
             <a:extLst>
               <a:ext uri="{91240B29-F687-4f45-9708-019B960494DF}">
-                <a14:hiddenLine xmlns:a14="http://schemas.microsoft.com/office/drawing/2010/main" xmlns="" w="9525">
+                <a14:hiddenLine xmlns="" xmlns:a14="http://schemas.microsoft.com/office/drawing/2010/main" w="9525">
                   <a:solidFill>
                     <a:srgbClr val="000000"/>
                   </a:solidFill>
@@ -15534,7 +15535,7 @@
             </a:ln>
             <a:extLst>
               <a:ext uri="{91240B29-F687-4f45-9708-019B960494DF}">
-                <a14:hiddenLine xmlns:a14="http://schemas.microsoft.com/office/drawing/2010/main" xmlns="" w="9525">
+                <a14:hiddenLine xmlns="" xmlns:a14="http://schemas.microsoft.com/office/drawing/2010/main" w="9525">
                   <a:solidFill>
                     <a:srgbClr val="000000"/>
                   </a:solidFill>
@@ -15596,7 +15597,7 @@
             </a:ln>
             <a:extLst>
               <a:ext uri="{91240B29-F687-4f45-9708-019B960494DF}">
-                <a14:hiddenLine xmlns:a14="http://schemas.microsoft.com/office/drawing/2010/main" xmlns="" w="9525">
+                <a14:hiddenLine xmlns="" xmlns:a14="http://schemas.microsoft.com/office/drawing/2010/main" w="9525">
                   <a:solidFill>
                     <a:srgbClr val="000000"/>
                   </a:solidFill>
@@ -15658,7 +15659,7 @@
             </a:ln>
             <a:extLst>
               <a:ext uri="{91240B29-F687-4f45-9708-019B960494DF}">
-                <a14:hiddenLine xmlns:a14="http://schemas.microsoft.com/office/drawing/2010/main" xmlns="" w="9525">
+                <a14:hiddenLine xmlns="" xmlns:a14="http://schemas.microsoft.com/office/drawing/2010/main" w="9525">
                   <a:solidFill>
                     <a:srgbClr val="000000"/>
                   </a:solidFill>
@@ -15748,7 +15749,7 @@
             </a:ln>
             <a:extLst>
               <a:ext uri="{91240B29-F687-4f45-9708-019B960494DF}">
-                <a14:hiddenLine xmlns:a14="http://schemas.microsoft.com/office/drawing/2010/main" xmlns="" w="9525">
+                <a14:hiddenLine xmlns="" xmlns:a14="http://schemas.microsoft.com/office/drawing/2010/main" w="9525">
                   <a:solidFill>
                     <a:srgbClr val="000000"/>
                   </a:solidFill>
@@ -15816,7 +15817,7 @@
             </a:ln>
             <a:extLst>
               <a:ext uri="{91240B29-F687-4f45-9708-019B960494DF}">
-                <a14:hiddenLine xmlns:a14="http://schemas.microsoft.com/office/drawing/2010/main" xmlns="" w="9525">
+                <a14:hiddenLine xmlns="" xmlns:a14="http://schemas.microsoft.com/office/drawing/2010/main" w="9525">
                   <a:solidFill>
                     <a:srgbClr val="000000"/>
                   </a:solidFill>
@@ -15878,7 +15879,7 @@
             </a:ln>
             <a:extLst>
               <a:ext uri="{91240B29-F687-4f45-9708-019B960494DF}">
-                <a14:hiddenLine xmlns:a14="http://schemas.microsoft.com/office/drawing/2010/main" xmlns="" w="9525">
+                <a14:hiddenLine xmlns="" xmlns:a14="http://schemas.microsoft.com/office/drawing/2010/main" w="9525">
                   <a:solidFill>
                     <a:srgbClr val="000000"/>
                   </a:solidFill>
@@ -15968,7 +15969,7 @@
             </a:ln>
             <a:extLst>
               <a:ext uri="{91240B29-F687-4f45-9708-019B960494DF}">
-                <a14:hiddenLine xmlns:a14="http://schemas.microsoft.com/office/drawing/2010/main" xmlns="" w="9525">
+                <a14:hiddenLine xmlns="" xmlns:a14="http://schemas.microsoft.com/office/drawing/2010/main" w="9525">
                   <a:solidFill>
                     <a:srgbClr val="000000"/>
                   </a:solidFill>
@@ -16030,7 +16031,7 @@
             </a:ln>
             <a:extLst>
               <a:ext uri="{91240B29-F687-4f45-9708-019B960494DF}">
-                <a14:hiddenLine xmlns:a14="http://schemas.microsoft.com/office/drawing/2010/main" xmlns="" w="9525">
+                <a14:hiddenLine xmlns="" xmlns:a14="http://schemas.microsoft.com/office/drawing/2010/main" w="9525">
                   <a:solidFill>
                     <a:srgbClr val="000000"/>
                   </a:solidFill>
@@ -16120,7 +16121,7 @@
             </a:ln>
             <a:extLst>
               <a:ext uri="{91240B29-F687-4f45-9708-019B960494DF}">
-                <a14:hiddenLine xmlns:a14="http://schemas.microsoft.com/office/drawing/2010/main" xmlns="" w="9525">
+                <a14:hiddenLine xmlns="" xmlns:a14="http://schemas.microsoft.com/office/drawing/2010/main" w="9525">
                   <a:solidFill>
                     <a:srgbClr val="000000"/>
                   </a:solidFill>
@@ -16182,7 +16183,7 @@
             </a:ln>
             <a:extLst>
               <a:ext uri="{91240B29-F687-4f45-9708-019B960494DF}">
-                <a14:hiddenLine xmlns:a14="http://schemas.microsoft.com/office/drawing/2010/main" xmlns="" w="9525">
+                <a14:hiddenLine xmlns="" xmlns:a14="http://schemas.microsoft.com/office/drawing/2010/main" w="9525">
                   <a:solidFill>
                     <a:srgbClr val="000000"/>
                   </a:solidFill>
@@ -16272,7 +16273,7 @@
             </a:ln>
             <a:extLst>
               <a:ext uri="{91240B29-F687-4f45-9708-019B960494DF}">
-                <a14:hiddenLine xmlns:a14="http://schemas.microsoft.com/office/drawing/2010/main" xmlns="" w="9525">
+                <a14:hiddenLine xmlns="" xmlns:a14="http://schemas.microsoft.com/office/drawing/2010/main" w="9525">
                   <a:solidFill>
                     <a:srgbClr val="000000"/>
                   </a:solidFill>
@@ -16306,7 +16307,7 @@
             </a:ln>
             <a:extLst>
               <a:ext uri="{91240B29-F687-4f45-9708-019B960494DF}">
-                <a14:hiddenLine xmlns:a14="http://schemas.microsoft.com/office/drawing/2010/main" xmlns="" w="9525">
+                <a14:hiddenLine xmlns="" xmlns:a14="http://schemas.microsoft.com/office/drawing/2010/main" w="9525">
                   <a:solidFill>
                     <a:srgbClr val="000000"/>
                   </a:solidFill>
@@ -16371,7 +16372,7 @@
             </a:ln>
             <a:extLst>
               <a:ext uri="{91240B29-F687-4f45-9708-019B960494DF}">
-                <a14:hiddenLine xmlns:a14="http://schemas.microsoft.com/office/drawing/2010/main" xmlns="" w="9525">
+                <a14:hiddenLine xmlns="" xmlns:a14="http://schemas.microsoft.com/office/drawing/2010/main" w="9525">
                   <a:solidFill>
                     <a:srgbClr val="000000"/>
                   </a:solidFill>
@@ -16461,7 +16462,7 @@
             </a:ln>
             <a:extLst>
               <a:ext uri="{91240B29-F687-4f45-9708-019B960494DF}">
-                <a14:hiddenLine xmlns:a14="http://schemas.microsoft.com/office/drawing/2010/main" xmlns="" w="9525">
+                <a14:hiddenLine xmlns="" xmlns:a14="http://schemas.microsoft.com/office/drawing/2010/main" w="9525">
                   <a:solidFill>
                     <a:srgbClr val="000000"/>
                   </a:solidFill>
@@ -16523,7 +16524,7 @@
             </a:ln>
             <a:extLst>
               <a:ext uri="{91240B29-F687-4f45-9708-019B960494DF}">
-                <a14:hiddenLine xmlns:a14="http://schemas.microsoft.com/office/drawing/2010/main" xmlns="" w="9525">
+                <a14:hiddenLine xmlns="" xmlns:a14="http://schemas.microsoft.com/office/drawing/2010/main" w="9525">
                   <a:solidFill>
                     <a:srgbClr val="000000"/>
                   </a:solidFill>
@@ -16613,7 +16614,7 @@
             </a:ln>
             <a:extLst>
               <a:ext uri="{91240B29-F687-4f45-9708-019B960494DF}">
-                <a14:hiddenLine xmlns:a14="http://schemas.microsoft.com/office/drawing/2010/main" xmlns="" w="9525">
+                <a14:hiddenLine xmlns="" xmlns:a14="http://schemas.microsoft.com/office/drawing/2010/main" w="9525">
                   <a:solidFill>
                     <a:srgbClr val="000000"/>
                   </a:solidFill>
@@ -16703,7 +16704,7 @@
             </a:ln>
             <a:extLst>
               <a:ext uri="{91240B29-F687-4f45-9708-019B960494DF}">
-                <a14:hiddenLine xmlns:a14="http://schemas.microsoft.com/office/drawing/2010/main" xmlns="" w="9525">
+                <a14:hiddenLine xmlns="" xmlns:a14="http://schemas.microsoft.com/office/drawing/2010/main" w="9525">
                   <a:solidFill>
                     <a:srgbClr val="000000"/>
                   </a:solidFill>
@@ -16768,7 +16769,7 @@
             </a:ln>
             <a:extLst>
               <a:ext uri="{91240B29-F687-4f45-9708-019B960494DF}">
-                <a14:hiddenLine xmlns:a14="http://schemas.microsoft.com/office/drawing/2010/main" xmlns="" w="9525">
+                <a14:hiddenLine xmlns="" xmlns:a14="http://schemas.microsoft.com/office/drawing/2010/main" w="9525">
                   <a:solidFill>
                     <a:srgbClr val="000000"/>
                   </a:solidFill>
@@ -16830,7 +16831,7 @@
             </a:ln>
             <a:extLst>
               <a:ext uri="{91240B29-F687-4f45-9708-019B960494DF}">
-                <a14:hiddenLine xmlns:a14="http://schemas.microsoft.com/office/drawing/2010/main" xmlns="" w="9525">
+                <a14:hiddenLine xmlns="" xmlns:a14="http://schemas.microsoft.com/office/drawing/2010/main" w="9525">
                   <a:solidFill>
                     <a:srgbClr val="000000"/>
                   </a:solidFill>
@@ -16920,7 +16921,7 @@
             </a:ln>
             <a:extLst>
               <a:ext uri="{91240B29-F687-4f45-9708-019B960494DF}">
-                <a14:hiddenLine xmlns:a14="http://schemas.microsoft.com/office/drawing/2010/main" xmlns="" w="9525">
+                <a14:hiddenLine xmlns="" xmlns:a14="http://schemas.microsoft.com/office/drawing/2010/main" w="9525">
                   <a:solidFill>
                     <a:srgbClr val="000000"/>
                   </a:solidFill>
@@ -17010,7 +17011,7 @@
             </a:ln>
             <a:extLst>
               <a:ext uri="{91240B29-F687-4f45-9708-019B960494DF}">
-                <a14:hiddenLine xmlns:a14="http://schemas.microsoft.com/office/drawing/2010/main" xmlns="" w="9525">
+                <a14:hiddenLine xmlns="" xmlns:a14="http://schemas.microsoft.com/office/drawing/2010/main" w="9525">
                   <a:solidFill>
                     <a:srgbClr val="000000"/>
                   </a:solidFill>
@@ -17072,7 +17073,7 @@
             </a:ln>
             <a:extLst>
               <a:ext uri="{91240B29-F687-4f45-9708-019B960494DF}">
-                <a14:hiddenLine xmlns:a14="http://schemas.microsoft.com/office/drawing/2010/main" xmlns="" w="9525">
+                <a14:hiddenLine xmlns="" xmlns:a14="http://schemas.microsoft.com/office/drawing/2010/main" w="9525">
                   <a:solidFill>
                     <a:srgbClr val="000000"/>
                   </a:solidFill>
@@ -17192,7 +17193,7 @@
             </a:ln>
             <a:extLst>
               <a:ext uri="{91240B29-F687-4f45-9708-019B960494DF}">
-                <a14:hiddenLine xmlns:a14="http://schemas.microsoft.com/office/drawing/2010/main" xmlns="" w="9525">
+                <a14:hiddenLine xmlns="" xmlns:a14="http://schemas.microsoft.com/office/drawing/2010/main" w="9525">
                   <a:solidFill>
                     <a:srgbClr val="000000"/>
                   </a:solidFill>
@@ -17260,7 +17261,7 @@
             </a:ln>
             <a:extLst>
               <a:ext uri="{91240B29-F687-4f45-9708-019B960494DF}">
-                <a14:hiddenLine xmlns:a14="http://schemas.microsoft.com/office/drawing/2010/main" xmlns="" w="9525">
+                <a14:hiddenLine xmlns="" xmlns:a14="http://schemas.microsoft.com/office/drawing/2010/main" w="9525">
                   <a:solidFill>
                     <a:srgbClr val="000000"/>
                   </a:solidFill>
@@ -17350,7 +17351,7 @@
             </a:ln>
             <a:extLst>
               <a:ext uri="{91240B29-F687-4f45-9708-019B960494DF}">
-                <a14:hiddenLine xmlns:a14="http://schemas.microsoft.com/office/drawing/2010/main" xmlns="" w="9525">
+                <a14:hiddenLine xmlns="" xmlns:a14="http://schemas.microsoft.com/office/drawing/2010/main" w="9525">
                   <a:solidFill>
                     <a:srgbClr val="000000"/>
                   </a:solidFill>
@@ -17490,7 +17491,7 @@
           <a:p>
             <a:fld id="{47147380-C9A6-4292-80AD-55D5D6A2AAE3}" type="datetime1">
               <a:rPr lang="en-US" smtClean="0"/>
-              <a:t>3/8/2020</a:t>
+              <a:t>3/10/2020</a:t>
             </a:fld>
             <a:endParaRPr lang="en-US" dirty="0"/>
           </a:p>
@@ -17689,7 +17690,7 @@
           <a:p>
             <a:fld id="{4E46DBC0-D5DE-45A0-9330-4563F7536B4E}" type="datetime1">
               <a:rPr lang="en-US" smtClean="0"/>
-              <a:t>3/8/2020</a:t>
+              <a:t>3/10/2020</a:t>
             </a:fld>
             <a:endParaRPr lang="en-US" dirty="0"/>
           </a:p>
@@ -17953,7 +17954,7 @@
           <a:p>
             <a:fld id="{E9AB3734-E0AF-4094-B819-76ED29494144}" type="datetime1">
               <a:rPr lang="en-US" smtClean="0"/>
-              <a:t>3/8/2020</a:t>
+              <a:t>3/10/2020</a:t>
             </a:fld>
             <a:endParaRPr lang="en-US" dirty="0"/>
           </a:p>
@@ -18189,7 +18190,7 @@
           <a:p>
             <a:fld id="{46249C16-8A15-4B1C-86DD-7EF5F36FF546}" type="datetime1">
               <a:rPr lang="en-US" smtClean="0"/>
-              <a:t>3/8/2020</a:t>
+              <a:t>3/10/2020</a:t>
             </a:fld>
             <a:endParaRPr lang="en-US" dirty="0"/>
           </a:p>
@@ -18574,7 +18575,7 @@
           <a:p>
             <a:fld id="{1AB8A156-96D8-493F-98C7-4297A490F926}" type="datetime1">
               <a:rPr lang="en-US" smtClean="0"/>
-              <a:t>3/8/2020</a:t>
+              <a:t>3/10/2020</a:t>
             </a:fld>
             <a:endParaRPr lang="en-US" dirty="0"/>
           </a:p>
@@ -18810,7 +18811,7 @@
           <a:p>
             <a:fld id="{46249C16-8A15-4B1C-86DD-7EF5F36FF546}" type="datetime1">
               <a:rPr lang="en-US" smtClean="0"/>
-              <a:t>3/8/2020</a:t>
+              <a:t>3/10/2020</a:t>
             </a:fld>
             <a:endParaRPr lang="en-US" dirty="0"/>
           </a:p>
@@ -18932,7 +18933,7 @@
           <a:p>
             <a:fld id="{6EFEADFD-5DAD-460C-9ABC-D0BAD649D43B}" type="datetime1">
               <a:rPr lang="en-US" smtClean="0"/>
-              <a:t>3/8/2020</a:t>
+              <a:t>3/10/2020</a:t>
             </a:fld>
             <a:endParaRPr lang="en-US" dirty="0"/>
           </a:p>
@@ -19031,7 +19032,7 @@
           <a:p>
             <a:fld id="{AD9DEACD-BF6D-423A-A9B6-F7FDB2F8FA86}" type="datetime1">
               <a:rPr lang="en-US" smtClean="0"/>
-              <a:t>3/8/2020</a:t>
+              <a:t>3/10/2020</a:t>
             </a:fld>
             <a:endParaRPr lang="en-US" dirty="0"/>
           </a:p>
@@ -19284,7 +19285,7 @@
           <a:p>
             <a:fld id="{24886110-DB48-415B-AE51-1D16DEC2A997}" type="datetime1">
               <a:rPr lang="en-US" smtClean="0"/>
-              <a:t>3/8/2020</a:t>
+              <a:t>3/10/2020</a:t>
             </a:fld>
             <a:endParaRPr lang="en-US" dirty="0"/>
           </a:p>
@@ -19540,7 +19541,7 @@
           <a:p>
             <a:fld id="{16A03D9E-D050-45A3-B8FE-A436082DC5B5}" type="datetime1">
               <a:rPr lang="en-US" smtClean="0"/>
-              <a:t>3/8/2020</a:t>
+              <a:t>3/10/2020</a:t>
             </a:fld>
             <a:endParaRPr lang="en-US" dirty="0"/>
           </a:p>
@@ -19801,7 +19802,7 @@
           <a:p>
             <a:fld id="{7094CD8F-F50E-4E4E-A619-C83536A21564}" type="datetime1">
               <a:rPr lang="en-US" smtClean="0"/>
-              <a:t>3/8/2020</a:t>
+              <a:t>3/10/2020</a:t>
             </a:fld>
             <a:endParaRPr lang="en-US" dirty="0"/>
           </a:p>
@@ -20001,7 +20002,7 @@
           <a:p>
             <a:fld id="{369190F8-86C8-482D-94FF-2357E3904808}" type="datetime1">
               <a:rPr lang="en-US" smtClean="0"/>
-              <a:t>3/8/2020</a:t>
+              <a:t>3/10/2020</a:t>
             </a:fld>
             <a:endParaRPr lang="en-US" dirty="0"/>
           </a:p>
@@ -20268,7 +20269,7 @@
           <a:p>
             <a:fld id="{7DCCB83B-D0C2-4A7D-ACE4-394E031D1D6D}" type="datetime1">
               <a:rPr lang="en-US" smtClean="0"/>
-              <a:t>3/8/2020</a:t>
+              <a:t>3/10/2020</a:t>
             </a:fld>
             <a:endParaRPr lang="en-US" dirty="0"/>
           </a:p>
@@ -20706,7 +20707,7 @@
           <a:p>
             <a:fld id="{A562CC47-EB05-49E7-BB79-D60F887758B3}" type="datetime1">
               <a:rPr lang="en-US" smtClean="0"/>
-              <a:t>3/8/2020</a:t>
+              <a:t>3/10/2020</a:t>
             </a:fld>
             <a:endParaRPr lang="en-US" dirty="0"/>
           </a:p>
@@ -21256,7 +21257,7 @@
           <a:p>
             <a:fld id="{62DB895A-F06A-4C22-B764-5FE32A2A5F48}" type="datetime1">
               <a:rPr lang="en-US" smtClean="0"/>
-              <a:t>3/8/2020</a:t>
+              <a:t>3/10/2020</a:t>
             </a:fld>
             <a:endParaRPr lang="en-US" dirty="0"/>
           </a:p>
@@ -21980,7 +21981,7 @@
           <a:p>
             <a:fld id="{5D42CFDC-1EF5-4A06-BF89-EF8A8F6CD796}" type="datetime1">
               <a:rPr lang="en-US" smtClean="0"/>
-              <a:t>3/8/2020</a:t>
+              <a:t>3/10/2020</a:t>
             </a:fld>
             <a:endParaRPr lang="en-US" dirty="0"/>
           </a:p>
@@ -22367,7 +22368,7 @@
           <a:p>
             <a:fld id="{1AB8A156-96D8-493F-98C7-4297A490F926}" type="datetime1">
               <a:rPr lang="en-US" smtClean="0"/>
-              <a:t>3/8/2020</a:t>
+              <a:t>3/10/2020</a:t>
             </a:fld>
             <a:endParaRPr lang="en-US" dirty="0"/>
           </a:p>
@@ -22541,7 +22542,7 @@
           <a:p>
             <a:fld id="{13815C30-DF68-4F98-AF35-879B076E4017}" type="datetime1">
               <a:rPr lang="en-US" smtClean="0"/>
-              <a:t>3/8/2020</a:t>
+              <a:t>3/10/2020</a:t>
             </a:fld>
             <a:endParaRPr lang="en-US" dirty="0"/>
           </a:p>
@@ -22725,7 +22726,7 @@
           <a:p>
             <a:fld id="{EC5DC2D5-0D2B-43CA-B09F-4232E3D1DD6E}" type="datetime1">
               <a:rPr lang="en-US" smtClean="0"/>
-              <a:t>3/8/2020</a:t>
+              <a:t>3/10/2020</a:t>
             </a:fld>
             <a:endParaRPr lang="en-US" dirty="0"/>
           </a:p>
@@ -22847,7 +22848,7 @@
           <a:p>
             <a:fld id="{6EFEADFD-5DAD-460C-9ABC-D0BAD649D43B}" type="datetime1">
               <a:rPr lang="en-US" smtClean="0"/>
-              <a:t>3/8/2020</a:t>
+              <a:t>3/10/2020</a:t>
             </a:fld>
             <a:endParaRPr lang="en-US" dirty="0"/>
           </a:p>
@@ -22946,7 +22947,7 @@
           <a:p>
             <a:fld id="{AD9DEACD-BF6D-423A-A9B6-F7FDB2F8FA86}" type="datetime1">
               <a:rPr lang="en-US" smtClean="0"/>
-              <a:t>3/8/2020</a:t>
+              <a:t>3/10/2020</a:t>
             </a:fld>
             <a:endParaRPr lang="en-US" dirty="0"/>
           </a:p>
@@ -23199,7 +23200,7 @@
           <a:p>
             <a:fld id="{24886110-DB48-415B-AE51-1D16DEC2A997}" type="datetime1">
               <a:rPr lang="en-US" smtClean="0"/>
-              <a:t>3/8/2020</a:t>
+              <a:t>3/10/2020</a:t>
             </a:fld>
             <a:endParaRPr lang="en-US" dirty="0"/>
           </a:p>
@@ -23460,7 +23461,7 @@
           <a:p>
             <a:fld id="{16A03D9E-D050-45A3-B8FE-A436082DC5B5}" type="datetime1">
               <a:rPr lang="en-US" smtClean="0"/>
-              <a:t>3/8/2020</a:t>
+              <a:t>3/10/2020</a:t>
             </a:fld>
             <a:endParaRPr lang="en-US" dirty="0"/>
           </a:p>
@@ -23707,7 +23708,7 @@
           <a:p>
             <a:fld id="{7F79E6DD-7D26-4810-9CFA-3D3006F5FBB0}" type="datetime1">
               <a:rPr lang="en-US" smtClean="0"/>
-              <a:t>3/8/2020</a:t>
+              <a:t>3/10/2020</a:t>
             </a:fld>
             <a:endParaRPr lang="en-US" dirty="0"/>
           </a:p>
@@ -24169,7 +24170,7 @@
           <a:noFill/>
           <a:extLst>
             <a:ext uri="{909E8E84-426E-40dd-AFC4-6F175D3DCCD1}">
-              <a14:hiddenFill xmlns:a14="http://schemas.microsoft.com/office/drawing/2010/main" xmlns="">
+              <a14:hiddenFill xmlns="" xmlns:a14="http://schemas.microsoft.com/office/drawing/2010/main">
                 <a:solidFill>
                   <a:srgbClr val="FFFFFF"/>
                 </a:solidFill>
@@ -24243,7 +24244,7 @@
               </a:ln>
               <a:extLst>
                 <a:ext uri="{91240B29-F687-4f45-9708-019B960494DF}">
-                  <a14:hiddenLine xmlns:a14="http://schemas.microsoft.com/office/drawing/2010/main" xmlns="" w="9525">
+                  <a14:hiddenLine xmlns="" xmlns:a14="http://schemas.microsoft.com/office/drawing/2010/main" w="9525">
                     <a:solidFill>
                       <a:srgbClr val="000000"/>
                     </a:solidFill>
@@ -24333,7 +24334,7 @@
               </a:ln>
               <a:extLst>
                 <a:ext uri="{91240B29-F687-4f45-9708-019B960494DF}">
-                  <a14:hiddenLine xmlns:a14="http://schemas.microsoft.com/office/drawing/2010/main" xmlns="" w="9525">
+                  <a14:hiddenLine xmlns="" xmlns:a14="http://schemas.microsoft.com/office/drawing/2010/main" w="9525">
                     <a:solidFill>
                       <a:srgbClr val="000000"/>
                     </a:solidFill>
@@ -24423,7 +24424,7 @@
               </a:ln>
               <a:extLst>
                 <a:ext uri="{91240B29-F687-4f45-9708-019B960494DF}">
-                  <a14:hiddenLine xmlns:a14="http://schemas.microsoft.com/office/drawing/2010/main" xmlns="" w="9525">
+                  <a14:hiddenLine xmlns="" xmlns:a14="http://schemas.microsoft.com/office/drawing/2010/main" w="9525">
                     <a:solidFill>
                       <a:srgbClr val="000000"/>
                     </a:solidFill>
@@ -24485,7 +24486,7 @@
               </a:ln>
               <a:extLst>
                 <a:ext uri="{91240B29-F687-4f45-9708-019B960494DF}">
-                  <a14:hiddenLine xmlns:a14="http://schemas.microsoft.com/office/drawing/2010/main" xmlns="" w="9525">
+                  <a14:hiddenLine xmlns="" xmlns:a14="http://schemas.microsoft.com/office/drawing/2010/main" w="9525">
                     <a:solidFill>
                       <a:srgbClr val="000000"/>
                     </a:solidFill>
@@ -24575,7 +24576,7 @@
               </a:ln>
               <a:extLst>
                 <a:ext uri="{91240B29-F687-4f45-9708-019B960494DF}">
-                  <a14:hiddenLine xmlns:a14="http://schemas.microsoft.com/office/drawing/2010/main" xmlns="" w="9525">
+                  <a14:hiddenLine xmlns="" xmlns:a14="http://schemas.microsoft.com/office/drawing/2010/main" w="9525">
                     <a:solidFill>
                       <a:srgbClr val="000000"/>
                     </a:solidFill>
@@ -24637,7 +24638,7 @@
               </a:ln>
               <a:extLst>
                 <a:ext uri="{91240B29-F687-4f45-9708-019B960494DF}">
-                  <a14:hiddenLine xmlns:a14="http://schemas.microsoft.com/office/drawing/2010/main" xmlns="" w="9525">
+                  <a14:hiddenLine xmlns="" xmlns:a14="http://schemas.microsoft.com/office/drawing/2010/main" w="9525">
                     <a:solidFill>
                       <a:srgbClr val="000000"/>
                     </a:solidFill>
@@ -24699,7 +24700,7 @@
               </a:ln>
               <a:extLst>
                 <a:ext uri="{91240B29-F687-4f45-9708-019B960494DF}">
-                  <a14:hiddenLine xmlns:a14="http://schemas.microsoft.com/office/drawing/2010/main" xmlns="" w="9525">
+                  <a14:hiddenLine xmlns="" xmlns:a14="http://schemas.microsoft.com/office/drawing/2010/main" w="9525">
                     <a:solidFill>
                       <a:srgbClr val="000000"/>
                     </a:solidFill>
@@ -24789,7 +24790,7 @@
               </a:ln>
               <a:extLst>
                 <a:ext uri="{91240B29-F687-4f45-9708-019B960494DF}">
-                  <a14:hiddenLine xmlns:a14="http://schemas.microsoft.com/office/drawing/2010/main" xmlns="" w="9525">
+                  <a14:hiddenLine xmlns="" xmlns:a14="http://schemas.microsoft.com/office/drawing/2010/main" w="9525">
                     <a:solidFill>
                       <a:srgbClr val="000000"/>
                     </a:solidFill>
@@ -24879,7 +24880,7 @@
               </a:ln>
               <a:extLst>
                 <a:ext uri="{91240B29-F687-4f45-9708-019B960494DF}">
-                  <a14:hiddenLine xmlns:a14="http://schemas.microsoft.com/office/drawing/2010/main" xmlns="" w="9525">
+                  <a14:hiddenLine xmlns="" xmlns:a14="http://schemas.microsoft.com/office/drawing/2010/main" w="9525">
                     <a:solidFill>
                       <a:srgbClr val="000000"/>
                     </a:solidFill>
@@ -24941,7 +24942,7 @@
               </a:ln>
               <a:extLst>
                 <a:ext uri="{91240B29-F687-4f45-9708-019B960494DF}">
-                  <a14:hiddenLine xmlns:a14="http://schemas.microsoft.com/office/drawing/2010/main" xmlns="" w="9525">
+                  <a14:hiddenLine xmlns="" xmlns:a14="http://schemas.microsoft.com/office/drawing/2010/main" w="9525">
                     <a:solidFill>
                       <a:srgbClr val="000000"/>
                     </a:solidFill>
@@ -25051,7 +25052,7 @@
               </a:ln>
               <a:extLst>
                 <a:ext uri="{91240B29-F687-4f45-9708-019B960494DF}">
-                  <a14:hiddenLine xmlns:a14="http://schemas.microsoft.com/office/drawing/2010/main" xmlns="" w="9525">
+                  <a14:hiddenLine xmlns="" xmlns:a14="http://schemas.microsoft.com/office/drawing/2010/main" w="9525">
                     <a:solidFill>
                       <a:srgbClr val="000000"/>
                     </a:solidFill>
@@ -25135,7 +25136,7 @@
               </a:ln>
               <a:extLst>
                 <a:ext uri="{91240B29-F687-4f45-9708-019B960494DF}">
-                  <a14:hiddenLine xmlns:a14="http://schemas.microsoft.com/office/drawing/2010/main" xmlns="" w="9525">
+                  <a14:hiddenLine xmlns="" xmlns:a14="http://schemas.microsoft.com/office/drawing/2010/main" w="9525">
                     <a:solidFill>
                       <a:srgbClr val="000000"/>
                     </a:solidFill>
@@ -25197,7 +25198,7 @@
               </a:ln>
               <a:extLst>
                 <a:ext uri="{91240B29-F687-4f45-9708-019B960494DF}">
-                  <a14:hiddenLine xmlns:a14="http://schemas.microsoft.com/office/drawing/2010/main" xmlns="" w="9525">
+                  <a14:hiddenLine xmlns="" xmlns:a14="http://schemas.microsoft.com/office/drawing/2010/main" w="9525">
                     <a:solidFill>
                       <a:srgbClr val="000000"/>
                     </a:solidFill>
@@ -25259,7 +25260,7 @@
               </a:ln>
               <a:extLst>
                 <a:ext uri="{91240B29-F687-4f45-9708-019B960494DF}">
-                  <a14:hiddenLine xmlns:a14="http://schemas.microsoft.com/office/drawing/2010/main" xmlns="" w="9525">
+                  <a14:hiddenLine xmlns="" xmlns:a14="http://schemas.microsoft.com/office/drawing/2010/main" w="9525">
                     <a:solidFill>
                       <a:srgbClr val="000000"/>
                     </a:solidFill>
@@ -25349,7 +25350,7 @@
               </a:ln>
               <a:extLst>
                 <a:ext uri="{91240B29-F687-4f45-9708-019B960494DF}">
-                  <a14:hiddenLine xmlns:a14="http://schemas.microsoft.com/office/drawing/2010/main" xmlns="" w="9525">
+                  <a14:hiddenLine xmlns="" xmlns:a14="http://schemas.microsoft.com/office/drawing/2010/main" w="9525">
                     <a:solidFill>
                       <a:srgbClr val="000000"/>
                     </a:solidFill>
@@ -25383,7 +25384,7 @@
               </a:ln>
               <a:extLst>
                 <a:ext uri="{91240B29-F687-4f45-9708-019B960494DF}">
-                  <a14:hiddenLine xmlns:a14="http://schemas.microsoft.com/office/drawing/2010/main" xmlns="" w="9525">
+                  <a14:hiddenLine xmlns="" xmlns:a14="http://schemas.microsoft.com/office/drawing/2010/main" w="9525">
                     <a:solidFill>
                       <a:srgbClr val="000000"/>
                     </a:solidFill>
@@ -25448,7 +25449,7 @@
               </a:ln>
               <a:extLst>
                 <a:ext uri="{91240B29-F687-4f45-9708-019B960494DF}">
-                  <a14:hiddenLine xmlns:a14="http://schemas.microsoft.com/office/drawing/2010/main" xmlns="" w="9525">
+                  <a14:hiddenLine xmlns="" xmlns:a14="http://schemas.microsoft.com/office/drawing/2010/main" w="9525">
                     <a:solidFill>
                       <a:srgbClr val="000000"/>
                     </a:solidFill>
@@ -25538,7 +25539,7 @@
               </a:ln>
               <a:extLst>
                 <a:ext uri="{91240B29-F687-4f45-9708-019B960494DF}">
-                  <a14:hiddenLine xmlns:a14="http://schemas.microsoft.com/office/drawing/2010/main" xmlns="" w="9525">
+                  <a14:hiddenLine xmlns="" xmlns:a14="http://schemas.microsoft.com/office/drawing/2010/main" w="9525">
                     <a:solidFill>
                       <a:srgbClr val="000000"/>
                     </a:solidFill>
@@ -25600,7 +25601,7 @@
               </a:ln>
               <a:extLst>
                 <a:ext uri="{91240B29-F687-4f45-9708-019B960494DF}">
-                  <a14:hiddenLine xmlns:a14="http://schemas.microsoft.com/office/drawing/2010/main" xmlns="" w="9525">
+                  <a14:hiddenLine xmlns="" xmlns:a14="http://schemas.microsoft.com/office/drawing/2010/main" w="9525">
                     <a:solidFill>
                       <a:srgbClr val="000000"/>
                     </a:solidFill>
@@ -25690,7 +25691,7 @@
               </a:ln>
               <a:extLst>
                 <a:ext uri="{91240B29-F687-4f45-9708-019B960494DF}">
-                  <a14:hiddenLine xmlns:a14="http://schemas.microsoft.com/office/drawing/2010/main" xmlns="" w="9525">
+                  <a14:hiddenLine xmlns="" xmlns:a14="http://schemas.microsoft.com/office/drawing/2010/main" w="9525">
                     <a:solidFill>
                       <a:srgbClr val="000000"/>
                     </a:solidFill>
@@ -25755,7 +25756,7 @@
               </a:ln>
               <a:extLst>
                 <a:ext uri="{91240B29-F687-4f45-9708-019B960494DF}">
-                  <a14:hiddenLine xmlns:a14="http://schemas.microsoft.com/office/drawing/2010/main" xmlns="" w="9525">
+                  <a14:hiddenLine xmlns="" xmlns:a14="http://schemas.microsoft.com/office/drawing/2010/main" w="9525">
                     <a:solidFill>
                       <a:srgbClr val="000000"/>
                     </a:solidFill>
@@ -25817,7 +25818,7 @@
               </a:ln>
               <a:extLst>
                 <a:ext uri="{91240B29-F687-4f45-9708-019B960494DF}">
-                  <a14:hiddenLine xmlns:a14="http://schemas.microsoft.com/office/drawing/2010/main" xmlns="" w="9525">
+                  <a14:hiddenLine xmlns="" xmlns:a14="http://schemas.microsoft.com/office/drawing/2010/main" w="9525">
                     <a:solidFill>
                       <a:srgbClr val="000000"/>
                     </a:solidFill>
@@ -25907,7 +25908,7 @@
               </a:ln>
               <a:extLst>
                 <a:ext uri="{91240B29-F687-4f45-9708-019B960494DF}">
-                  <a14:hiddenLine xmlns:a14="http://schemas.microsoft.com/office/drawing/2010/main" xmlns="" w="9525">
+                  <a14:hiddenLine xmlns="" xmlns:a14="http://schemas.microsoft.com/office/drawing/2010/main" w="9525">
                     <a:solidFill>
                       <a:srgbClr val="000000"/>
                     </a:solidFill>
@@ -25997,7 +25998,7 @@
               </a:ln>
               <a:extLst>
                 <a:ext uri="{91240B29-F687-4f45-9708-019B960494DF}">
-                  <a14:hiddenLine xmlns:a14="http://schemas.microsoft.com/office/drawing/2010/main" xmlns="" w="9525">
+                  <a14:hiddenLine xmlns="" xmlns:a14="http://schemas.microsoft.com/office/drawing/2010/main" w="9525">
                     <a:solidFill>
                       <a:srgbClr val="000000"/>
                     </a:solidFill>
@@ -26062,7 +26063,7 @@
               </a:ln>
               <a:extLst>
                 <a:ext uri="{91240B29-F687-4f45-9708-019B960494DF}">
-                  <a14:hiddenLine xmlns:a14="http://schemas.microsoft.com/office/drawing/2010/main" xmlns="" w="9525">
+                  <a14:hiddenLine xmlns="" xmlns:a14="http://schemas.microsoft.com/office/drawing/2010/main" w="9525">
                     <a:solidFill>
                       <a:srgbClr val="000000"/>
                     </a:solidFill>
@@ -26182,7 +26183,7 @@
               </a:ln>
               <a:extLst>
                 <a:ext uri="{91240B29-F687-4f45-9708-019B960494DF}">
-                  <a14:hiddenLine xmlns:a14="http://schemas.microsoft.com/office/drawing/2010/main" xmlns="" w="9525">
+                  <a14:hiddenLine xmlns="" xmlns:a14="http://schemas.microsoft.com/office/drawing/2010/main" w="9525">
                     <a:solidFill>
                       <a:srgbClr val="000000"/>
                     </a:solidFill>
@@ -26263,7 +26264,7 @@
               </a:ln>
               <a:extLst>
                 <a:ext uri="{91240B29-F687-4f45-9708-019B960494DF}">
-                  <a14:hiddenLine xmlns:a14="http://schemas.microsoft.com/office/drawing/2010/main" xmlns="" w="9525">
+                  <a14:hiddenLine xmlns="" xmlns:a14="http://schemas.microsoft.com/office/drawing/2010/main" w="9525">
                     <a:solidFill>
                       <a:srgbClr val="000000"/>
                     </a:solidFill>
@@ -26378,7 +26379,7 @@
               </a:ln>
               <a:extLst>
                 <a:ext uri="{91240B29-F687-4f45-9708-019B960494DF}">
-                  <a14:hiddenLine xmlns:a14="http://schemas.microsoft.com/office/drawing/2010/main" xmlns="" w="9525">
+                  <a14:hiddenLine xmlns="" xmlns:a14="http://schemas.microsoft.com/office/drawing/2010/main" w="9525">
                     <a:solidFill>
                       <a:srgbClr val="000000"/>
                     </a:solidFill>
@@ -26468,7 +26469,7 @@
               </a:ln>
               <a:extLst>
                 <a:ext uri="{91240B29-F687-4f45-9708-019B960494DF}">
-                  <a14:hiddenLine xmlns:a14="http://schemas.microsoft.com/office/drawing/2010/main" xmlns="" w="9525">
+                  <a14:hiddenLine xmlns="" xmlns:a14="http://schemas.microsoft.com/office/drawing/2010/main" w="9525">
                     <a:solidFill>
                       <a:srgbClr val="000000"/>
                     </a:solidFill>
@@ -26533,7 +26534,7 @@
               </a:ln>
               <a:extLst>
                 <a:ext uri="{91240B29-F687-4f45-9708-019B960494DF}">
-                  <a14:hiddenLine xmlns:a14="http://schemas.microsoft.com/office/drawing/2010/main" xmlns="" w="9525">
+                  <a14:hiddenLine xmlns="" xmlns:a14="http://schemas.microsoft.com/office/drawing/2010/main" w="9525">
                     <a:solidFill>
                       <a:srgbClr val="000000"/>
                     </a:solidFill>
@@ -26623,7 +26624,7 @@
               </a:ln>
               <a:extLst>
                 <a:ext uri="{91240B29-F687-4f45-9708-019B960494DF}">
-                  <a14:hiddenLine xmlns:a14="http://schemas.microsoft.com/office/drawing/2010/main" xmlns="" w="9525">
+                  <a14:hiddenLine xmlns="" xmlns:a14="http://schemas.microsoft.com/office/drawing/2010/main" w="9525">
                     <a:solidFill>
                       <a:srgbClr val="000000"/>
                     </a:solidFill>
@@ -26691,7 +26692,7 @@
               </a:ln>
               <a:extLst>
                 <a:ext uri="{91240B29-F687-4f45-9708-019B960494DF}">
-                  <a14:hiddenLine xmlns:a14="http://schemas.microsoft.com/office/drawing/2010/main" xmlns="" w="9525">
+                  <a14:hiddenLine xmlns="" xmlns:a14="http://schemas.microsoft.com/office/drawing/2010/main" w="9525">
                     <a:solidFill>
                       <a:srgbClr val="000000"/>
                     </a:solidFill>
@@ -26781,7 +26782,7 @@
               </a:ln>
               <a:extLst>
                 <a:ext uri="{91240B29-F687-4f45-9708-019B960494DF}">
-                  <a14:hiddenLine xmlns:a14="http://schemas.microsoft.com/office/drawing/2010/main" xmlns="" w="9525">
+                  <a14:hiddenLine xmlns="" xmlns:a14="http://schemas.microsoft.com/office/drawing/2010/main" w="9525">
                     <a:solidFill>
                       <a:srgbClr val="000000"/>
                     </a:solidFill>
@@ -26849,7 +26850,7 @@
               </a:ln>
               <a:extLst>
                 <a:ext uri="{91240B29-F687-4f45-9708-019B960494DF}">
-                  <a14:hiddenLine xmlns:a14="http://schemas.microsoft.com/office/drawing/2010/main" xmlns="" w="9525">
+                  <a14:hiddenLine xmlns="" xmlns:a14="http://schemas.microsoft.com/office/drawing/2010/main" w="9525">
                     <a:solidFill>
                       <a:srgbClr val="000000"/>
                     </a:solidFill>
@@ -26939,7 +26940,7 @@
               </a:ln>
               <a:extLst>
                 <a:ext uri="{91240B29-F687-4f45-9708-019B960494DF}">
-                  <a14:hiddenLine xmlns:a14="http://schemas.microsoft.com/office/drawing/2010/main" xmlns="" w="9525">
+                  <a14:hiddenLine xmlns="" xmlns:a14="http://schemas.microsoft.com/office/drawing/2010/main" w="9525">
                     <a:solidFill>
                       <a:srgbClr val="000000"/>
                     </a:solidFill>
@@ -26973,7 +26974,7 @@
               </a:ln>
               <a:extLst>
                 <a:ext uri="{91240B29-F687-4f45-9708-019B960494DF}">
-                  <a14:hiddenLine xmlns:a14="http://schemas.microsoft.com/office/drawing/2010/main" xmlns="" w="9525">
+                  <a14:hiddenLine xmlns="" xmlns:a14="http://schemas.microsoft.com/office/drawing/2010/main" w="9525">
                     <a:solidFill>
                       <a:srgbClr val="000000"/>
                     </a:solidFill>
@@ -27113,7 +27114,7 @@
           <a:p>
             <a:fld id="{7F79E6DD-7D26-4810-9CFA-3D3006F5FBB0}" type="datetime1">
               <a:rPr lang="en-US" smtClean="0"/>
-              <a:t>3/8/2020</a:t>
+              <a:t>3/10/2020</a:t>
             </a:fld>
             <a:endParaRPr lang="en-US" dirty="0"/>
           </a:p>
@@ -27584,7 +27585,7 @@
           <a:noFill/>
           <a:extLst>
             <a:ext uri="{909E8E84-426E-40dd-AFC4-6F175D3DCCD1}">
-              <a14:hiddenFill xmlns:a14="http://schemas.microsoft.com/office/drawing/2010/main" xmlns="">
+              <a14:hiddenFill xmlns="" xmlns:a14="http://schemas.microsoft.com/office/drawing/2010/main">
                 <a:solidFill>
                   <a:srgbClr val="FFFFFF"/>
                 </a:solidFill>
@@ -27658,7 +27659,7 @@
               </a:ln>
               <a:extLst>
                 <a:ext uri="{91240B29-F687-4f45-9708-019B960494DF}">
-                  <a14:hiddenLine xmlns:a14="http://schemas.microsoft.com/office/drawing/2010/main" xmlns="" w="9525">
+                  <a14:hiddenLine xmlns="" xmlns:a14="http://schemas.microsoft.com/office/drawing/2010/main" w="9525">
                     <a:solidFill>
                       <a:srgbClr val="000000"/>
                     </a:solidFill>
@@ -27748,7 +27749,7 @@
               </a:ln>
               <a:extLst>
                 <a:ext uri="{91240B29-F687-4f45-9708-019B960494DF}">
-                  <a14:hiddenLine xmlns:a14="http://schemas.microsoft.com/office/drawing/2010/main" xmlns="" w="9525">
+                  <a14:hiddenLine xmlns="" xmlns:a14="http://schemas.microsoft.com/office/drawing/2010/main" w="9525">
                     <a:solidFill>
                       <a:srgbClr val="000000"/>
                     </a:solidFill>
@@ -27838,7 +27839,7 @@
               </a:ln>
               <a:extLst>
                 <a:ext uri="{91240B29-F687-4f45-9708-019B960494DF}">
-                  <a14:hiddenLine xmlns:a14="http://schemas.microsoft.com/office/drawing/2010/main" xmlns="" w="9525">
+                  <a14:hiddenLine xmlns="" xmlns:a14="http://schemas.microsoft.com/office/drawing/2010/main" w="9525">
                     <a:solidFill>
                       <a:srgbClr val="000000"/>
                     </a:solidFill>
@@ -27900,7 +27901,7 @@
               </a:ln>
               <a:extLst>
                 <a:ext uri="{91240B29-F687-4f45-9708-019B960494DF}">
-                  <a14:hiddenLine xmlns:a14="http://schemas.microsoft.com/office/drawing/2010/main" xmlns="" w="9525">
+                  <a14:hiddenLine xmlns="" xmlns:a14="http://schemas.microsoft.com/office/drawing/2010/main" w="9525">
                     <a:solidFill>
                       <a:srgbClr val="000000"/>
                     </a:solidFill>
@@ -27990,7 +27991,7 @@
               </a:ln>
               <a:extLst>
                 <a:ext uri="{91240B29-F687-4f45-9708-019B960494DF}">
-                  <a14:hiddenLine xmlns:a14="http://schemas.microsoft.com/office/drawing/2010/main" xmlns="" w="9525">
+                  <a14:hiddenLine xmlns="" xmlns:a14="http://schemas.microsoft.com/office/drawing/2010/main" w="9525">
                     <a:solidFill>
                       <a:srgbClr val="000000"/>
                     </a:solidFill>
@@ -28052,7 +28053,7 @@
               </a:ln>
               <a:extLst>
                 <a:ext uri="{91240B29-F687-4f45-9708-019B960494DF}">
-                  <a14:hiddenLine xmlns:a14="http://schemas.microsoft.com/office/drawing/2010/main" xmlns="" w="9525">
+                  <a14:hiddenLine xmlns="" xmlns:a14="http://schemas.microsoft.com/office/drawing/2010/main" w="9525">
                     <a:solidFill>
                       <a:srgbClr val="000000"/>
                     </a:solidFill>
@@ -28114,7 +28115,7 @@
               </a:ln>
               <a:extLst>
                 <a:ext uri="{91240B29-F687-4f45-9708-019B960494DF}">
-                  <a14:hiddenLine xmlns:a14="http://schemas.microsoft.com/office/drawing/2010/main" xmlns="" w="9525">
+                  <a14:hiddenLine xmlns="" xmlns:a14="http://schemas.microsoft.com/office/drawing/2010/main" w="9525">
                     <a:solidFill>
                       <a:srgbClr val="000000"/>
                     </a:solidFill>
@@ -28204,7 +28205,7 @@
               </a:ln>
               <a:extLst>
                 <a:ext uri="{91240B29-F687-4f45-9708-019B960494DF}">
-                  <a14:hiddenLine xmlns:a14="http://schemas.microsoft.com/office/drawing/2010/main" xmlns="" w="9525">
+                  <a14:hiddenLine xmlns="" xmlns:a14="http://schemas.microsoft.com/office/drawing/2010/main" w="9525">
                     <a:solidFill>
                       <a:srgbClr val="000000"/>
                     </a:solidFill>
@@ -28294,7 +28295,7 @@
               </a:ln>
               <a:extLst>
                 <a:ext uri="{91240B29-F687-4f45-9708-019B960494DF}">
-                  <a14:hiddenLine xmlns:a14="http://schemas.microsoft.com/office/drawing/2010/main" xmlns="" w="9525">
+                  <a14:hiddenLine xmlns="" xmlns:a14="http://schemas.microsoft.com/office/drawing/2010/main" w="9525">
                     <a:solidFill>
                       <a:srgbClr val="000000"/>
                     </a:solidFill>
@@ -28356,7 +28357,7 @@
               </a:ln>
               <a:extLst>
                 <a:ext uri="{91240B29-F687-4f45-9708-019B960494DF}">
-                  <a14:hiddenLine xmlns:a14="http://schemas.microsoft.com/office/drawing/2010/main" xmlns="" w="9525">
+                  <a14:hiddenLine xmlns="" xmlns:a14="http://schemas.microsoft.com/office/drawing/2010/main" w="9525">
                     <a:solidFill>
                       <a:srgbClr val="000000"/>
                     </a:solidFill>
@@ -28466,7 +28467,7 @@
               </a:ln>
               <a:extLst>
                 <a:ext uri="{91240B29-F687-4f45-9708-019B960494DF}">
-                  <a14:hiddenLine xmlns:a14="http://schemas.microsoft.com/office/drawing/2010/main" xmlns="" w="9525">
+                  <a14:hiddenLine xmlns="" xmlns:a14="http://schemas.microsoft.com/office/drawing/2010/main" w="9525">
                     <a:solidFill>
                       <a:srgbClr val="000000"/>
                     </a:solidFill>
@@ -28550,7 +28551,7 @@
               </a:ln>
               <a:extLst>
                 <a:ext uri="{91240B29-F687-4f45-9708-019B960494DF}">
-                  <a14:hiddenLine xmlns:a14="http://schemas.microsoft.com/office/drawing/2010/main" xmlns="" w="9525">
+                  <a14:hiddenLine xmlns="" xmlns:a14="http://schemas.microsoft.com/office/drawing/2010/main" w="9525">
                     <a:solidFill>
                       <a:srgbClr val="000000"/>
                     </a:solidFill>
@@ -28612,7 +28613,7 @@
               </a:ln>
               <a:extLst>
                 <a:ext uri="{91240B29-F687-4f45-9708-019B960494DF}">
-                  <a14:hiddenLine xmlns:a14="http://schemas.microsoft.com/office/drawing/2010/main" xmlns="" w="9525">
+                  <a14:hiddenLine xmlns="" xmlns:a14="http://schemas.microsoft.com/office/drawing/2010/main" w="9525">
                     <a:solidFill>
                       <a:srgbClr val="000000"/>
                     </a:solidFill>
@@ -28674,7 +28675,7 @@
               </a:ln>
               <a:extLst>
                 <a:ext uri="{91240B29-F687-4f45-9708-019B960494DF}">
-                  <a14:hiddenLine xmlns:a14="http://schemas.microsoft.com/office/drawing/2010/main" xmlns="" w="9525">
+                  <a14:hiddenLine xmlns="" xmlns:a14="http://schemas.microsoft.com/office/drawing/2010/main" w="9525">
                     <a:solidFill>
                       <a:srgbClr val="000000"/>
                     </a:solidFill>
@@ -28764,7 +28765,7 @@
               </a:ln>
               <a:extLst>
                 <a:ext uri="{91240B29-F687-4f45-9708-019B960494DF}">
-                  <a14:hiddenLine xmlns:a14="http://schemas.microsoft.com/office/drawing/2010/main" xmlns="" w="9525">
+                  <a14:hiddenLine xmlns="" xmlns:a14="http://schemas.microsoft.com/office/drawing/2010/main" w="9525">
                     <a:solidFill>
                       <a:srgbClr val="000000"/>
                     </a:solidFill>
@@ -28798,7 +28799,7 @@
               </a:ln>
               <a:extLst>
                 <a:ext uri="{91240B29-F687-4f45-9708-019B960494DF}">
-                  <a14:hiddenLine xmlns:a14="http://schemas.microsoft.com/office/drawing/2010/main" xmlns="" w="9525">
+                  <a14:hiddenLine xmlns="" xmlns:a14="http://schemas.microsoft.com/office/drawing/2010/main" w="9525">
                     <a:solidFill>
                       <a:srgbClr val="000000"/>
                     </a:solidFill>
@@ -28863,7 +28864,7 @@
               </a:ln>
               <a:extLst>
                 <a:ext uri="{91240B29-F687-4f45-9708-019B960494DF}">
-                  <a14:hiddenLine xmlns:a14="http://schemas.microsoft.com/office/drawing/2010/main" xmlns="" w="9525">
+                  <a14:hiddenLine xmlns="" xmlns:a14="http://schemas.microsoft.com/office/drawing/2010/main" w="9525">
                     <a:solidFill>
                       <a:srgbClr val="000000"/>
                     </a:solidFill>
@@ -28953,7 +28954,7 @@
               </a:ln>
               <a:extLst>
                 <a:ext uri="{91240B29-F687-4f45-9708-019B960494DF}">
-                  <a14:hiddenLine xmlns:a14="http://schemas.microsoft.com/office/drawing/2010/main" xmlns="" w="9525">
+                  <a14:hiddenLine xmlns="" xmlns:a14="http://schemas.microsoft.com/office/drawing/2010/main" w="9525">
                     <a:solidFill>
                       <a:srgbClr val="000000"/>
                     </a:solidFill>
@@ -29015,7 +29016,7 @@
               </a:ln>
               <a:extLst>
                 <a:ext uri="{91240B29-F687-4f45-9708-019B960494DF}">
-                  <a14:hiddenLine xmlns:a14="http://schemas.microsoft.com/office/drawing/2010/main" xmlns="" w="9525">
+                  <a14:hiddenLine xmlns="" xmlns:a14="http://schemas.microsoft.com/office/drawing/2010/main" w="9525">
                     <a:solidFill>
                       <a:srgbClr val="000000"/>
                     </a:solidFill>
@@ -29105,7 +29106,7 @@
               </a:ln>
               <a:extLst>
                 <a:ext uri="{91240B29-F687-4f45-9708-019B960494DF}">
-                  <a14:hiddenLine xmlns:a14="http://schemas.microsoft.com/office/drawing/2010/main" xmlns="" w="9525">
+                  <a14:hiddenLine xmlns="" xmlns:a14="http://schemas.microsoft.com/office/drawing/2010/main" w="9525">
                     <a:solidFill>
                       <a:srgbClr val="000000"/>
                     </a:solidFill>
@@ -29170,7 +29171,7 @@
               </a:ln>
               <a:extLst>
                 <a:ext uri="{91240B29-F687-4f45-9708-019B960494DF}">
-                  <a14:hiddenLine xmlns:a14="http://schemas.microsoft.com/office/drawing/2010/main" xmlns="" w="9525">
+                  <a14:hiddenLine xmlns="" xmlns:a14="http://schemas.microsoft.com/office/drawing/2010/main" w="9525">
                     <a:solidFill>
                       <a:srgbClr val="000000"/>
                     </a:solidFill>
@@ -29232,7 +29233,7 @@
               </a:ln>
               <a:extLst>
                 <a:ext uri="{91240B29-F687-4f45-9708-019B960494DF}">
-                  <a14:hiddenLine xmlns:a14="http://schemas.microsoft.com/office/drawing/2010/main" xmlns="" w="9525">
+                  <a14:hiddenLine xmlns="" xmlns:a14="http://schemas.microsoft.com/office/drawing/2010/main" w="9525">
                     <a:solidFill>
                       <a:srgbClr val="000000"/>
                     </a:solidFill>
@@ -29322,7 +29323,7 @@
               </a:ln>
               <a:extLst>
                 <a:ext uri="{91240B29-F687-4f45-9708-019B960494DF}">
-                  <a14:hiddenLine xmlns:a14="http://schemas.microsoft.com/office/drawing/2010/main" xmlns="" w="9525">
+                  <a14:hiddenLine xmlns="" xmlns:a14="http://schemas.microsoft.com/office/drawing/2010/main" w="9525">
                     <a:solidFill>
                       <a:srgbClr val="000000"/>
                     </a:solidFill>
@@ -29412,7 +29413,7 @@
               </a:ln>
               <a:extLst>
                 <a:ext uri="{91240B29-F687-4f45-9708-019B960494DF}">
-                  <a14:hiddenLine xmlns:a14="http://schemas.microsoft.com/office/drawing/2010/main" xmlns="" w="9525">
+                  <a14:hiddenLine xmlns="" xmlns:a14="http://schemas.microsoft.com/office/drawing/2010/main" w="9525">
                     <a:solidFill>
                       <a:srgbClr val="000000"/>
                     </a:solidFill>
@@ -29477,7 +29478,7 @@
               </a:ln>
               <a:extLst>
                 <a:ext uri="{91240B29-F687-4f45-9708-019B960494DF}">
-                  <a14:hiddenLine xmlns:a14="http://schemas.microsoft.com/office/drawing/2010/main" xmlns="" w="9525">
+                  <a14:hiddenLine xmlns="" xmlns:a14="http://schemas.microsoft.com/office/drawing/2010/main" w="9525">
                     <a:solidFill>
                       <a:srgbClr val="000000"/>
                     </a:solidFill>
@@ -29597,7 +29598,7 @@
               </a:ln>
               <a:extLst>
                 <a:ext uri="{91240B29-F687-4f45-9708-019B960494DF}">
-                  <a14:hiddenLine xmlns:a14="http://schemas.microsoft.com/office/drawing/2010/main" xmlns="" w="9525">
+                  <a14:hiddenLine xmlns="" xmlns:a14="http://schemas.microsoft.com/office/drawing/2010/main" w="9525">
                     <a:solidFill>
                       <a:srgbClr val="000000"/>
                     </a:solidFill>
@@ -29695,7 +29696,7 @@
               </a:ln>
               <a:extLst>
                 <a:ext uri="{91240B29-F687-4f45-9708-019B960494DF}">
-                  <a14:hiddenLine xmlns:a14="http://schemas.microsoft.com/office/drawing/2010/main" xmlns="" w="9525">
+                  <a14:hiddenLine xmlns="" xmlns:a14="http://schemas.microsoft.com/office/drawing/2010/main" w="9525">
                     <a:solidFill>
                       <a:srgbClr val="000000"/>
                     </a:solidFill>
@@ -29810,7 +29811,7 @@
               </a:ln>
               <a:extLst>
                 <a:ext uri="{91240B29-F687-4f45-9708-019B960494DF}">
-                  <a14:hiddenLine xmlns:a14="http://schemas.microsoft.com/office/drawing/2010/main" xmlns="" w="9525">
+                  <a14:hiddenLine xmlns="" xmlns:a14="http://schemas.microsoft.com/office/drawing/2010/main" w="9525">
                     <a:solidFill>
                       <a:srgbClr val="000000"/>
                     </a:solidFill>
@@ -29900,7 +29901,7 @@
               </a:ln>
               <a:extLst>
                 <a:ext uri="{91240B29-F687-4f45-9708-019B960494DF}">
-                  <a14:hiddenLine xmlns:a14="http://schemas.microsoft.com/office/drawing/2010/main" xmlns="" w="9525">
+                  <a14:hiddenLine xmlns="" xmlns:a14="http://schemas.microsoft.com/office/drawing/2010/main" w="9525">
                     <a:solidFill>
                       <a:srgbClr val="000000"/>
                     </a:solidFill>
@@ -29965,7 +29966,7 @@
               </a:ln>
               <a:extLst>
                 <a:ext uri="{91240B29-F687-4f45-9708-019B960494DF}">
-                  <a14:hiddenLine xmlns:a14="http://schemas.microsoft.com/office/drawing/2010/main" xmlns="" w="9525">
+                  <a14:hiddenLine xmlns="" xmlns:a14="http://schemas.microsoft.com/office/drawing/2010/main" w="9525">
                     <a:solidFill>
                       <a:srgbClr val="000000"/>
                     </a:solidFill>
@@ -30055,7 +30056,7 @@
               </a:ln>
               <a:extLst>
                 <a:ext uri="{91240B29-F687-4f45-9708-019B960494DF}">
-                  <a14:hiddenLine xmlns:a14="http://schemas.microsoft.com/office/drawing/2010/main" xmlns="" w="9525">
+                  <a14:hiddenLine xmlns="" xmlns:a14="http://schemas.microsoft.com/office/drawing/2010/main" w="9525">
                     <a:solidFill>
                       <a:srgbClr val="000000"/>
                     </a:solidFill>
@@ -30123,7 +30124,7 @@
               </a:ln>
               <a:extLst>
                 <a:ext uri="{91240B29-F687-4f45-9708-019B960494DF}">
-                  <a14:hiddenLine xmlns:a14="http://schemas.microsoft.com/office/drawing/2010/main" xmlns="" w="9525">
+                  <a14:hiddenLine xmlns="" xmlns:a14="http://schemas.microsoft.com/office/drawing/2010/main" w="9525">
                     <a:solidFill>
                       <a:srgbClr val="000000"/>
                     </a:solidFill>
@@ -30213,7 +30214,7 @@
               </a:ln>
               <a:extLst>
                 <a:ext uri="{91240B29-F687-4f45-9708-019B960494DF}">
-                  <a14:hiddenLine xmlns:a14="http://schemas.microsoft.com/office/drawing/2010/main" xmlns="" w="9525">
+                  <a14:hiddenLine xmlns="" xmlns:a14="http://schemas.microsoft.com/office/drawing/2010/main" w="9525">
                     <a:solidFill>
                       <a:srgbClr val="000000"/>
                     </a:solidFill>
@@ -30281,7 +30282,7 @@
               </a:ln>
               <a:extLst>
                 <a:ext uri="{91240B29-F687-4f45-9708-019B960494DF}">
-                  <a14:hiddenLine xmlns:a14="http://schemas.microsoft.com/office/drawing/2010/main" xmlns="" w="9525">
+                  <a14:hiddenLine xmlns="" xmlns:a14="http://schemas.microsoft.com/office/drawing/2010/main" w="9525">
                     <a:solidFill>
                       <a:srgbClr val="000000"/>
                     </a:solidFill>
@@ -30371,7 +30372,7 @@
               </a:ln>
               <a:extLst>
                 <a:ext uri="{91240B29-F687-4f45-9708-019B960494DF}">
-                  <a14:hiddenLine xmlns:a14="http://schemas.microsoft.com/office/drawing/2010/main" xmlns="" w="9525">
+                  <a14:hiddenLine xmlns="" xmlns:a14="http://schemas.microsoft.com/office/drawing/2010/main" w="9525">
                     <a:solidFill>
                       <a:srgbClr val="000000"/>
                     </a:solidFill>
@@ -30405,7 +30406,7 @@
               </a:ln>
               <a:extLst>
                 <a:ext uri="{91240B29-F687-4f45-9708-019B960494DF}">
-                  <a14:hiddenLine xmlns:a14="http://schemas.microsoft.com/office/drawing/2010/main" xmlns="" w="9525">
+                  <a14:hiddenLine xmlns="" xmlns:a14="http://schemas.microsoft.com/office/drawing/2010/main" w="9525">
                     <a:solidFill>
                       <a:srgbClr val="000000"/>
                     </a:solidFill>
@@ -30545,7 +30546,7 @@
           <a:p>
             <a:fld id="{7F79E6DD-7D26-4810-9CFA-3D3006F5FBB0}" type="datetime1">
               <a:rPr lang="en-US" smtClean="0"/>
-              <a:t>3/8/2020</a:t>
+              <a:t>3/10/2020</a:t>
             </a:fld>
             <a:endParaRPr lang="en-US" dirty="0"/>
           </a:p>
@@ -33839,6 +33840,144 @@
     <p:extLst>
       <p:ext uri="{BB962C8B-B14F-4D97-AF65-F5344CB8AC3E}">
         <p14:creationId xmlns:p14="http://schemas.microsoft.com/office/powerpoint/2010/main" val="2465885148"/>
+      </p:ext>
+    </p:extLst>
+  </p:cSld>
+  <p:clrMapOvr>
+    <a:masterClrMapping/>
+  </p:clrMapOvr>
+</p:sld>
+</file>
+
+<file path=ppt/slides/slide25.xml><?xml version="1.0" encoding="utf-8"?>
+<p:sld xmlns:a="http://schemas.openxmlformats.org/drawingml/2006/main" xmlns:r="http://schemas.openxmlformats.org/officeDocument/2006/relationships" xmlns:p="http://schemas.openxmlformats.org/presentationml/2006/main">
+  <p:cSld>
+    <p:spTree>
+      <p:nvGrpSpPr>
+        <p:cNvPr id="1" name=""/>
+        <p:cNvGrpSpPr/>
+        <p:nvPr/>
+      </p:nvGrpSpPr>
+      <p:grpSpPr>
+        <a:xfrm>
+          <a:off x="0" y="0"/>
+          <a:ext cx="0" cy="0"/>
+          <a:chOff x="0" y="0"/>
+          <a:chExt cx="0" cy="0"/>
+        </a:xfrm>
+      </p:grpSpPr>
+      <p:sp>
+        <p:nvSpPr>
+          <p:cNvPr id="2" name="Title 1">
+            <a:extLst>
+              <a:ext uri="{FF2B5EF4-FFF2-40B4-BE49-F238E27FC236}">
+                <a16:creationId xmlns:a16="http://schemas.microsoft.com/office/drawing/2014/main" id="{066C6028-DBC9-4496-A526-46252AFECA1A}"/>
+              </a:ext>
+            </a:extLst>
+          </p:cNvPr>
+          <p:cNvSpPr>
+            <a:spLocks noGrp="1"/>
+          </p:cNvSpPr>
+          <p:nvPr>
+            <p:ph type="title"/>
+          </p:nvPr>
+        </p:nvSpPr>
+        <p:spPr/>
+        <p:txBody>
+          <a:bodyPr/>
+          <a:lstStyle/>
+          <a:p>
+            <a:endParaRPr lang="en-IN" dirty="0"/>
+          </a:p>
+        </p:txBody>
+      </p:sp>
+      <p:sp>
+        <p:nvSpPr>
+          <p:cNvPr id="3" name="Content Placeholder 2">
+            <a:extLst>
+              <a:ext uri="{FF2B5EF4-FFF2-40B4-BE49-F238E27FC236}">
+                <a16:creationId xmlns:a16="http://schemas.microsoft.com/office/drawing/2014/main" id="{AA1338A7-9534-4C05-A636-44B8F080AD1E}"/>
+              </a:ext>
+            </a:extLst>
+          </p:cNvPr>
+          <p:cNvSpPr>
+            <a:spLocks noGrp="1"/>
+          </p:cNvSpPr>
+          <p:nvPr>
+            <p:ph idx="1"/>
+          </p:nvPr>
+        </p:nvSpPr>
+        <p:spPr/>
+        <p:txBody>
+          <a:bodyPr/>
+          <a:lstStyle/>
+          <a:p>
+            <a:endParaRPr lang="en-IN"/>
+          </a:p>
+        </p:txBody>
+      </p:sp>
+      <p:sp>
+        <p:nvSpPr>
+          <p:cNvPr id="4" name="Footer Placeholder 3">
+            <a:extLst>
+              <a:ext uri="{FF2B5EF4-FFF2-40B4-BE49-F238E27FC236}">
+                <a16:creationId xmlns:a16="http://schemas.microsoft.com/office/drawing/2014/main" id="{4E10AC32-EB1D-4530-A5BB-7A9B95831422}"/>
+              </a:ext>
+            </a:extLst>
+          </p:cNvPr>
+          <p:cNvSpPr>
+            <a:spLocks noGrp="1"/>
+          </p:cNvSpPr>
+          <p:nvPr>
+            <p:ph type="ftr" sz="quarter" idx="11"/>
+          </p:nvPr>
+        </p:nvSpPr>
+        <p:spPr/>
+        <p:txBody>
+          <a:bodyPr/>
+          <a:lstStyle/>
+          <a:p>
+            <a:r>
+              <a:rPr lang="en-US"/>
+              <a:t>chandanshastri.github.io</a:t>
+            </a:r>
+            <a:endParaRPr lang="en-US" dirty="0"/>
+          </a:p>
+        </p:txBody>
+      </p:sp>
+      <p:sp>
+        <p:nvSpPr>
+          <p:cNvPr id="5" name="Slide Number Placeholder 4">
+            <a:extLst>
+              <a:ext uri="{FF2B5EF4-FFF2-40B4-BE49-F238E27FC236}">
+                <a16:creationId xmlns:a16="http://schemas.microsoft.com/office/drawing/2014/main" id="{3F7B3E43-F519-4456-AF8A-77391075C9CE}"/>
+              </a:ext>
+            </a:extLst>
+          </p:cNvPr>
+          <p:cNvSpPr>
+            <a:spLocks noGrp="1"/>
+          </p:cNvSpPr>
+          <p:nvPr>
+            <p:ph type="sldNum" sz="quarter" idx="12"/>
+          </p:nvPr>
+        </p:nvSpPr>
+        <p:spPr/>
+        <p:txBody>
+          <a:bodyPr/>
+          <a:lstStyle/>
+          <a:p>
+            <a:fld id="{6D22F896-40B5-4ADD-8801-0D06FADFA095}" type="slidenum">
+              <a:rPr lang="en-US" smtClean="0"/>
+              <a:t>25</a:t>
+            </a:fld>
+            <a:endParaRPr lang="en-US" dirty="0"/>
+          </a:p>
+        </p:txBody>
+      </p:sp>
+    </p:spTree>
+    <p:extLst>
+      <p:ext uri="{BB962C8B-B14F-4D97-AF65-F5344CB8AC3E}">
+        <p14:creationId xmlns:p14="http://schemas.microsoft.com/office/powerpoint/2010/main" val="1470261760"/>
       </p:ext>
     </p:extLst>
   </p:cSld>

--- a/data/talk.pptx
+++ b/data/talk.pptx
@@ -7,7 +7,7 @@
     <p:sldMasterId id="2147483723" r:id="rId3"/>
   </p:sldMasterIdLst>
   <p:notesMasterIdLst>
-    <p:notesMasterId r:id="rId29"/>
+    <p:notesMasterId r:id="rId40"/>
   </p:notesMasterIdLst>
   <p:sldIdLst>
     <p:sldId id="273" r:id="rId4"/>
@@ -35,6 +35,17 @@
     <p:sldId id="279" r:id="rId26"/>
     <p:sldId id="280" r:id="rId27"/>
     <p:sldId id="281" r:id="rId28"/>
+    <p:sldId id="288" r:id="rId29"/>
+    <p:sldId id="287" r:id="rId30"/>
+    <p:sldId id="282" r:id="rId31"/>
+    <p:sldId id="286" r:id="rId32"/>
+    <p:sldId id="284" r:id="rId33"/>
+    <p:sldId id="285" r:id="rId34"/>
+    <p:sldId id="283" r:id="rId35"/>
+    <p:sldId id="289" r:id="rId36"/>
+    <p:sldId id="290" r:id="rId37"/>
+    <p:sldId id="291" r:id="rId38"/>
+    <p:sldId id="292" r:id="rId39"/>
   </p:sldIdLst>
   <p:sldSz cx="9144000" cy="6858000" type="screen4x3"/>
   <p:notesSz cx="6858000" cy="9144000"/>
@@ -223,7 +234,7 @@
           <a:p>
             <a:fld id="{EFE6E835-27B1-4873-AA5B-D1A973D9666F}" type="datetimeFigureOut">
               <a:rPr lang="en-IN" smtClean="0"/>
-              <a:t>10-03-2020</a:t>
+              <a:t>11-03-2020</a:t>
             </a:fld>
             <a:endParaRPr lang="en-IN"/>
           </a:p>
@@ -661,7 +672,7 @@
           <a:p>
             <a:fld id="{47147380-C9A6-4292-80AD-55D5D6A2AAE3}" type="datetime1">
               <a:rPr lang="en-US" smtClean="0"/>
-              <a:t>3/10/2020</a:t>
+              <a:t>3/11/2020</a:t>
             </a:fld>
             <a:endParaRPr lang="en-US" dirty="0"/>
           </a:p>
@@ -932,7 +943,7 @@
           <a:p>
             <a:fld id="{7094CD8F-F50E-4E4E-A619-C83536A21564}" type="datetime1">
               <a:rPr lang="en-US" smtClean="0"/>
-              <a:t>3/10/2020</a:t>
+              <a:t>3/11/2020</a:t>
             </a:fld>
             <a:endParaRPr lang="en-US" dirty="0"/>
           </a:p>
@@ -1167,7 +1178,7 @@
           <a:p>
             <a:fld id="{369190F8-86C8-482D-94FF-2357E3904808}" type="datetime1">
               <a:rPr lang="en-US" smtClean="0"/>
-              <a:t>3/10/2020</a:t>
+              <a:t>3/11/2020</a:t>
             </a:fld>
             <a:endParaRPr lang="en-US" dirty="0"/>
           </a:p>
@@ -1481,7 +1492,7 @@
           <a:p>
             <a:fld id="{7DCCB83B-D0C2-4A7D-ACE4-394E031D1D6D}" type="datetime1">
               <a:rPr lang="en-US" smtClean="0"/>
-              <a:t>3/10/2020</a:t>
+              <a:t>3/11/2020</a:t>
             </a:fld>
             <a:endParaRPr lang="en-US" dirty="0"/>
           </a:p>
@@ -1958,7 +1969,7 @@
           <a:p>
             <a:fld id="{A562CC47-EB05-49E7-BB79-D60F887758B3}" type="datetime1">
               <a:rPr lang="en-US" smtClean="0"/>
-              <a:t>3/10/2020</a:t>
+              <a:t>3/11/2020</a:t>
             </a:fld>
             <a:endParaRPr lang="en-US" dirty="0"/>
           </a:p>
@@ -2509,7 +2520,7 @@
           <a:p>
             <a:fld id="{62DB895A-F06A-4C22-B764-5FE32A2A5F48}" type="datetime1">
               <a:rPr lang="en-US" smtClean="0"/>
-              <a:t>3/10/2020</a:t>
+              <a:t>3/11/2020</a:t>
             </a:fld>
             <a:endParaRPr lang="en-US" dirty="0"/>
           </a:p>
@@ -3287,7 +3298,7 @@
           <a:p>
             <a:fld id="{5D42CFDC-1EF5-4A06-BF89-EF8A8F6CD796}" type="datetime1">
               <a:rPr lang="en-US" smtClean="0"/>
-              <a:t>3/10/2020</a:t>
+              <a:t>3/11/2020</a:t>
             </a:fld>
             <a:endParaRPr lang="en-US" dirty="0"/>
           </a:p>
@@ -3466,7 +3477,7 @@
           <a:p>
             <a:fld id="{13815C30-DF68-4F98-AF35-879B076E4017}" type="datetime1">
               <a:rPr lang="en-US" smtClean="0"/>
-              <a:t>3/10/2020</a:t>
+              <a:t>3/11/2020</a:t>
             </a:fld>
             <a:endParaRPr lang="en-US" dirty="0"/>
           </a:p>
@@ -3693,7 +3704,7 @@
           <a:p>
             <a:fld id="{EC5DC2D5-0D2B-43CA-B09F-4232E3D1DD6E}" type="datetime1">
               <a:rPr lang="en-US" smtClean="0"/>
-              <a:t>3/10/2020</a:t>
+              <a:t>3/11/2020</a:t>
             </a:fld>
             <a:endParaRPr lang="en-US" dirty="0"/>
           </a:p>
@@ -3825,7 +3836,7 @@
           <a:noFill/>
           <a:extLst>
             <a:ext uri="{909E8E84-426E-40dd-AFC4-6F175D3DCCD1}">
-              <a14:hiddenFill xmlns="" xmlns:a14="http://schemas.microsoft.com/office/drawing/2010/main">
+              <a14:hiddenFill xmlns:a14="http://schemas.microsoft.com/office/drawing/2010/main" xmlns="">
                 <a:solidFill>
                   <a:srgbClr val="FFFFFF"/>
                 </a:solidFill>
@@ -3884,7 +3895,7 @@
             </a:ln>
             <a:extLst>
               <a:ext uri="{91240B29-F687-4f45-9708-019B960494DF}">
-                <a14:hiddenLine xmlns="" xmlns:a14="http://schemas.microsoft.com/office/drawing/2010/main" w="9525">
+                <a14:hiddenLine xmlns:a14="http://schemas.microsoft.com/office/drawing/2010/main" xmlns="" w="9525">
                   <a:solidFill>
                     <a:srgbClr val="000000"/>
                   </a:solidFill>
@@ -3974,7 +3985,7 @@
             </a:ln>
             <a:extLst>
               <a:ext uri="{91240B29-F687-4f45-9708-019B960494DF}">
-                <a14:hiddenLine xmlns="" xmlns:a14="http://schemas.microsoft.com/office/drawing/2010/main" w="9525">
+                <a14:hiddenLine xmlns:a14="http://schemas.microsoft.com/office/drawing/2010/main" xmlns="" w="9525">
                   <a:solidFill>
                     <a:srgbClr val="000000"/>
                   </a:solidFill>
@@ -4064,7 +4075,7 @@
             </a:ln>
             <a:extLst>
               <a:ext uri="{91240B29-F687-4f45-9708-019B960494DF}">
-                <a14:hiddenLine xmlns="" xmlns:a14="http://schemas.microsoft.com/office/drawing/2010/main" w="9525">
+                <a14:hiddenLine xmlns:a14="http://schemas.microsoft.com/office/drawing/2010/main" xmlns="" w="9525">
                   <a:solidFill>
                     <a:srgbClr val="000000"/>
                   </a:solidFill>
@@ -4098,7 +4109,7 @@
             </a:ln>
             <a:extLst>
               <a:ext uri="{91240B29-F687-4f45-9708-019B960494DF}">
-                <a14:hiddenLine xmlns="" xmlns:a14="http://schemas.microsoft.com/office/drawing/2010/main" w="9525">
+                <a14:hiddenLine xmlns:a14="http://schemas.microsoft.com/office/drawing/2010/main" xmlns="" w="9525">
                   <a:solidFill>
                     <a:srgbClr val="000000"/>
                   </a:solidFill>
@@ -4188,7 +4199,7 @@
             </a:ln>
             <a:extLst>
               <a:ext uri="{91240B29-F687-4f45-9708-019B960494DF}">
-                <a14:hiddenLine xmlns="" xmlns:a14="http://schemas.microsoft.com/office/drawing/2010/main" w="9525">
+                <a14:hiddenLine xmlns:a14="http://schemas.microsoft.com/office/drawing/2010/main" xmlns="" w="9525">
                   <a:solidFill>
                     <a:srgbClr val="000000"/>
                   </a:solidFill>
@@ -4250,7 +4261,7 @@
             </a:ln>
             <a:extLst>
               <a:ext uri="{91240B29-F687-4f45-9708-019B960494DF}">
-                <a14:hiddenLine xmlns="" xmlns:a14="http://schemas.microsoft.com/office/drawing/2010/main" w="9525">
+                <a14:hiddenLine xmlns:a14="http://schemas.microsoft.com/office/drawing/2010/main" xmlns="" w="9525">
                   <a:solidFill>
                     <a:srgbClr val="000000"/>
                   </a:solidFill>
@@ -4312,7 +4323,7 @@
             </a:ln>
             <a:extLst>
               <a:ext uri="{91240B29-F687-4f45-9708-019B960494DF}">
-                <a14:hiddenLine xmlns="" xmlns:a14="http://schemas.microsoft.com/office/drawing/2010/main" w="9525">
+                <a14:hiddenLine xmlns:a14="http://schemas.microsoft.com/office/drawing/2010/main" xmlns="" w="9525">
                   <a:solidFill>
                     <a:srgbClr val="000000"/>
                   </a:solidFill>
@@ -4402,7 +4413,7 @@
             </a:ln>
             <a:extLst>
               <a:ext uri="{91240B29-F687-4f45-9708-019B960494DF}">
-                <a14:hiddenLine xmlns="" xmlns:a14="http://schemas.microsoft.com/office/drawing/2010/main" w="9525">
+                <a14:hiddenLine xmlns:a14="http://schemas.microsoft.com/office/drawing/2010/main" xmlns="" w="9525">
                   <a:solidFill>
                     <a:srgbClr val="000000"/>
                   </a:solidFill>
@@ -4464,7 +4475,7 @@
             </a:ln>
             <a:extLst>
               <a:ext uri="{91240B29-F687-4f45-9708-019B960494DF}">
-                <a14:hiddenLine xmlns="" xmlns:a14="http://schemas.microsoft.com/office/drawing/2010/main" w="9525">
+                <a14:hiddenLine xmlns:a14="http://schemas.microsoft.com/office/drawing/2010/main" xmlns="" w="9525">
                   <a:solidFill>
                     <a:srgbClr val="000000"/>
                   </a:solidFill>
@@ -4526,7 +4537,7 @@
             </a:ln>
             <a:extLst>
               <a:ext uri="{91240B29-F687-4f45-9708-019B960494DF}">
-                <a14:hiddenLine xmlns="" xmlns:a14="http://schemas.microsoft.com/office/drawing/2010/main" w="9525">
+                <a14:hiddenLine xmlns:a14="http://schemas.microsoft.com/office/drawing/2010/main" xmlns="" w="9525">
                   <a:solidFill>
                     <a:srgbClr val="000000"/>
                   </a:solidFill>
@@ -4616,7 +4627,7 @@
             </a:ln>
             <a:extLst>
               <a:ext uri="{91240B29-F687-4f45-9708-019B960494DF}">
-                <a14:hiddenLine xmlns="" xmlns:a14="http://schemas.microsoft.com/office/drawing/2010/main" w="9525">
+                <a14:hiddenLine xmlns:a14="http://schemas.microsoft.com/office/drawing/2010/main" xmlns="" w="9525">
                   <a:solidFill>
                     <a:srgbClr val="000000"/>
                   </a:solidFill>
@@ -4706,7 +4717,7 @@
             </a:ln>
             <a:extLst>
               <a:ext uri="{91240B29-F687-4f45-9708-019B960494DF}">
-                <a14:hiddenLine xmlns="" xmlns:a14="http://schemas.microsoft.com/office/drawing/2010/main" w="9525">
+                <a14:hiddenLine xmlns:a14="http://schemas.microsoft.com/office/drawing/2010/main" xmlns="" w="9525">
                   <a:solidFill>
                     <a:srgbClr val="000000"/>
                   </a:solidFill>
@@ -4768,7 +4779,7 @@
             </a:ln>
             <a:extLst>
               <a:ext uri="{91240B29-F687-4f45-9708-019B960494DF}">
-                <a14:hiddenLine xmlns="" xmlns:a14="http://schemas.microsoft.com/office/drawing/2010/main" w="9525">
+                <a14:hiddenLine xmlns:a14="http://schemas.microsoft.com/office/drawing/2010/main" xmlns="" w="9525">
                   <a:solidFill>
                     <a:srgbClr val="000000"/>
                   </a:solidFill>
@@ -4878,7 +4889,7 @@
             </a:ln>
             <a:extLst>
               <a:ext uri="{91240B29-F687-4f45-9708-019B960494DF}">
-                <a14:hiddenLine xmlns="" xmlns:a14="http://schemas.microsoft.com/office/drawing/2010/main" w="9525">
+                <a14:hiddenLine xmlns:a14="http://schemas.microsoft.com/office/drawing/2010/main" xmlns="" w="9525">
                   <a:solidFill>
                     <a:srgbClr val="000000"/>
                   </a:solidFill>
@@ -4940,7 +4951,7 @@
             </a:ln>
             <a:extLst>
               <a:ext uri="{91240B29-F687-4f45-9708-019B960494DF}">
-                <a14:hiddenLine xmlns="" xmlns:a14="http://schemas.microsoft.com/office/drawing/2010/main" w="9525">
+                <a14:hiddenLine xmlns:a14="http://schemas.microsoft.com/office/drawing/2010/main" xmlns="" w="9525">
                   <a:solidFill>
                     <a:srgbClr val="000000"/>
                   </a:solidFill>
@@ -5030,7 +5041,7 @@
             </a:ln>
             <a:extLst>
               <a:ext uri="{91240B29-F687-4f45-9708-019B960494DF}">
-                <a14:hiddenLine xmlns="" xmlns:a14="http://schemas.microsoft.com/office/drawing/2010/main" w="9525">
+                <a14:hiddenLine xmlns:a14="http://schemas.microsoft.com/office/drawing/2010/main" xmlns="" w="9525">
                   <a:solidFill>
                     <a:srgbClr val="000000"/>
                   </a:solidFill>
@@ -5120,7 +5131,7 @@
             </a:ln>
             <a:extLst>
               <a:ext uri="{91240B29-F687-4f45-9708-019B960494DF}">
-                <a14:hiddenLine xmlns="" xmlns:a14="http://schemas.microsoft.com/office/drawing/2010/main" w="9525">
+                <a14:hiddenLine xmlns:a14="http://schemas.microsoft.com/office/drawing/2010/main" xmlns="" w="9525">
                   <a:solidFill>
                     <a:srgbClr val="000000"/>
                   </a:solidFill>
@@ -5182,7 +5193,7 @@
             </a:ln>
             <a:extLst>
               <a:ext uri="{91240B29-F687-4f45-9708-019B960494DF}">
-                <a14:hiddenLine xmlns="" xmlns:a14="http://schemas.microsoft.com/office/drawing/2010/main" w="9525">
+                <a14:hiddenLine xmlns:a14="http://schemas.microsoft.com/office/drawing/2010/main" xmlns="" w="9525">
                   <a:solidFill>
                     <a:srgbClr val="000000"/>
                   </a:solidFill>
@@ -5272,7 +5283,7 @@
             </a:ln>
             <a:extLst>
               <a:ext uri="{91240B29-F687-4f45-9708-019B960494DF}">
-                <a14:hiddenLine xmlns="" xmlns:a14="http://schemas.microsoft.com/office/drawing/2010/main" w="9525">
+                <a14:hiddenLine xmlns:a14="http://schemas.microsoft.com/office/drawing/2010/main" xmlns="" w="9525">
                   <a:solidFill>
                     <a:srgbClr val="000000"/>
                   </a:solidFill>
@@ -5362,7 +5373,7 @@
             </a:ln>
             <a:extLst>
               <a:ext uri="{91240B29-F687-4f45-9708-019B960494DF}">
-                <a14:hiddenLine xmlns="" xmlns:a14="http://schemas.microsoft.com/office/drawing/2010/main" w="9525">
+                <a14:hiddenLine xmlns:a14="http://schemas.microsoft.com/office/drawing/2010/main" xmlns="" w="9525">
                   <a:solidFill>
                     <a:srgbClr val="000000"/>
                   </a:solidFill>
@@ -5418,7 +5429,7 @@
             </a:ln>
             <a:extLst>
               <a:ext uri="{91240B29-F687-4f45-9708-019B960494DF}">
-                <a14:hiddenLine xmlns="" xmlns:a14="http://schemas.microsoft.com/office/drawing/2010/main" w="9525">
+                <a14:hiddenLine xmlns:a14="http://schemas.microsoft.com/office/drawing/2010/main" xmlns="" w="9525">
                   <a:solidFill>
                     <a:srgbClr val="000000"/>
                   </a:solidFill>
@@ -5508,7 +5519,7 @@
             </a:ln>
             <a:extLst>
               <a:ext uri="{91240B29-F687-4f45-9708-019B960494DF}">
-                <a14:hiddenLine xmlns="" xmlns:a14="http://schemas.microsoft.com/office/drawing/2010/main" w="9525">
+                <a14:hiddenLine xmlns:a14="http://schemas.microsoft.com/office/drawing/2010/main" xmlns="" w="9525">
                   <a:solidFill>
                     <a:srgbClr val="000000"/>
                   </a:solidFill>
@@ -5564,7 +5575,7 @@
             </a:ln>
             <a:extLst>
               <a:ext uri="{91240B29-F687-4f45-9708-019B960494DF}">
-                <a14:hiddenLine xmlns="" xmlns:a14="http://schemas.microsoft.com/office/drawing/2010/main" w="9525">
+                <a14:hiddenLine xmlns:a14="http://schemas.microsoft.com/office/drawing/2010/main" xmlns="" w="9525">
                   <a:solidFill>
                     <a:srgbClr val="000000"/>
                   </a:solidFill>
@@ -5654,7 +5665,7 @@
             </a:ln>
             <a:extLst>
               <a:ext uri="{91240B29-F687-4f45-9708-019B960494DF}">
-                <a14:hiddenLine xmlns="" xmlns:a14="http://schemas.microsoft.com/office/drawing/2010/main" w="9525">
+                <a14:hiddenLine xmlns:a14="http://schemas.microsoft.com/office/drawing/2010/main" xmlns="" w="9525">
                   <a:solidFill>
                     <a:srgbClr val="000000"/>
                   </a:solidFill>
@@ -5722,7 +5733,7 @@
             </a:ln>
             <a:extLst>
               <a:ext uri="{91240B29-F687-4f45-9708-019B960494DF}">
-                <a14:hiddenLine xmlns="" xmlns:a14="http://schemas.microsoft.com/office/drawing/2010/main" w="9525">
+                <a14:hiddenLine xmlns:a14="http://schemas.microsoft.com/office/drawing/2010/main" xmlns="" w="9525">
                   <a:solidFill>
                     <a:srgbClr val="000000"/>
                   </a:solidFill>
@@ -5812,7 +5823,7 @@
             </a:ln>
             <a:extLst>
               <a:ext uri="{91240B29-F687-4f45-9708-019B960494DF}">
-                <a14:hiddenLine xmlns="" xmlns:a14="http://schemas.microsoft.com/office/drawing/2010/main" w="9525">
+                <a14:hiddenLine xmlns:a14="http://schemas.microsoft.com/office/drawing/2010/main" xmlns="" w="9525">
                   <a:solidFill>
                     <a:srgbClr val="000000"/>
                   </a:solidFill>
@@ -5880,7 +5891,7 @@
             </a:ln>
             <a:extLst>
               <a:ext uri="{91240B29-F687-4f45-9708-019B960494DF}">
-                <a14:hiddenLine xmlns="" xmlns:a14="http://schemas.microsoft.com/office/drawing/2010/main" w="9525">
+                <a14:hiddenLine xmlns:a14="http://schemas.microsoft.com/office/drawing/2010/main" xmlns="" w="9525">
                   <a:solidFill>
                     <a:srgbClr val="000000"/>
                   </a:solidFill>
@@ -5970,7 +5981,7 @@
             </a:ln>
             <a:extLst>
               <a:ext uri="{91240B29-F687-4f45-9708-019B960494DF}">
-                <a14:hiddenLine xmlns="" xmlns:a14="http://schemas.microsoft.com/office/drawing/2010/main" w="9525">
+                <a14:hiddenLine xmlns:a14="http://schemas.microsoft.com/office/drawing/2010/main" xmlns="" w="9525">
                   <a:solidFill>
                     <a:srgbClr val="000000"/>
                   </a:solidFill>
@@ -6004,7 +6015,7 @@
             </a:ln>
             <a:extLst>
               <a:ext uri="{91240B29-F687-4f45-9708-019B960494DF}">
-                <a14:hiddenLine xmlns="" xmlns:a14="http://schemas.microsoft.com/office/drawing/2010/main" w="9525">
+                <a14:hiddenLine xmlns:a14="http://schemas.microsoft.com/office/drawing/2010/main" xmlns="" w="9525">
                   <a:solidFill>
                     <a:srgbClr val="000000"/>
                   </a:solidFill>
@@ -6094,7 +6105,7 @@
             </a:ln>
             <a:extLst>
               <a:ext uri="{91240B29-F687-4f45-9708-019B960494DF}">
-                <a14:hiddenLine xmlns="" xmlns:a14="http://schemas.microsoft.com/office/drawing/2010/main" w="9525">
+                <a14:hiddenLine xmlns:a14="http://schemas.microsoft.com/office/drawing/2010/main" xmlns="" w="9525">
                   <a:solidFill>
                     <a:srgbClr val="000000"/>
                   </a:solidFill>
@@ -6156,7 +6167,7 @@
             </a:ln>
             <a:extLst>
               <a:ext uri="{91240B29-F687-4f45-9708-019B960494DF}">
-                <a14:hiddenLine xmlns="" xmlns:a14="http://schemas.microsoft.com/office/drawing/2010/main" w="9525">
+                <a14:hiddenLine xmlns:a14="http://schemas.microsoft.com/office/drawing/2010/main" xmlns="" w="9525">
                   <a:solidFill>
                     <a:srgbClr val="000000"/>
                   </a:solidFill>
@@ -6218,7 +6229,7 @@
             </a:ln>
             <a:extLst>
               <a:ext uri="{91240B29-F687-4f45-9708-019B960494DF}">
-                <a14:hiddenLine xmlns="" xmlns:a14="http://schemas.microsoft.com/office/drawing/2010/main" w="9525">
+                <a14:hiddenLine xmlns:a14="http://schemas.microsoft.com/office/drawing/2010/main" xmlns="" w="9525">
                   <a:solidFill>
                     <a:srgbClr val="000000"/>
                   </a:solidFill>
@@ -6308,7 +6319,7 @@
             </a:ln>
             <a:extLst>
               <a:ext uri="{91240B29-F687-4f45-9708-019B960494DF}">
-                <a14:hiddenLine xmlns="" xmlns:a14="http://schemas.microsoft.com/office/drawing/2010/main" w="9525">
+                <a14:hiddenLine xmlns:a14="http://schemas.microsoft.com/office/drawing/2010/main" xmlns="" w="9525">
                   <a:solidFill>
                     <a:srgbClr val="000000"/>
                   </a:solidFill>
@@ -6376,7 +6387,7 @@
             </a:ln>
             <a:extLst>
               <a:ext uri="{91240B29-F687-4f45-9708-019B960494DF}">
-                <a14:hiddenLine xmlns="" xmlns:a14="http://schemas.microsoft.com/office/drawing/2010/main" w="9525">
+                <a14:hiddenLine xmlns:a14="http://schemas.microsoft.com/office/drawing/2010/main" xmlns="" w="9525">
                   <a:solidFill>
                     <a:srgbClr val="000000"/>
                   </a:solidFill>
@@ -6438,7 +6449,7 @@
             </a:ln>
             <a:extLst>
               <a:ext uri="{91240B29-F687-4f45-9708-019B960494DF}">
-                <a14:hiddenLine xmlns="" xmlns:a14="http://schemas.microsoft.com/office/drawing/2010/main" w="9525">
+                <a14:hiddenLine xmlns:a14="http://schemas.microsoft.com/office/drawing/2010/main" xmlns="" w="9525">
                   <a:solidFill>
                     <a:srgbClr val="000000"/>
                   </a:solidFill>
@@ -6528,7 +6539,7 @@
             </a:ln>
             <a:extLst>
               <a:ext uri="{91240B29-F687-4f45-9708-019B960494DF}">
-                <a14:hiddenLine xmlns="" xmlns:a14="http://schemas.microsoft.com/office/drawing/2010/main" w="9525">
+                <a14:hiddenLine xmlns:a14="http://schemas.microsoft.com/office/drawing/2010/main" xmlns="" w="9525">
                   <a:solidFill>
                     <a:srgbClr val="000000"/>
                   </a:solidFill>
@@ -6590,7 +6601,7 @@
             </a:ln>
             <a:extLst>
               <a:ext uri="{91240B29-F687-4f45-9708-019B960494DF}">
-                <a14:hiddenLine xmlns="" xmlns:a14="http://schemas.microsoft.com/office/drawing/2010/main" w="9525">
+                <a14:hiddenLine xmlns:a14="http://schemas.microsoft.com/office/drawing/2010/main" xmlns="" w="9525">
                   <a:solidFill>
                     <a:srgbClr val="000000"/>
                   </a:solidFill>
@@ -6680,7 +6691,7 @@
             </a:ln>
             <a:extLst>
               <a:ext uri="{91240B29-F687-4f45-9708-019B960494DF}">
-                <a14:hiddenLine xmlns="" xmlns:a14="http://schemas.microsoft.com/office/drawing/2010/main" w="9525">
+                <a14:hiddenLine xmlns:a14="http://schemas.microsoft.com/office/drawing/2010/main" xmlns="" w="9525">
                   <a:solidFill>
                     <a:srgbClr val="000000"/>
                   </a:solidFill>
@@ -6742,7 +6753,7 @@
             </a:ln>
             <a:extLst>
               <a:ext uri="{91240B29-F687-4f45-9708-019B960494DF}">
-                <a14:hiddenLine xmlns="" xmlns:a14="http://schemas.microsoft.com/office/drawing/2010/main" w="9525">
+                <a14:hiddenLine xmlns:a14="http://schemas.microsoft.com/office/drawing/2010/main" xmlns="" w="9525">
                   <a:solidFill>
                     <a:srgbClr val="000000"/>
                   </a:solidFill>
@@ -6832,7 +6843,7 @@
             </a:ln>
             <a:extLst>
               <a:ext uri="{91240B29-F687-4f45-9708-019B960494DF}">
-                <a14:hiddenLine xmlns="" xmlns:a14="http://schemas.microsoft.com/office/drawing/2010/main" w="9525">
+                <a14:hiddenLine xmlns:a14="http://schemas.microsoft.com/office/drawing/2010/main" xmlns="" w="9525">
                   <a:solidFill>
                     <a:srgbClr val="000000"/>
                   </a:solidFill>
@@ -6866,7 +6877,7 @@
             </a:ln>
             <a:extLst>
               <a:ext uri="{91240B29-F687-4f45-9708-019B960494DF}">
-                <a14:hiddenLine xmlns="" xmlns:a14="http://schemas.microsoft.com/office/drawing/2010/main" w="9525">
+                <a14:hiddenLine xmlns:a14="http://schemas.microsoft.com/office/drawing/2010/main" xmlns="" w="9525">
                   <a:solidFill>
                     <a:srgbClr val="000000"/>
                   </a:solidFill>
@@ -6931,7 +6942,7 @@
             </a:ln>
             <a:extLst>
               <a:ext uri="{91240B29-F687-4f45-9708-019B960494DF}">
-                <a14:hiddenLine xmlns="" xmlns:a14="http://schemas.microsoft.com/office/drawing/2010/main" w="9525">
+                <a14:hiddenLine xmlns:a14="http://schemas.microsoft.com/office/drawing/2010/main" xmlns="" w="9525">
                   <a:solidFill>
                     <a:srgbClr val="000000"/>
                   </a:solidFill>
@@ -7021,7 +7032,7 @@
             </a:ln>
             <a:extLst>
               <a:ext uri="{91240B29-F687-4f45-9708-019B960494DF}">
-                <a14:hiddenLine xmlns="" xmlns:a14="http://schemas.microsoft.com/office/drawing/2010/main" w="9525">
+                <a14:hiddenLine xmlns:a14="http://schemas.microsoft.com/office/drawing/2010/main" xmlns="" w="9525">
                   <a:solidFill>
                     <a:srgbClr val="000000"/>
                   </a:solidFill>
@@ -7083,7 +7094,7 @@
             </a:ln>
             <a:extLst>
               <a:ext uri="{91240B29-F687-4f45-9708-019B960494DF}">
-                <a14:hiddenLine xmlns="" xmlns:a14="http://schemas.microsoft.com/office/drawing/2010/main" w="9525">
+                <a14:hiddenLine xmlns:a14="http://schemas.microsoft.com/office/drawing/2010/main" xmlns="" w="9525">
                   <a:solidFill>
                     <a:srgbClr val="000000"/>
                   </a:solidFill>
@@ -7173,7 +7184,7 @@
             </a:ln>
             <a:extLst>
               <a:ext uri="{91240B29-F687-4f45-9708-019B960494DF}">
-                <a14:hiddenLine xmlns="" xmlns:a14="http://schemas.microsoft.com/office/drawing/2010/main" w="9525">
+                <a14:hiddenLine xmlns:a14="http://schemas.microsoft.com/office/drawing/2010/main" xmlns="" w="9525">
                   <a:solidFill>
                     <a:srgbClr val="000000"/>
                   </a:solidFill>
@@ -7263,7 +7274,7 @@
             </a:ln>
             <a:extLst>
               <a:ext uri="{91240B29-F687-4f45-9708-019B960494DF}">
-                <a14:hiddenLine xmlns="" xmlns:a14="http://schemas.microsoft.com/office/drawing/2010/main" w="9525">
+                <a14:hiddenLine xmlns:a14="http://schemas.microsoft.com/office/drawing/2010/main" xmlns="" w="9525">
                   <a:solidFill>
                     <a:srgbClr val="000000"/>
                   </a:solidFill>
@@ -7328,7 +7339,7 @@
             </a:ln>
             <a:extLst>
               <a:ext uri="{91240B29-F687-4f45-9708-019B960494DF}">
-                <a14:hiddenLine xmlns="" xmlns:a14="http://schemas.microsoft.com/office/drawing/2010/main" w="9525">
+                <a14:hiddenLine xmlns:a14="http://schemas.microsoft.com/office/drawing/2010/main" xmlns="" w="9525">
                   <a:solidFill>
                     <a:srgbClr val="000000"/>
                   </a:solidFill>
@@ -7390,7 +7401,7 @@
             </a:ln>
             <a:extLst>
               <a:ext uri="{91240B29-F687-4f45-9708-019B960494DF}">
-                <a14:hiddenLine xmlns="" xmlns:a14="http://schemas.microsoft.com/office/drawing/2010/main" w="9525">
+                <a14:hiddenLine xmlns:a14="http://schemas.microsoft.com/office/drawing/2010/main" xmlns="" w="9525">
                   <a:solidFill>
                     <a:srgbClr val="000000"/>
                   </a:solidFill>
@@ -7480,7 +7491,7 @@
             </a:ln>
             <a:extLst>
               <a:ext uri="{91240B29-F687-4f45-9708-019B960494DF}">
-                <a14:hiddenLine xmlns="" xmlns:a14="http://schemas.microsoft.com/office/drawing/2010/main" w="9525">
+                <a14:hiddenLine xmlns:a14="http://schemas.microsoft.com/office/drawing/2010/main" xmlns="" w="9525">
                   <a:solidFill>
                     <a:srgbClr val="000000"/>
                   </a:solidFill>
@@ -7570,7 +7581,7 @@
             </a:ln>
             <a:extLst>
               <a:ext uri="{91240B29-F687-4f45-9708-019B960494DF}">
-                <a14:hiddenLine xmlns="" xmlns:a14="http://schemas.microsoft.com/office/drawing/2010/main" w="9525">
+                <a14:hiddenLine xmlns:a14="http://schemas.microsoft.com/office/drawing/2010/main" xmlns="" w="9525">
                   <a:solidFill>
                     <a:srgbClr val="000000"/>
                   </a:solidFill>
@@ -7632,7 +7643,7 @@
             </a:ln>
             <a:extLst>
               <a:ext uri="{91240B29-F687-4f45-9708-019B960494DF}">
-                <a14:hiddenLine xmlns="" xmlns:a14="http://schemas.microsoft.com/office/drawing/2010/main" w="9525">
+                <a14:hiddenLine xmlns:a14="http://schemas.microsoft.com/office/drawing/2010/main" xmlns="" w="9525">
                   <a:solidFill>
                     <a:srgbClr val="000000"/>
                   </a:solidFill>
@@ -7752,7 +7763,7 @@
             </a:ln>
             <a:extLst>
               <a:ext uri="{91240B29-F687-4f45-9708-019B960494DF}">
-                <a14:hiddenLine xmlns="" xmlns:a14="http://schemas.microsoft.com/office/drawing/2010/main" w="9525">
+                <a14:hiddenLine xmlns:a14="http://schemas.microsoft.com/office/drawing/2010/main" xmlns="" w="9525">
                   <a:solidFill>
                     <a:srgbClr val="000000"/>
                   </a:solidFill>
@@ -7820,7 +7831,7 @@
             </a:ln>
             <a:extLst>
               <a:ext uri="{91240B29-F687-4f45-9708-019B960494DF}">
-                <a14:hiddenLine xmlns="" xmlns:a14="http://schemas.microsoft.com/office/drawing/2010/main" w="9525">
+                <a14:hiddenLine xmlns:a14="http://schemas.microsoft.com/office/drawing/2010/main" xmlns="" w="9525">
                   <a:solidFill>
                     <a:srgbClr val="000000"/>
                   </a:solidFill>
@@ -7910,7 +7921,7 @@
             </a:ln>
             <a:extLst>
               <a:ext uri="{91240B29-F687-4f45-9708-019B960494DF}">
-                <a14:hiddenLine xmlns="" xmlns:a14="http://schemas.microsoft.com/office/drawing/2010/main" w="9525">
+                <a14:hiddenLine xmlns:a14="http://schemas.microsoft.com/office/drawing/2010/main" xmlns="" w="9525">
                   <a:solidFill>
                     <a:srgbClr val="000000"/>
                   </a:solidFill>
@@ -8050,7 +8061,7 @@
           <a:p>
             <a:fld id="{47147380-C9A6-4292-80AD-55D5D6A2AAE3}" type="datetime1">
               <a:rPr lang="en-US" smtClean="0"/>
-              <a:t>3/10/2020</a:t>
+              <a:t>3/11/2020</a:t>
             </a:fld>
             <a:endParaRPr lang="en-US" dirty="0"/>
           </a:p>
@@ -8249,7 +8260,7 @@
           <a:p>
             <a:fld id="{4E46DBC0-D5DE-45A0-9330-4563F7536B4E}" type="datetime1">
               <a:rPr lang="en-US" smtClean="0"/>
-              <a:t>3/10/2020</a:t>
+              <a:t>3/11/2020</a:t>
             </a:fld>
             <a:endParaRPr lang="en-US" dirty="0"/>
           </a:p>
@@ -8433,7 +8444,7 @@
           <a:p>
             <a:fld id="{4E46DBC0-D5DE-45A0-9330-4563F7536B4E}" type="datetime1">
               <a:rPr lang="en-US" smtClean="0"/>
-              <a:t>3/10/2020</a:t>
+              <a:t>3/11/2020</a:t>
             </a:fld>
             <a:endParaRPr lang="en-US" dirty="0"/>
           </a:p>
@@ -8687,7 +8698,7 @@
           <a:p>
             <a:fld id="{E9AB3734-E0AF-4094-B819-76ED29494144}" type="datetime1">
               <a:rPr lang="en-US" smtClean="0"/>
-              <a:t>3/10/2020</a:t>
+              <a:t>3/11/2020</a:t>
             </a:fld>
             <a:endParaRPr lang="en-US" dirty="0"/>
           </a:p>
@@ -8923,7 +8934,7 @@
           <a:p>
             <a:fld id="{46249C16-8A15-4B1C-86DD-7EF5F36FF546}" type="datetime1">
               <a:rPr lang="en-US" smtClean="0"/>
-              <a:t>3/10/2020</a:t>
+              <a:t>3/11/2020</a:t>
             </a:fld>
             <a:endParaRPr lang="en-US" dirty="0"/>
           </a:p>
@@ -9308,7 +9319,7 @@
           <a:p>
             <a:fld id="{1AB8A156-96D8-493F-98C7-4297A490F926}" type="datetime1">
               <a:rPr lang="en-US" smtClean="0"/>
-              <a:t>3/10/2020</a:t>
+              <a:t>3/11/2020</a:t>
             </a:fld>
             <a:endParaRPr lang="en-US" dirty="0"/>
           </a:p>
@@ -9430,7 +9441,7 @@
           <a:p>
             <a:fld id="{6EFEADFD-5DAD-460C-9ABC-D0BAD649D43B}" type="datetime1">
               <a:rPr lang="en-US" smtClean="0"/>
-              <a:t>3/10/2020</a:t>
+              <a:t>3/11/2020</a:t>
             </a:fld>
             <a:endParaRPr lang="en-US" dirty="0"/>
           </a:p>
@@ -9529,7 +9540,7 @@
           <a:p>
             <a:fld id="{AD9DEACD-BF6D-423A-A9B6-F7FDB2F8FA86}" type="datetime1">
               <a:rPr lang="en-US" smtClean="0"/>
-              <a:t>3/10/2020</a:t>
+              <a:t>3/11/2020</a:t>
             </a:fld>
             <a:endParaRPr lang="en-US" dirty="0"/>
           </a:p>
@@ -9782,7 +9793,7 @@
           <a:p>
             <a:fld id="{24886110-DB48-415B-AE51-1D16DEC2A997}" type="datetime1">
               <a:rPr lang="en-US" smtClean="0"/>
-              <a:t>3/10/2020</a:t>
+              <a:t>3/11/2020</a:t>
             </a:fld>
             <a:endParaRPr lang="en-US" dirty="0"/>
           </a:p>
@@ -10038,7 +10049,7 @@
           <a:p>
             <a:fld id="{16A03D9E-D050-45A3-B8FE-A436082DC5B5}" type="datetime1">
               <a:rPr lang="en-US" smtClean="0"/>
-              <a:t>3/10/2020</a:t>
+              <a:t>3/11/2020</a:t>
             </a:fld>
             <a:endParaRPr lang="en-US" dirty="0"/>
           </a:p>
@@ -10299,7 +10310,7 @@
           <a:p>
             <a:fld id="{7094CD8F-F50E-4E4E-A619-C83536A21564}" type="datetime1">
               <a:rPr lang="en-US" smtClean="0"/>
-              <a:t>3/10/2020</a:t>
+              <a:t>3/11/2020</a:t>
             </a:fld>
             <a:endParaRPr lang="en-US" dirty="0"/>
           </a:p>
@@ -10499,7 +10510,7 @@
           <a:p>
             <a:fld id="{369190F8-86C8-482D-94FF-2357E3904808}" type="datetime1">
               <a:rPr lang="en-US" smtClean="0"/>
-              <a:t>3/10/2020</a:t>
+              <a:t>3/11/2020</a:t>
             </a:fld>
             <a:endParaRPr lang="en-US" dirty="0"/>
           </a:p>
@@ -10766,7 +10777,7 @@
           <a:p>
             <a:fld id="{7DCCB83B-D0C2-4A7D-ACE4-394E031D1D6D}" type="datetime1">
               <a:rPr lang="en-US" smtClean="0"/>
-              <a:t>3/10/2020</a:t>
+              <a:t>3/11/2020</a:t>
             </a:fld>
             <a:endParaRPr lang="en-US" dirty="0"/>
           </a:p>
@@ -11297,7 +11308,7 @@
           <a:p>
             <a:fld id="{E9AB3734-E0AF-4094-B819-76ED29494144}" type="datetime1">
               <a:rPr lang="en-US" smtClean="0"/>
-              <a:t>3/10/2020</a:t>
+              <a:t>3/11/2020</a:t>
             </a:fld>
             <a:endParaRPr lang="en-US" dirty="0"/>
           </a:p>
@@ -11507,7 +11518,7 @@
           <a:p>
             <a:fld id="{A562CC47-EB05-49E7-BB79-D60F887758B3}" type="datetime1">
               <a:rPr lang="en-US" smtClean="0"/>
-              <a:t>3/10/2020</a:t>
+              <a:t>3/11/2020</a:t>
             </a:fld>
             <a:endParaRPr lang="en-US" dirty="0"/>
           </a:p>
@@ -12057,7 +12068,7 @@
           <a:p>
             <a:fld id="{62DB895A-F06A-4C22-B764-5FE32A2A5F48}" type="datetime1">
               <a:rPr lang="en-US" smtClean="0"/>
-              <a:t>3/10/2020</a:t>
+              <a:t>3/11/2020</a:t>
             </a:fld>
             <a:endParaRPr lang="en-US" dirty="0"/>
           </a:p>
@@ -12781,7 +12792,7 @@
           <a:p>
             <a:fld id="{5D42CFDC-1EF5-4A06-BF89-EF8A8F6CD796}" type="datetime1">
               <a:rPr lang="en-US" smtClean="0"/>
-              <a:t>3/10/2020</a:t>
+              <a:t>3/11/2020</a:t>
             </a:fld>
             <a:endParaRPr lang="en-US" dirty="0"/>
           </a:p>
@@ -12959,7 +12970,7 @@
           <a:p>
             <a:fld id="{13815C30-DF68-4F98-AF35-879B076E4017}" type="datetime1">
               <a:rPr lang="en-US" smtClean="0"/>
-              <a:t>3/10/2020</a:t>
+              <a:t>3/11/2020</a:t>
             </a:fld>
             <a:endParaRPr lang="en-US" dirty="0"/>
           </a:p>
@@ -13143,7 +13154,7 @@
           <a:p>
             <a:fld id="{EC5DC2D5-0D2B-43CA-B09F-4232E3D1DD6E}" type="datetime1">
               <a:rPr lang="en-US" smtClean="0"/>
-              <a:t>3/10/2020</a:t>
+              <a:t>3/11/2020</a:t>
             </a:fld>
             <a:endParaRPr lang="en-US" dirty="0"/>
           </a:p>
@@ -13265,7 +13276,7 @@
           <a:noFill/>
           <a:extLst>
             <a:ext uri="{909E8E84-426E-40dd-AFC4-6F175D3DCCD1}">
-              <a14:hiddenFill xmlns="" xmlns:a14="http://schemas.microsoft.com/office/drawing/2010/main">
+              <a14:hiddenFill xmlns:a14="http://schemas.microsoft.com/office/drawing/2010/main" xmlns="">
                 <a:solidFill>
                   <a:srgbClr val="FFFFFF"/>
                 </a:solidFill>
@@ -13325,7 +13336,7 @@
             </a:ln>
             <a:extLst>
               <a:ext uri="{91240B29-F687-4f45-9708-019B960494DF}">
-                <a14:hiddenLine xmlns="" xmlns:a14="http://schemas.microsoft.com/office/drawing/2010/main" w="9525">
+                <a14:hiddenLine xmlns:a14="http://schemas.microsoft.com/office/drawing/2010/main" xmlns="" w="9525">
                   <a:solidFill>
                     <a:srgbClr val="000000"/>
                   </a:solidFill>
@@ -13415,7 +13426,7 @@
             </a:ln>
             <a:extLst>
               <a:ext uri="{91240B29-F687-4f45-9708-019B960494DF}">
-                <a14:hiddenLine xmlns="" xmlns:a14="http://schemas.microsoft.com/office/drawing/2010/main" w="9525">
+                <a14:hiddenLine xmlns:a14="http://schemas.microsoft.com/office/drawing/2010/main" xmlns="" w="9525">
                   <a:solidFill>
                     <a:srgbClr val="000000"/>
                   </a:solidFill>
@@ -13505,7 +13516,7 @@
             </a:ln>
             <a:extLst>
               <a:ext uri="{91240B29-F687-4f45-9708-019B960494DF}">
-                <a14:hiddenLine xmlns="" xmlns:a14="http://schemas.microsoft.com/office/drawing/2010/main" w="9525">
+                <a14:hiddenLine xmlns:a14="http://schemas.microsoft.com/office/drawing/2010/main" xmlns="" w="9525">
                   <a:solidFill>
                     <a:srgbClr val="000000"/>
                   </a:solidFill>
@@ -13539,7 +13550,7 @@
             </a:ln>
             <a:extLst>
               <a:ext uri="{91240B29-F687-4f45-9708-019B960494DF}">
-                <a14:hiddenLine xmlns="" xmlns:a14="http://schemas.microsoft.com/office/drawing/2010/main" w="9525">
+                <a14:hiddenLine xmlns:a14="http://schemas.microsoft.com/office/drawing/2010/main" xmlns="" w="9525">
                   <a:solidFill>
                     <a:srgbClr val="000000"/>
                   </a:solidFill>
@@ -13629,7 +13640,7 @@
             </a:ln>
             <a:extLst>
               <a:ext uri="{91240B29-F687-4f45-9708-019B960494DF}">
-                <a14:hiddenLine xmlns="" xmlns:a14="http://schemas.microsoft.com/office/drawing/2010/main" w="9525">
+                <a14:hiddenLine xmlns:a14="http://schemas.microsoft.com/office/drawing/2010/main" xmlns="" w="9525">
                   <a:solidFill>
                     <a:srgbClr val="000000"/>
                   </a:solidFill>
@@ -13691,7 +13702,7 @@
             </a:ln>
             <a:extLst>
               <a:ext uri="{91240B29-F687-4f45-9708-019B960494DF}">
-                <a14:hiddenLine xmlns="" xmlns:a14="http://schemas.microsoft.com/office/drawing/2010/main" w="9525">
+                <a14:hiddenLine xmlns:a14="http://schemas.microsoft.com/office/drawing/2010/main" xmlns="" w="9525">
                   <a:solidFill>
                     <a:srgbClr val="000000"/>
                   </a:solidFill>
@@ -13753,7 +13764,7 @@
             </a:ln>
             <a:extLst>
               <a:ext uri="{91240B29-F687-4f45-9708-019B960494DF}">
-                <a14:hiddenLine xmlns="" xmlns:a14="http://schemas.microsoft.com/office/drawing/2010/main" w="9525">
+                <a14:hiddenLine xmlns:a14="http://schemas.microsoft.com/office/drawing/2010/main" xmlns="" w="9525">
                   <a:solidFill>
                     <a:srgbClr val="000000"/>
                   </a:solidFill>
@@ -13843,7 +13854,7 @@
             </a:ln>
             <a:extLst>
               <a:ext uri="{91240B29-F687-4f45-9708-019B960494DF}">
-                <a14:hiddenLine xmlns="" xmlns:a14="http://schemas.microsoft.com/office/drawing/2010/main" w="9525">
+                <a14:hiddenLine xmlns:a14="http://schemas.microsoft.com/office/drawing/2010/main" xmlns="" w="9525">
                   <a:solidFill>
                     <a:srgbClr val="000000"/>
                   </a:solidFill>
@@ -13905,7 +13916,7 @@
             </a:ln>
             <a:extLst>
               <a:ext uri="{91240B29-F687-4f45-9708-019B960494DF}">
-                <a14:hiddenLine xmlns="" xmlns:a14="http://schemas.microsoft.com/office/drawing/2010/main" w="9525">
+                <a14:hiddenLine xmlns:a14="http://schemas.microsoft.com/office/drawing/2010/main" xmlns="" w="9525">
                   <a:solidFill>
                     <a:srgbClr val="000000"/>
                   </a:solidFill>
@@ -13967,7 +13978,7 @@
             </a:ln>
             <a:extLst>
               <a:ext uri="{91240B29-F687-4f45-9708-019B960494DF}">
-                <a14:hiddenLine xmlns="" xmlns:a14="http://schemas.microsoft.com/office/drawing/2010/main" w="9525">
+                <a14:hiddenLine xmlns:a14="http://schemas.microsoft.com/office/drawing/2010/main" xmlns="" w="9525">
                   <a:solidFill>
                     <a:srgbClr val="000000"/>
                   </a:solidFill>
@@ -14057,7 +14068,7 @@
             </a:ln>
             <a:extLst>
               <a:ext uri="{91240B29-F687-4f45-9708-019B960494DF}">
-                <a14:hiddenLine xmlns="" xmlns:a14="http://schemas.microsoft.com/office/drawing/2010/main" w="9525">
+                <a14:hiddenLine xmlns:a14="http://schemas.microsoft.com/office/drawing/2010/main" xmlns="" w="9525">
                   <a:solidFill>
                     <a:srgbClr val="000000"/>
                   </a:solidFill>
@@ -14147,7 +14158,7 @@
             </a:ln>
             <a:extLst>
               <a:ext uri="{91240B29-F687-4f45-9708-019B960494DF}">
-                <a14:hiddenLine xmlns="" xmlns:a14="http://schemas.microsoft.com/office/drawing/2010/main" w="9525">
+                <a14:hiddenLine xmlns:a14="http://schemas.microsoft.com/office/drawing/2010/main" xmlns="" w="9525">
                   <a:solidFill>
                     <a:srgbClr val="000000"/>
                   </a:solidFill>
@@ -14209,7 +14220,7 @@
             </a:ln>
             <a:extLst>
               <a:ext uri="{91240B29-F687-4f45-9708-019B960494DF}">
-                <a14:hiddenLine xmlns="" xmlns:a14="http://schemas.microsoft.com/office/drawing/2010/main" w="9525">
+                <a14:hiddenLine xmlns:a14="http://schemas.microsoft.com/office/drawing/2010/main" xmlns="" w="9525">
                   <a:solidFill>
                     <a:srgbClr val="000000"/>
                   </a:solidFill>
@@ -14319,7 +14330,7 @@
             </a:ln>
             <a:extLst>
               <a:ext uri="{91240B29-F687-4f45-9708-019B960494DF}">
-                <a14:hiddenLine xmlns="" xmlns:a14="http://schemas.microsoft.com/office/drawing/2010/main" w="9525">
+                <a14:hiddenLine xmlns:a14="http://schemas.microsoft.com/office/drawing/2010/main" xmlns="" w="9525">
                   <a:solidFill>
                     <a:srgbClr val="000000"/>
                   </a:solidFill>
@@ -14381,7 +14392,7 @@
             </a:ln>
             <a:extLst>
               <a:ext uri="{91240B29-F687-4f45-9708-019B960494DF}">
-                <a14:hiddenLine xmlns="" xmlns:a14="http://schemas.microsoft.com/office/drawing/2010/main" w="9525">
+                <a14:hiddenLine xmlns:a14="http://schemas.microsoft.com/office/drawing/2010/main" xmlns="" w="9525">
                   <a:solidFill>
                     <a:srgbClr val="000000"/>
                   </a:solidFill>
@@ -14471,7 +14482,7 @@
             </a:ln>
             <a:extLst>
               <a:ext uri="{91240B29-F687-4f45-9708-019B960494DF}">
-                <a14:hiddenLine xmlns="" xmlns:a14="http://schemas.microsoft.com/office/drawing/2010/main" w="9525">
+                <a14:hiddenLine xmlns:a14="http://schemas.microsoft.com/office/drawing/2010/main" xmlns="" w="9525">
                   <a:solidFill>
                     <a:srgbClr val="000000"/>
                   </a:solidFill>
@@ -14561,7 +14572,7 @@
             </a:ln>
             <a:extLst>
               <a:ext uri="{91240B29-F687-4f45-9708-019B960494DF}">
-                <a14:hiddenLine xmlns="" xmlns:a14="http://schemas.microsoft.com/office/drawing/2010/main" w="9525">
+                <a14:hiddenLine xmlns:a14="http://schemas.microsoft.com/office/drawing/2010/main" xmlns="" w="9525">
                   <a:solidFill>
                     <a:srgbClr val="000000"/>
                   </a:solidFill>
@@ -14623,7 +14634,7 @@
             </a:ln>
             <a:extLst>
               <a:ext uri="{91240B29-F687-4f45-9708-019B960494DF}">
-                <a14:hiddenLine xmlns="" xmlns:a14="http://schemas.microsoft.com/office/drawing/2010/main" w="9525">
+                <a14:hiddenLine xmlns:a14="http://schemas.microsoft.com/office/drawing/2010/main" xmlns="" w="9525">
                   <a:solidFill>
                     <a:srgbClr val="000000"/>
                   </a:solidFill>
@@ -14713,7 +14724,7 @@
             </a:ln>
             <a:extLst>
               <a:ext uri="{91240B29-F687-4f45-9708-019B960494DF}">
-                <a14:hiddenLine xmlns="" xmlns:a14="http://schemas.microsoft.com/office/drawing/2010/main" w="9525">
+                <a14:hiddenLine xmlns:a14="http://schemas.microsoft.com/office/drawing/2010/main" xmlns="" w="9525">
                   <a:solidFill>
                     <a:srgbClr val="000000"/>
                   </a:solidFill>
@@ -14803,7 +14814,7 @@
             </a:ln>
             <a:extLst>
               <a:ext uri="{91240B29-F687-4f45-9708-019B960494DF}">
-                <a14:hiddenLine xmlns="" xmlns:a14="http://schemas.microsoft.com/office/drawing/2010/main" w="9525">
+                <a14:hiddenLine xmlns:a14="http://schemas.microsoft.com/office/drawing/2010/main" xmlns="" w="9525">
                   <a:solidFill>
                     <a:srgbClr val="000000"/>
                   </a:solidFill>
@@ -14859,7 +14870,7 @@
             </a:ln>
             <a:extLst>
               <a:ext uri="{91240B29-F687-4f45-9708-019B960494DF}">
-                <a14:hiddenLine xmlns="" xmlns:a14="http://schemas.microsoft.com/office/drawing/2010/main" w="9525">
+                <a14:hiddenLine xmlns:a14="http://schemas.microsoft.com/office/drawing/2010/main" xmlns="" w="9525">
                   <a:solidFill>
                     <a:srgbClr val="000000"/>
                   </a:solidFill>
@@ -14949,7 +14960,7 @@
             </a:ln>
             <a:extLst>
               <a:ext uri="{91240B29-F687-4f45-9708-019B960494DF}">
-                <a14:hiddenLine xmlns="" xmlns:a14="http://schemas.microsoft.com/office/drawing/2010/main" w="9525">
+                <a14:hiddenLine xmlns:a14="http://schemas.microsoft.com/office/drawing/2010/main" xmlns="" w="9525">
                   <a:solidFill>
                     <a:srgbClr val="000000"/>
                   </a:solidFill>
@@ -15005,7 +15016,7 @@
             </a:ln>
             <a:extLst>
               <a:ext uri="{91240B29-F687-4f45-9708-019B960494DF}">
-                <a14:hiddenLine xmlns="" xmlns:a14="http://schemas.microsoft.com/office/drawing/2010/main" w="9525">
+                <a14:hiddenLine xmlns:a14="http://schemas.microsoft.com/office/drawing/2010/main" xmlns="" w="9525">
                   <a:solidFill>
                     <a:srgbClr val="000000"/>
                   </a:solidFill>
@@ -15095,7 +15106,7 @@
             </a:ln>
             <a:extLst>
               <a:ext uri="{91240B29-F687-4f45-9708-019B960494DF}">
-                <a14:hiddenLine xmlns="" xmlns:a14="http://schemas.microsoft.com/office/drawing/2010/main" w="9525">
+                <a14:hiddenLine xmlns:a14="http://schemas.microsoft.com/office/drawing/2010/main" xmlns="" w="9525">
                   <a:solidFill>
                     <a:srgbClr val="000000"/>
                   </a:solidFill>
@@ -15163,7 +15174,7 @@
             </a:ln>
             <a:extLst>
               <a:ext uri="{91240B29-F687-4f45-9708-019B960494DF}">
-                <a14:hiddenLine xmlns="" xmlns:a14="http://schemas.microsoft.com/office/drawing/2010/main" w="9525">
+                <a14:hiddenLine xmlns:a14="http://schemas.microsoft.com/office/drawing/2010/main" xmlns="" w="9525">
                   <a:solidFill>
                     <a:srgbClr val="000000"/>
                   </a:solidFill>
@@ -15253,7 +15264,7 @@
             </a:ln>
             <a:extLst>
               <a:ext uri="{91240B29-F687-4f45-9708-019B960494DF}">
-                <a14:hiddenLine xmlns="" xmlns:a14="http://schemas.microsoft.com/office/drawing/2010/main" w="9525">
+                <a14:hiddenLine xmlns:a14="http://schemas.microsoft.com/office/drawing/2010/main" xmlns="" w="9525">
                   <a:solidFill>
                     <a:srgbClr val="000000"/>
                   </a:solidFill>
@@ -15321,7 +15332,7 @@
             </a:ln>
             <a:extLst>
               <a:ext uri="{91240B29-F687-4f45-9708-019B960494DF}">
-                <a14:hiddenLine xmlns="" xmlns:a14="http://schemas.microsoft.com/office/drawing/2010/main" w="9525">
+                <a14:hiddenLine xmlns:a14="http://schemas.microsoft.com/office/drawing/2010/main" xmlns="" w="9525">
                   <a:solidFill>
                     <a:srgbClr val="000000"/>
                   </a:solidFill>
@@ -15411,7 +15422,7 @@
             </a:ln>
             <a:extLst>
               <a:ext uri="{91240B29-F687-4f45-9708-019B960494DF}">
-                <a14:hiddenLine xmlns="" xmlns:a14="http://schemas.microsoft.com/office/drawing/2010/main" w="9525">
+                <a14:hiddenLine xmlns:a14="http://schemas.microsoft.com/office/drawing/2010/main" xmlns="" w="9525">
                   <a:solidFill>
                     <a:srgbClr val="000000"/>
                   </a:solidFill>
@@ -15445,7 +15456,7 @@
             </a:ln>
             <a:extLst>
               <a:ext uri="{91240B29-F687-4f45-9708-019B960494DF}">
-                <a14:hiddenLine xmlns="" xmlns:a14="http://schemas.microsoft.com/office/drawing/2010/main" w="9525">
+                <a14:hiddenLine xmlns:a14="http://schemas.microsoft.com/office/drawing/2010/main" xmlns="" w="9525">
                   <a:solidFill>
                     <a:srgbClr val="000000"/>
                   </a:solidFill>
@@ -15535,7 +15546,7 @@
             </a:ln>
             <a:extLst>
               <a:ext uri="{91240B29-F687-4f45-9708-019B960494DF}">
-                <a14:hiddenLine xmlns="" xmlns:a14="http://schemas.microsoft.com/office/drawing/2010/main" w="9525">
+                <a14:hiddenLine xmlns:a14="http://schemas.microsoft.com/office/drawing/2010/main" xmlns="" w="9525">
                   <a:solidFill>
                     <a:srgbClr val="000000"/>
                   </a:solidFill>
@@ -15597,7 +15608,7 @@
             </a:ln>
             <a:extLst>
               <a:ext uri="{91240B29-F687-4f45-9708-019B960494DF}">
-                <a14:hiddenLine xmlns="" xmlns:a14="http://schemas.microsoft.com/office/drawing/2010/main" w="9525">
+                <a14:hiddenLine xmlns:a14="http://schemas.microsoft.com/office/drawing/2010/main" xmlns="" w="9525">
                   <a:solidFill>
                     <a:srgbClr val="000000"/>
                   </a:solidFill>
@@ -15659,7 +15670,7 @@
             </a:ln>
             <a:extLst>
               <a:ext uri="{91240B29-F687-4f45-9708-019B960494DF}">
-                <a14:hiddenLine xmlns="" xmlns:a14="http://schemas.microsoft.com/office/drawing/2010/main" w="9525">
+                <a14:hiddenLine xmlns:a14="http://schemas.microsoft.com/office/drawing/2010/main" xmlns="" w="9525">
                   <a:solidFill>
                     <a:srgbClr val="000000"/>
                   </a:solidFill>
@@ -15749,7 +15760,7 @@
             </a:ln>
             <a:extLst>
               <a:ext uri="{91240B29-F687-4f45-9708-019B960494DF}">
-                <a14:hiddenLine xmlns="" xmlns:a14="http://schemas.microsoft.com/office/drawing/2010/main" w="9525">
+                <a14:hiddenLine xmlns:a14="http://schemas.microsoft.com/office/drawing/2010/main" xmlns="" w="9525">
                   <a:solidFill>
                     <a:srgbClr val="000000"/>
                   </a:solidFill>
@@ -15817,7 +15828,7 @@
             </a:ln>
             <a:extLst>
               <a:ext uri="{91240B29-F687-4f45-9708-019B960494DF}">
-                <a14:hiddenLine xmlns="" xmlns:a14="http://schemas.microsoft.com/office/drawing/2010/main" w="9525">
+                <a14:hiddenLine xmlns:a14="http://schemas.microsoft.com/office/drawing/2010/main" xmlns="" w="9525">
                   <a:solidFill>
                     <a:srgbClr val="000000"/>
                   </a:solidFill>
@@ -15879,7 +15890,7 @@
             </a:ln>
             <a:extLst>
               <a:ext uri="{91240B29-F687-4f45-9708-019B960494DF}">
-                <a14:hiddenLine xmlns="" xmlns:a14="http://schemas.microsoft.com/office/drawing/2010/main" w="9525">
+                <a14:hiddenLine xmlns:a14="http://schemas.microsoft.com/office/drawing/2010/main" xmlns="" w="9525">
                   <a:solidFill>
                     <a:srgbClr val="000000"/>
                   </a:solidFill>
@@ -15969,7 +15980,7 @@
             </a:ln>
             <a:extLst>
               <a:ext uri="{91240B29-F687-4f45-9708-019B960494DF}">
-                <a14:hiddenLine xmlns="" xmlns:a14="http://schemas.microsoft.com/office/drawing/2010/main" w="9525">
+                <a14:hiddenLine xmlns:a14="http://schemas.microsoft.com/office/drawing/2010/main" xmlns="" w="9525">
                   <a:solidFill>
                     <a:srgbClr val="000000"/>
                   </a:solidFill>
@@ -16031,7 +16042,7 @@
             </a:ln>
             <a:extLst>
               <a:ext uri="{91240B29-F687-4f45-9708-019B960494DF}">
-                <a14:hiddenLine xmlns="" xmlns:a14="http://schemas.microsoft.com/office/drawing/2010/main" w="9525">
+                <a14:hiddenLine xmlns:a14="http://schemas.microsoft.com/office/drawing/2010/main" xmlns="" w="9525">
                   <a:solidFill>
                     <a:srgbClr val="000000"/>
                   </a:solidFill>
@@ -16121,7 +16132,7 @@
             </a:ln>
             <a:extLst>
               <a:ext uri="{91240B29-F687-4f45-9708-019B960494DF}">
-                <a14:hiddenLine xmlns="" xmlns:a14="http://schemas.microsoft.com/office/drawing/2010/main" w="9525">
+                <a14:hiddenLine xmlns:a14="http://schemas.microsoft.com/office/drawing/2010/main" xmlns="" w="9525">
                   <a:solidFill>
                     <a:srgbClr val="000000"/>
                   </a:solidFill>
@@ -16183,7 +16194,7 @@
             </a:ln>
             <a:extLst>
               <a:ext uri="{91240B29-F687-4f45-9708-019B960494DF}">
-                <a14:hiddenLine xmlns="" xmlns:a14="http://schemas.microsoft.com/office/drawing/2010/main" w="9525">
+                <a14:hiddenLine xmlns:a14="http://schemas.microsoft.com/office/drawing/2010/main" xmlns="" w="9525">
                   <a:solidFill>
                     <a:srgbClr val="000000"/>
                   </a:solidFill>
@@ -16273,7 +16284,7 @@
             </a:ln>
             <a:extLst>
               <a:ext uri="{91240B29-F687-4f45-9708-019B960494DF}">
-                <a14:hiddenLine xmlns="" xmlns:a14="http://schemas.microsoft.com/office/drawing/2010/main" w="9525">
+                <a14:hiddenLine xmlns:a14="http://schemas.microsoft.com/office/drawing/2010/main" xmlns="" w="9525">
                   <a:solidFill>
                     <a:srgbClr val="000000"/>
                   </a:solidFill>
@@ -16307,7 +16318,7 @@
             </a:ln>
             <a:extLst>
               <a:ext uri="{91240B29-F687-4f45-9708-019B960494DF}">
-                <a14:hiddenLine xmlns="" xmlns:a14="http://schemas.microsoft.com/office/drawing/2010/main" w="9525">
+                <a14:hiddenLine xmlns:a14="http://schemas.microsoft.com/office/drawing/2010/main" xmlns="" w="9525">
                   <a:solidFill>
                     <a:srgbClr val="000000"/>
                   </a:solidFill>
@@ -16372,7 +16383,7 @@
             </a:ln>
             <a:extLst>
               <a:ext uri="{91240B29-F687-4f45-9708-019B960494DF}">
-                <a14:hiddenLine xmlns="" xmlns:a14="http://schemas.microsoft.com/office/drawing/2010/main" w="9525">
+                <a14:hiddenLine xmlns:a14="http://schemas.microsoft.com/office/drawing/2010/main" xmlns="" w="9525">
                   <a:solidFill>
                     <a:srgbClr val="000000"/>
                   </a:solidFill>
@@ -16462,7 +16473,7 @@
             </a:ln>
             <a:extLst>
               <a:ext uri="{91240B29-F687-4f45-9708-019B960494DF}">
-                <a14:hiddenLine xmlns="" xmlns:a14="http://schemas.microsoft.com/office/drawing/2010/main" w="9525">
+                <a14:hiddenLine xmlns:a14="http://schemas.microsoft.com/office/drawing/2010/main" xmlns="" w="9525">
                   <a:solidFill>
                     <a:srgbClr val="000000"/>
                   </a:solidFill>
@@ -16524,7 +16535,7 @@
             </a:ln>
             <a:extLst>
               <a:ext uri="{91240B29-F687-4f45-9708-019B960494DF}">
-                <a14:hiddenLine xmlns="" xmlns:a14="http://schemas.microsoft.com/office/drawing/2010/main" w="9525">
+                <a14:hiddenLine xmlns:a14="http://schemas.microsoft.com/office/drawing/2010/main" xmlns="" w="9525">
                   <a:solidFill>
                     <a:srgbClr val="000000"/>
                   </a:solidFill>
@@ -16614,7 +16625,7 @@
             </a:ln>
             <a:extLst>
               <a:ext uri="{91240B29-F687-4f45-9708-019B960494DF}">
-                <a14:hiddenLine xmlns="" xmlns:a14="http://schemas.microsoft.com/office/drawing/2010/main" w="9525">
+                <a14:hiddenLine xmlns:a14="http://schemas.microsoft.com/office/drawing/2010/main" xmlns="" w="9525">
                   <a:solidFill>
                     <a:srgbClr val="000000"/>
                   </a:solidFill>
@@ -16704,7 +16715,7 @@
             </a:ln>
             <a:extLst>
               <a:ext uri="{91240B29-F687-4f45-9708-019B960494DF}">
-                <a14:hiddenLine xmlns="" xmlns:a14="http://schemas.microsoft.com/office/drawing/2010/main" w="9525">
+                <a14:hiddenLine xmlns:a14="http://schemas.microsoft.com/office/drawing/2010/main" xmlns="" w="9525">
                   <a:solidFill>
                     <a:srgbClr val="000000"/>
                   </a:solidFill>
@@ -16769,7 +16780,7 @@
             </a:ln>
             <a:extLst>
               <a:ext uri="{91240B29-F687-4f45-9708-019B960494DF}">
-                <a14:hiddenLine xmlns="" xmlns:a14="http://schemas.microsoft.com/office/drawing/2010/main" w="9525">
+                <a14:hiddenLine xmlns:a14="http://schemas.microsoft.com/office/drawing/2010/main" xmlns="" w="9525">
                   <a:solidFill>
                     <a:srgbClr val="000000"/>
                   </a:solidFill>
@@ -16831,7 +16842,7 @@
             </a:ln>
             <a:extLst>
               <a:ext uri="{91240B29-F687-4f45-9708-019B960494DF}">
-                <a14:hiddenLine xmlns="" xmlns:a14="http://schemas.microsoft.com/office/drawing/2010/main" w="9525">
+                <a14:hiddenLine xmlns:a14="http://schemas.microsoft.com/office/drawing/2010/main" xmlns="" w="9525">
                   <a:solidFill>
                     <a:srgbClr val="000000"/>
                   </a:solidFill>
@@ -16921,7 +16932,7 @@
             </a:ln>
             <a:extLst>
               <a:ext uri="{91240B29-F687-4f45-9708-019B960494DF}">
-                <a14:hiddenLine xmlns="" xmlns:a14="http://schemas.microsoft.com/office/drawing/2010/main" w="9525">
+                <a14:hiddenLine xmlns:a14="http://schemas.microsoft.com/office/drawing/2010/main" xmlns="" w="9525">
                   <a:solidFill>
                     <a:srgbClr val="000000"/>
                   </a:solidFill>
@@ -17011,7 +17022,7 @@
             </a:ln>
             <a:extLst>
               <a:ext uri="{91240B29-F687-4f45-9708-019B960494DF}">
-                <a14:hiddenLine xmlns="" xmlns:a14="http://schemas.microsoft.com/office/drawing/2010/main" w="9525">
+                <a14:hiddenLine xmlns:a14="http://schemas.microsoft.com/office/drawing/2010/main" xmlns="" w="9525">
                   <a:solidFill>
                     <a:srgbClr val="000000"/>
                   </a:solidFill>
@@ -17073,7 +17084,7 @@
             </a:ln>
             <a:extLst>
               <a:ext uri="{91240B29-F687-4f45-9708-019B960494DF}">
-                <a14:hiddenLine xmlns="" xmlns:a14="http://schemas.microsoft.com/office/drawing/2010/main" w="9525">
+                <a14:hiddenLine xmlns:a14="http://schemas.microsoft.com/office/drawing/2010/main" xmlns="" w="9525">
                   <a:solidFill>
                     <a:srgbClr val="000000"/>
                   </a:solidFill>
@@ -17193,7 +17204,7 @@
             </a:ln>
             <a:extLst>
               <a:ext uri="{91240B29-F687-4f45-9708-019B960494DF}">
-                <a14:hiddenLine xmlns="" xmlns:a14="http://schemas.microsoft.com/office/drawing/2010/main" w="9525">
+                <a14:hiddenLine xmlns:a14="http://schemas.microsoft.com/office/drawing/2010/main" xmlns="" w="9525">
                   <a:solidFill>
                     <a:srgbClr val="000000"/>
                   </a:solidFill>
@@ -17261,7 +17272,7 @@
             </a:ln>
             <a:extLst>
               <a:ext uri="{91240B29-F687-4f45-9708-019B960494DF}">
-                <a14:hiddenLine xmlns="" xmlns:a14="http://schemas.microsoft.com/office/drawing/2010/main" w="9525">
+                <a14:hiddenLine xmlns:a14="http://schemas.microsoft.com/office/drawing/2010/main" xmlns="" w="9525">
                   <a:solidFill>
                     <a:srgbClr val="000000"/>
                   </a:solidFill>
@@ -17351,7 +17362,7 @@
             </a:ln>
             <a:extLst>
               <a:ext uri="{91240B29-F687-4f45-9708-019B960494DF}">
-                <a14:hiddenLine xmlns="" xmlns:a14="http://schemas.microsoft.com/office/drawing/2010/main" w="9525">
+                <a14:hiddenLine xmlns:a14="http://schemas.microsoft.com/office/drawing/2010/main" xmlns="" w="9525">
                   <a:solidFill>
                     <a:srgbClr val="000000"/>
                   </a:solidFill>
@@ -17491,7 +17502,7 @@
           <a:p>
             <a:fld id="{47147380-C9A6-4292-80AD-55D5D6A2AAE3}" type="datetime1">
               <a:rPr lang="en-US" smtClean="0"/>
-              <a:t>3/10/2020</a:t>
+              <a:t>3/11/2020</a:t>
             </a:fld>
             <a:endParaRPr lang="en-US" dirty="0"/>
           </a:p>
@@ -17690,7 +17701,7 @@
           <a:p>
             <a:fld id="{4E46DBC0-D5DE-45A0-9330-4563F7536B4E}" type="datetime1">
               <a:rPr lang="en-US" smtClean="0"/>
-              <a:t>3/10/2020</a:t>
+              <a:t>3/11/2020</a:t>
             </a:fld>
             <a:endParaRPr lang="en-US" dirty="0"/>
           </a:p>
@@ -17954,7 +17965,7 @@
           <a:p>
             <a:fld id="{E9AB3734-E0AF-4094-B819-76ED29494144}" type="datetime1">
               <a:rPr lang="en-US" smtClean="0"/>
-              <a:t>3/10/2020</a:t>
+              <a:t>3/11/2020</a:t>
             </a:fld>
             <a:endParaRPr lang="en-US" dirty="0"/>
           </a:p>
@@ -18190,7 +18201,7 @@
           <a:p>
             <a:fld id="{46249C16-8A15-4B1C-86DD-7EF5F36FF546}" type="datetime1">
               <a:rPr lang="en-US" smtClean="0"/>
-              <a:t>3/10/2020</a:t>
+              <a:t>3/11/2020</a:t>
             </a:fld>
             <a:endParaRPr lang="en-US" dirty="0"/>
           </a:p>
@@ -18575,7 +18586,7 @@
           <a:p>
             <a:fld id="{1AB8A156-96D8-493F-98C7-4297A490F926}" type="datetime1">
               <a:rPr lang="en-US" smtClean="0"/>
-              <a:t>3/10/2020</a:t>
+              <a:t>3/11/2020</a:t>
             </a:fld>
             <a:endParaRPr lang="en-US" dirty="0"/>
           </a:p>
@@ -18811,7 +18822,7 @@
           <a:p>
             <a:fld id="{46249C16-8A15-4B1C-86DD-7EF5F36FF546}" type="datetime1">
               <a:rPr lang="en-US" smtClean="0"/>
-              <a:t>3/10/2020</a:t>
+              <a:t>3/11/2020</a:t>
             </a:fld>
             <a:endParaRPr lang="en-US" dirty="0"/>
           </a:p>
@@ -18933,7 +18944,7 @@
           <a:p>
             <a:fld id="{6EFEADFD-5DAD-460C-9ABC-D0BAD649D43B}" type="datetime1">
               <a:rPr lang="en-US" smtClean="0"/>
-              <a:t>3/10/2020</a:t>
+              <a:t>3/11/2020</a:t>
             </a:fld>
             <a:endParaRPr lang="en-US" dirty="0"/>
           </a:p>
@@ -19032,7 +19043,7 @@
           <a:p>
             <a:fld id="{AD9DEACD-BF6D-423A-A9B6-F7FDB2F8FA86}" type="datetime1">
               <a:rPr lang="en-US" smtClean="0"/>
-              <a:t>3/10/2020</a:t>
+              <a:t>3/11/2020</a:t>
             </a:fld>
             <a:endParaRPr lang="en-US" dirty="0"/>
           </a:p>
@@ -19285,7 +19296,7 @@
           <a:p>
             <a:fld id="{24886110-DB48-415B-AE51-1D16DEC2A997}" type="datetime1">
               <a:rPr lang="en-US" smtClean="0"/>
-              <a:t>3/10/2020</a:t>
+              <a:t>3/11/2020</a:t>
             </a:fld>
             <a:endParaRPr lang="en-US" dirty="0"/>
           </a:p>
@@ -19541,7 +19552,7 @@
           <a:p>
             <a:fld id="{16A03D9E-D050-45A3-B8FE-A436082DC5B5}" type="datetime1">
               <a:rPr lang="en-US" smtClean="0"/>
-              <a:t>3/10/2020</a:t>
+              <a:t>3/11/2020</a:t>
             </a:fld>
             <a:endParaRPr lang="en-US" dirty="0"/>
           </a:p>
@@ -19802,7 +19813,7 @@
           <a:p>
             <a:fld id="{7094CD8F-F50E-4E4E-A619-C83536A21564}" type="datetime1">
               <a:rPr lang="en-US" smtClean="0"/>
-              <a:t>3/10/2020</a:t>
+              <a:t>3/11/2020</a:t>
             </a:fld>
             <a:endParaRPr lang="en-US" dirty="0"/>
           </a:p>
@@ -20002,7 +20013,7 @@
           <a:p>
             <a:fld id="{369190F8-86C8-482D-94FF-2357E3904808}" type="datetime1">
               <a:rPr lang="en-US" smtClean="0"/>
-              <a:t>3/10/2020</a:t>
+              <a:t>3/11/2020</a:t>
             </a:fld>
             <a:endParaRPr lang="en-US" dirty="0"/>
           </a:p>
@@ -20269,7 +20280,7 @@
           <a:p>
             <a:fld id="{7DCCB83B-D0C2-4A7D-ACE4-394E031D1D6D}" type="datetime1">
               <a:rPr lang="en-US" smtClean="0"/>
-              <a:t>3/10/2020</a:t>
+              <a:t>3/11/2020</a:t>
             </a:fld>
             <a:endParaRPr lang="en-US" dirty="0"/>
           </a:p>
@@ -20707,7 +20718,7 @@
           <a:p>
             <a:fld id="{A562CC47-EB05-49E7-BB79-D60F887758B3}" type="datetime1">
               <a:rPr lang="en-US" smtClean="0"/>
-              <a:t>3/10/2020</a:t>
+              <a:t>3/11/2020</a:t>
             </a:fld>
             <a:endParaRPr lang="en-US" dirty="0"/>
           </a:p>
@@ -21257,7 +21268,7 @@
           <a:p>
             <a:fld id="{62DB895A-F06A-4C22-B764-5FE32A2A5F48}" type="datetime1">
               <a:rPr lang="en-US" smtClean="0"/>
-              <a:t>3/10/2020</a:t>
+              <a:t>3/11/2020</a:t>
             </a:fld>
             <a:endParaRPr lang="en-US" dirty="0"/>
           </a:p>
@@ -21981,7 +21992,7 @@
           <a:p>
             <a:fld id="{5D42CFDC-1EF5-4A06-BF89-EF8A8F6CD796}" type="datetime1">
               <a:rPr lang="en-US" smtClean="0"/>
-              <a:t>3/10/2020</a:t>
+              <a:t>3/11/2020</a:t>
             </a:fld>
             <a:endParaRPr lang="en-US" dirty="0"/>
           </a:p>
@@ -22368,7 +22379,7 @@
           <a:p>
             <a:fld id="{1AB8A156-96D8-493F-98C7-4297A490F926}" type="datetime1">
               <a:rPr lang="en-US" smtClean="0"/>
-              <a:t>3/10/2020</a:t>
+              <a:t>3/11/2020</a:t>
             </a:fld>
             <a:endParaRPr lang="en-US" dirty="0"/>
           </a:p>
@@ -22542,7 +22553,7 @@
           <a:p>
             <a:fld id="{13815C30-DF68-4F98-AF35-879B076E4017}" type="datetime1">
               <a:rPr lang="en-US" smtClean="0"/>
-              <a:t>3/10/2020</a:t>
+              <a:t>3/11/2020</a:t>
             </a:fld>
             <a:endParaRPr lang="en-US" dirty="0"/>
           </a:p>
@@ -22726,7 +22737,7 @@
           <a:p>
             <a:fld id="{EC5DC2D5-0D2B-43CA-B09F-4232E3D1DD6E}" type="datetime1">
               <a:rPr lang="en-US" smtClean="0"/>
-              <a:t>3/10/2020</a:t>
+              <a:t>3/11/2020</a:t>
             </a:fld>
             <a:endParaRPr lang="en-US" dirty="0"/>
           </a:p>
@@ -22848,7 +22859,7 @@
           <a:p>
             <a:fld id="{6EFEADFD-5DAD-460C-9ABC-D0BAD649D43B}" type="datetime1">
               <a:rPr lang="en-US" smtClean="0"/>
-              <a:t>3/10/2020</a:t>
+              <a:t>3/11/2020</a:t>
             </a:fld>
             <a:endParaRPr lang="en-US" dirty="0"/>
           </a:p>
@@ -22947,7 +22958,7 @@
           <a:p>
             <a:fld id="{AD9DEACD-BF6D-423A-A9B6-F7FDB2F8FA86}" type="datetime1">
               <a:rPr lang="en-US" smtClean="0"/>
-              <a:t>3/10/2020</a:t>
+              <a:t>3/11/2020</a:t>
             </a:fld>
             <a:endParaRPr lang="en-US" dirty="0"/>
           </a:p>
@@ -23200,7 +23211,7 @@
           <a:p>
             <a:fld id="{24886110-DB48-415B-AE51-1D16DEC2A997}" type="datetime1">
               <a:rPr lang="en-US" smtClean="0"/>
-              <a:t>3/10/2020</a:t>
+              <a:t>3/11/2020</a:t>
             </a:fld>
             <a:endParaRPr lang="en-US" dirty="0"/>
           </a:p>
@@ -23461,7 +23472,7 @@
           <a:p>
             <a:fld id="{16A03D9E-D050-45A3-B8FE-A436082DC5B5}" type="datetime1">
               <a:rPr lang="en-US" smtClean="0"/>
-              <a:t>3/10/2020</a:t>
+              <a:t>3/11/2020</a:t>
             </a:fld>
             <a:endParaRPr lang="en-US" dirty="0"/>
           </a:p>
@@ -23708,7 +23719,7 @@
           <a:p>
             <a:fld id="{7F79E6DD-7D26-4810-9CFA-3D3006F5FBB0}" type="datetime1">
               <a:rPr lang="en-US" smtClean="0"/>
-              <a:t>3/10/2020</a:t>
+              <a:t>3/11/2020</a:t>
             </a:fld>
             <a:endParaRPr lang="en-US" dirty="0"/>
           </a:p>
@@ -24170,7 +24181,7 @@
           <a:noFill/>
           <a:extLst>
             <a:ext uri="{909E8E84-426E-40dd-AFC4-6F175D3DCCD1}">
-              <a14:hiddenFill xmlns="" xmlns:a14="http://schemas.microsoft.com/office/drawing/2010/main">
+              <a14:hiddenFill xmlns:a14="http://schemas.microsoft.com/office/drawing/2010/main" xmlns="">
                 <a:solidFill>
                   <a:srgbClr val="FFFFFF"/>
                 </a:solidFill>
@@ -24244,7 +24255,7 @@
               </a:ln>
               <a:extLst>
                 <a:ext uri="{91240B29-F687-4f45-9708-019B960494DF}">
-                  <a14:hiddenLine xmlns="" xmlns:a14="http://schemas.microsoft.com/office/drawing/2010/main" w="9525">
+                  <a14:hiddenLine xmlns:a14="http://schemas.microsoft.com/office/drawing/2010/main" xmlns="" w="9525">
                     <a:solidFill>
                       <a:srgbClr val="000000"/>
                     </a:solidFill>
@@ -24334,7 +24345,7 @@
               </a:ln>
               <a:extLst>
                 <a:ext uri="{91240B29-F687-4f45-9708-019B960494DF}">
-                  <a14:hiddenLine xmlns="" xmlns:a14="http://schemas.microsoft.com/office/drawing/2010/main" w="9525">
+                  <a14:hiddenLine xmlns:a14="http://schemas.microsoft.com/office/drawing/2010/main" xmlns="" w="9525">
                     <a:solidFill>
                       <a:srgbClr val="000000"/>
                     </a:solidFill>
@@ -24424,7 +24435,7 @@
               </a:ln>
               <a:extLst>
                 <a:ext uri="{91240B29-F687-4f45-9708-019B960494DF}">
-                  <a14:hiddenLine xmlns="" xmlns:a14="http://schemas.microsoft.com/office/drawing/2010/main" w="9525">
+                  <a14:hiddenLine xmlns:a14="http://schemas.microsoft.com/office/drawing/2010/main" xmlns="" w="9525">
                     <a:solidFill>
                       <a:srgbClr val="000000"/>
                     </a:solidFill>
@@ -24486,7 +24497,7 @@
               </a:ln>
               <a:extLst>
                 <a:ext uri="{91240B29-F687-4f45-9708-019B960494DF}">
-                  <a14:hiddenLine xmlns="" xmlns:a14="http://schemas.microsoft.com/office/drawing/2010/main" w="9525">
+                  <a14:hiddenLine xmlns:a14="http://schemas.microsoft.com/office/drawing/2010/main" xmlns="" w="9525">
                     <a:solidFill>
                       <a:srgbClr val="000000"/>
                     </a:solidFill>
@@ -24576,7 +24587,7 @@
               </a:ln>
               <a:extLst>
                 <a:ext uri="{91240B29-F687-4f45-9708-019B960494DF}">
-                  <a14:hiddenLine xmlns="" xmlns:a14="http://schemas.microsoft.com/office/drawing/2010/main" w="9525">
+                  <a14:hiddenLine xmlns:a14="http://schemas.microsoft.com/office/drawing/2010/main" xmlns="" w="9525">
                     <a:solidFill>
                       <a:srgbClr val="000000"/>
                     </a:solidFill>
@@ -24638,7 +24649,7 @@
               </a:ln>
               <a:extLst>
                 <a:ext uri="{91240B29-F687-4f45-9708-019B960494DF}">
-                  <a14:hiddenLine xmlns="" xmlns:a14="http://schemas.microsoft.com/office/drawing/2010/main" w="9525">
+                  <a14:hiddenLine xmlns:a14="http://schemas.microsoft.com/office/drawing/2010/main" xmlns="" w="9525">
                     <a:solidFill>
                       <a:srgbClr val="000000"/>
                     </a:solidFill>
@@ -24700,7 +24711,7 @@
               </a:ln>
               <a:extLst>
                 <a:ext uri="{91240B29-F687-4f45-9708-019B960494DF}">
-                  <a14:hiddenLine xmlns="" xmlns:a14="http://schemas.microsoft.com/office/drawing/2010/main" w="9525">
+                  <a14:hiddenLine xmlns:a14="http://schemas.microsoft.com/office/drawing/2010/main" xmlns="" w="9525">
                     <a:solidFill>
                       <a:srgbClr val="000000"/>
                     </a:solidFill>
@@ -24790,7 +24801,7 @@
               </a:ln>
               <a:extLst>
                 <a:ext uri="{91240B29-F687-4f45-9708-019B960494DF}">
-                  <a14:hiddenLine xmlns="" xmlns:a14="http://schemas.microsoft.com/office/drawing/2010/main" w="9525">
+                  <a14:hiddenLine xmlns:a14="http://schemas.microsoft.com/office/drawing/2010/main" xmlns="" w="9525">
                     <a:solidFill>
                       <a:srgbClr val="000000"/>
                     </a:solidFill>
@@ -24880,7 +24891,7 @@
               </a:ln>
               <a:extLst>
                 <a:ext uri="{91240B29-F687-4f45-9708-019B960494DF}">
-                  <a14:hiddenLine xmlns="" xmlns:a14="http://schemas.microsoft.com/office/drawing/2010/main" w="9525">
+                  <a14:hiddenLine xmlns:a14="http://schemas.microsoft.com/office/drawing/2010/main" xmlns="" w="9525">
                     <a:solidFill>
                       <a:srgbClr val="000000"/>
                     </a:solidFill>
@@ -24942,7 +24953,7 @@
               </a:ln>
               <a:extLst>
                 <a:ext uri="{91240B29-F687-4f45-9708-019B960494DF}">
-                  <a14:hiddenLine xmlns="" xmlns:a14="http://schemas.microsoft.com/office/drawing/2010/main" w="9525">
+                  <a14:hiddenLine xmlns:a14="http://schemas.microsoft.com/office/drawing/2010/main" xmlns="" w="9525">
                     <a:solidFill>
                       <a:srgbClr val="000000"/>
                     </a:solidFill>
@@ -25052,7 +25063,7 @@
               </a:ln>
               <a:extLst>
                 <a:ext uri="{91240B29-F687-4f45-9708-019B960494DF}">
-                  <a14:hiddenLine xmlns="" xmlns:a14="http://schemas.microsoft.com/office/drawing/2010/main" w="9525">
+                  <a14:hiddenLine xmlns:a14="http://schemas.microsoft.com/office/drawing/2010/main" xmlns="" w="9525">
                     <a:solidFill>
                       <a:srgbClr val="000000"/>
                     </a:solidFill>
@@ -25136,7 +25147,7 @@
               </a:ln>
               <a:extLst>
                 <a:ext uri="{91240B29-F687-4f45-9708-019B960494DF}">
-                  <a14:hiddenLine xmlns="" xmlns:a14="http://schemas.microsoft.com/office/drawing/2010/main" w="9525">
+                  <a14:hiddenLine xmlns:a14="http://schemas.microsoft.com/office/drawing/2010/main" xmlns="" w="9525">
                     <a:solidFill>
                       <a:srgbClr val="000000"/>
                     </a:solidFill>
@@ -25198,7 +25209,7 @@
               </a:ln>
               <a:extLst>
                 <a:ext uri="{91240B29-F687-4f45-9708-019B960494DF}">
-                  <a14:hiddenLine xmlns="" xmlns:a14="http://schemas.microsoft.com/office/drawing/2010/main" w="9525">
+                  <a14:hiddenLine xmlns:a14="http://schemas.microsoft.com/office/drawing/2010/main" xmlns="" w="9525">
                     <a:solidFill>
                       <a:srgbClr val="000000"/>
                     </a:solidFill>
@@ -25260,7 +25271,7 @@
               </a:ln>
               <a:extLst>
                 <a:ext uri="{91240B29-F687-4f45-9708-019B960494DF}">
-                  <a14:hiddenLine xmlns="" xmlns:a14="http://schemas.microsoft.com/office/drawing/2010/main" w="9525">
+                  <a14:hiddenLine xmlns:a14="http://schemas.microsoft.com/office/drawing/2010/main" xmlns="" w="9525">
                     <a:solidFill>
                       <a:srgbClr val="000000"/>
                     </a:solidFill>
@@ -25350,7 +25361,7 @@
               </a:ln>
               <a:extLst>
                 <a:ext uri="{91240B29-F687-4f45-9708-019B960494DF}">
-                  <a14:hiddenLine xmlns="" xmlns:a14="http://schemas.microsoft.com/office/drawing/2010/main" w="9525">
+                  <a14:hiddenLine xmlns:a14="http://schemas.microsoft.com/office/drawing/2010/main" xmlns="" w="9525">
                     <a:solidFill>
                       <a:srgbClr val="000000"/>
                     </a:solidFill>
@@ -25384,7 +25395,7 @@
               </a:ln>
               <a:extLst>
                 <a:ext uri="{91240B29-F687-4f45-9708-019B960494DF}">
-                  <a14:hiddenLine xmlns="" xmlns:a14="http://schemas.microsoft.com/office/drawing/2010/main" w="9525">
+                  <a14:hiddenLine xmlns:a14="http://schemas.microsoft.com/office/drawing/2010/main" xmlns="" w="9525">
                     <a:solidFill>
                       <a:srgbClr val="000000"/>
                     </a:solidFill>
@@ -25449,7 +25460,7 @@
               </a:ln>
               <a:extLst>
                 <a:ext uri="{91240B29-F687-4f45-9708-019B960494DF}">
-                  <a14:hiddenLine xmlns="" xmlns:a14="http://schemas.microsoft.com/office/drawing/2010/main" w="9525">
+                  <a14:hiddenLine xmlns:a14="http://schemas.microsoft.com/office/drawing/2010/main" xmlns="" w="9525">
                     <a:solidFill>
                       <a:srgbClr val="000000"/>
                     </a:solidFill>
@@ -25539,7 +25550,7 @@
               </a:ln>
               <a:extLst>
                 <a:ext uri="{91240B29-F687-4f45-9708-019B960494DF}">
-                  <a14:hiddenLine xmlns="" xmlns:a14="http://schemas.microsoft.com/office/drawing/2010/main" w="9525">
+                  <a14:hiddenLine xmlns:a14="http://schemas.microsoft.com/office/drawing/2010/main" xmlns="" w="9525">
                     <a:solidFill>
                       <a:srgbClr val="000000"/>
                     </a:solidFill>
@@ -25601,7 +25612,7 @@
               </a:ln>
               <a:extLst>
                 <a:ext uri="{91240B29-F687-4f45-9708-019B960494DF}">
-                  <a14:hiddenLine xmlns="" xmlns:a14="http://schemas.microsoft.com/office/drawing/2010/main" w="9525">
+                  <a14:hiddenLine xmlns:a14="http://schemas.microsoft.com/office/drawing/2010/main" xmlns="" w="9525">
                     <a:solidFill>
                       <a:srgbClr val="000000"/>
                     </a:solidFill>
@@ -25691,7 +25702,7 @@
               </a:ln>
               <a:extLst>
                 <a:ext uri="{91240B29-F687-4f45-9708-019B960494DF}">
-                  <a14:hiddenLine xmlns="" xmlns:a14="http://schemas.microsoft.com/office/drawing/2010/main" w="9525">
+                  <a14:hiddenLine xmlns:a14="http://schemas.microsoft.com/office/drawing/2010/main" xmlns="" w="9525">
                     <a:solidFill>
                       <a:srgbClr val="000000"/>
                     </a:solidFill>
@@ -25756,7 +25767,7 @@
               </a:ln>
               <a:extLst>
                 <a:ext uri="{91240B29-F687-4f45-9708-019B960494DF}">
-                  <a14:hiddenLine xmlns="" xmlns:a14="http://schemas.microsoft.com/office/drawing/2010/main" w="9525">
+                  <a14:hiddenLine xmlns:a14="http://schemas.microsoft.com/office/drawing/2010/main" xmlns="" w="9525">
                     <a:solidFill>
                       <a:srgbClr val="000000"/>
                     </a:solidFill>
@@ -25818,7 +25829,7 @@
               </a:ln>
               <a:extLst>
                 <a:ext uri="{91240B29-F687-4f45-9708-019B960494DF}">
-                  <a14:hiddenLine xmlns="" xmlns:a14="http://schemas.microsoft.com/office/drawing/2010/main" w="9525">
+                  <a14:hiddenLine xmlns:a14="http://schemas.microsoft.com/office/drawing/2010/main" xmlns="" w="9525">
                     <a:solidFill>
                       <a:srgbClr val="000000"/>
                     </a:solidFill>
@@ -25908,7 +25919,7 @@
               </a:ln>
               <a:extLst>
                 <a:ext uri="{91240B29-F687-4f45-9708-019B960494DF}">
-                  <a14:hiddenLine xmlns="" xmlns:a14="http://schemas.microsoft.com/office/drawing/2010/main" w="9525">
+                  <a14:hiddenLine xmlns:a14="http://schemas.microsoft.com/office/drawing/2010/main" xmlns="" w="9525">
                     <a:solidFill>
                       <a:srgbClr val="000000"/>
                     </a:solidFill>
@@ -25998,7 +26009,7 @@
               </a:ln>
               <a:extLst>
                 <a:ext uri="{91240B29-F687-4f45-9708-019B960494DF}">
-                  <a14:hiddenLine xmlns="" xmlns:a14="http://schemas.microsoft.com/office/drawing/2010/main" w="9525">
+                  <a14:hiddenLine xmlns:a14="http://schemas.microsoft.com/office/drawing/2010/main" xmlns="" w="9525">
                     <a:solidFill>
                       <a:srgbClr val="000000"/>
                     </a:solidFill>
@@ -26063,7 +26074,7 @@
               </a:ln>
               <a:extLst>
                 <a:ext uri="{91240B29-F687-4f45-9708-019B960494DF}">
-                  <a14:hiddenLine xmlns="" xmlns:a14="http://schemas.microsoft.com/office/drawing/2010/main" w="9525">
+                  <a14:hiddenLine xmlns:a14="http://schemas.microsoft.com/office/drawing/2010/main" xmlns="" w="9525">
                     <a:solidFill>
                       <a:srgbClr val="000000"/>
                     </a:solidFill>
@@ -26183,7 +26194,7 @@
               </a:ln>
               <a:extLst>
                 <a:ext uri="{91240B29-F687-4f45-9708-019B960494DF}">
-                  <a14:hiddenLine xmlns="" xmlns:a14="http://schemas.microsoft.com/office/drawing/2010/main" w="9525">
+                  <a14:hiddenLine xmlns:a14="http://schemas.microsoft.com/office/drawing/2010/main" xmlns="" w="9525">
                     <a:solidFill>
                       <a:srgbClr val="000000"/>
                     </a:solidFill>
@@ -26264,7 +26275,7 @@
               </a:ln>
               <a:extLst>
                 <a:ext uri="{91240B29-F687-4f45-9708-019B960494DF}">
-                  <a14:hiddenLine xmlns="" xmlns:a14="http://schemas.microsoft.com/office/drawing/2010/main" w="9525">
+                  <a14:hiddenLine xmlns:a14="http://schemas.microsoft.com/office/drawing/2010/main" xmlns="" w="9525">
                     <a:solidFill>
                       <a:srgbClr val="000000"/>
                     </a:solidFill>
@@ -26379,7 +26390,7 @@
               </a:ln>
               <a:extLst>
                 <a:ext uri="{91240B29-F687-4f45-9708-019B960494DF}">
-                  <a14:hiddenLine xmlns="" xmlns:a14="http://schemas.microsoft.com/office/drawing/2010/main" w="9525">
+                  <a14:hiddenLine xmlns:a14="http://schemas.microsoft.com/office/drawing/2010/main" xmlns="" w="9525">
                     <a:solidFill>
                       <a:srgbClr val="000000"/>
                     </a:solidFill>
@@ -26469,7 +26480,7 @@
               </a:ln>
               <a:extLst>
                 <a:ext uri="{91240B29-F687-4f45-9708-019B960494DF}">
-                  <a14:hiddenLine xmlns="" xmlns:a14="http://schemas.microsoft.com/office/drawing/2010/main" w="9525">
+                  <a14:hiddenLine xmlns:a14="http://schemas.microsoft.com/office/drawing/2010/main" xmlns="" w="9525">
                     <a:solidFill>
                       <a:srgbClr val="000000"/>
                     </a:solidFill>
@@ -26534,7 +26545,7 @@
               </a:ln>
               <a:extLst>
                 <a:ext uri="{91240B29-F687-4f45-9708-019B960494DF}">
-                  <a14:hiddenLine xmlns="" xmlns:a14="http://schemas.microsoft.com/office/drawing/2010/main" w="9525">
+                  <a14:hiddenLine xmlns:a14="http://schemas.microsoft.com/office/drawing/2010/main" xmlns="" w="9525">
                     <a:solidFill>
                       <a:srgbClr val="000000"/>
                     </a:solidFill>
@@ -26624,7 +26635,7 @@
               </a:ln>
               <a:extLst>
                 <a:ext uri="{91240B29-F687-4f45-9708-019B960494DF}">
-                  <a14:hiddenLine xmlns="" xmlns:a14="http://schemas.microsoft.com/office/drawing/2010/main" w="9525">
+                  <a14:hiddenLine xmlns:a14="http://schemas.microsoft.com/office/drawing/2010/main" xmlns="" w="9525">
                     <a:solidFill>
                       <a:srgbClr val="000000"/>
                     </a:solidFill>
@@ -26692,7 +26703,7 @@
               </a:ln>
               <a:extLst>
                 <a:ext uri="{91240B29-F687-4f45-9708-019B960494DF}">
-                  <a14:hiddenLine xmlns="" xmlns:a14="http://schemas.microsoft.com/office/drawing/2010/main" w="9525">
+                  <a14:hiddenLine xmlns:a14="http://schemas.microsoft.com/office/drawing/2010/main" xmlns="" w="9525">
                     <a:solidFill>
                       <a:srgbClr val="000000"/>
                     </a:solidFill>
@@ -26782,7 +26793,7 @@
               </a:ln>
               <a:extLst>
                 <a:ext uri="{91240B29-F687-4f45-9708-019B960494DF}">
-                  <a14:hiddenLine xmlns="" xmlns:a14="http://schemas.microsoft.com/office/drawing/2010/main" w="9525">
+                  <a14:hiddenLine xmlns:a14="http://schemas.microsoft.com/office/drawing/2010/main" xmlns="" w="9525">
                     <a:solidFill>
                       <a:srgbClr val="000000"/>
                     </a:solidFill>
@@ -26850,7 +26861,7 @@
               </a:ln>
               <a:extLst>
                 <a:ext uri="{91240B29-F687-4f45-9708-019B960494DF}">
-                  <a14:hiddenLine xmlns="" xmlns:a14="http://schemas.microsoft.com/office/drawing/2010/main" w="9525">
+                  <a14:hiddenLine xmlns:a14="http://schemas.microsoft.com/office/drawing/2010/main" xmlns="" w="9525">
                     <a:solidFill>
                       <a:srgbClr val="000000"/>
                     </a:solidFill>
@@ -26940,7 +26951,7 @@
               </a:ln>
               <a:extLst>
                 <a:ext uri="{91240B29-F687-4f45-9708-019B960494DF}">
-                  <a14:hiddenLine xmlns="" xmlns:a14="http://schemas.microsoft.com/office/drawing/2010/main" w="9525">
+                  <a14:hiddenLine xmlns:a14="http://schemas.microsoft.com/office/drawing/2010/main" xmlns="" w="9525">
                     <a:solidFill>
                       <a:srgbClr val="000000"/>
                     </a:solidFill>
@@ -26974,7 +26985,7 @@
               </a:ln>
               <a:extLst>
                 <a:ext uri="{91240B29-F687-4f45-9708-019B960494DF}">
-                  <a14:hiddenLine xmlns="" xmlns:a14="http://schemas.microsoft.com/office/drawing/2010/main" w="9525">
+                  <a14:hiddenLine xmlns:a14="http://schemas.microsoft.com/office/drawing/2010/main" xmlns="" w="9525">
                     <a:solidFill>
                       <a:srgbClr val="000000"/>
                     </a:solidFill>
@@ -27114,7 +27125,7 @@
           <a:p>
             <a:fld id="{7F79E6DD-7D26-4810-9CFA-3D3006F5FBB0}" type="datetime1">
               <a:rPr lang="en-US" smtClean="0"/>
-              <a:t>3/10/2020</a:t>
+              <a:t>3/11/2020</a:t>
             </a:fld>
             <a:endParaRPr lang="en-US" dirty="0"/>
           </a:p>
@@ -27585,7 +27596,7 @@
           <a:noFill/>
           <a:extLst>
             <a:ext uri="{909E8E84-426E-40dd-AFC4-6F175D3DCCD1}">
-              <a14:hiddenFill xmlns="" xmlns:a14="http://schemas.microsoft.com/office/drawing/2010/main">
+              <a14:hiddenFill xmlns:a14="http://schemas.microsoft.com/office/drawing/2010/main" xmlns="">
                 <a:solidFill>
                   <a:srgbClr val="FFFFFF"/>
                 </a:solidFill>
@@ -27659,7 +27670,7 @@
               </a:ln>
               <a:extLst>
                 <a:ext uri="{91240B29-F687-4f45-9708-019B960494DF}">
-                  <a14:hiddenLine xmlns="" xmlns:a14="http://schemas.microsoft.com/office/drawing/2010/main" w="9525">
+                  <a14:hiddenLine xmlns:a14="http://schemas.microsoft.com/office/drawing/2010/main" xmlns="" w="9525">
                     <a:solidFill>
                       <a:srgbClr val="000000"/>
                     </a:solidFill>
@@ -27749,7 +27760,7 @@
               </a:ln>
               <a:extLst>
                 <a:ext uri="{91240B29-F687-4f45-9708-019B960494DF}">
-                  <a14:hiddenLine xmlns="" xmlns:a14="http://schemas.microsoft.com/office/drawing/2010/main" w="9525">
+                  <a14:hiddenLine xmlns:a14="http://schemas.microsoft.com/office/drawing/2010/main" xmlns="" w="9525">
                     <a:solidFill>
                       <a:srgbClr val="000000"/>
                     </a:solidFill>
@@ -27839,7 +27850,7 @@
               </a:ln>
               <a:extLst>
                 <a:ext uri="{91240B29-F687-4f45-9708-019B960494DF}">
-                  <a14:hiddenLine xmlns="" xmlns:a14="http://schemas.microsoft.com/office/drawing/2010/main" w="9525">
+                  <a14:hiddenLine xmlns:a14="http://schemas.microsoft.com/office/drawing/2010/main" xmlns="" w="9525">
                     <a:solidFill>
                       <a:srgbClr val="000000"/>
                     </a:solidFill>
@@ -27901,7 +27912,7 @@
               </a:ln>
               <a:extLst>
                 <a:ext uri="{91240B29-F687-4f45-9708-019B960494DF}">
-                  <a14:hiddenLine xmlns="" xmlns:a14="http://schemas.microsoft.com/office/drawing/2010/main" w="9525">
+                  <a14:hiddenLine xmlns:a14="http://schemas.microsoft.com/office/drawing/2010/main" xmlns="" w="9525">
                     <a:solidFill>
                       <a:srgbClr val="000000"/>
                     </a:solidFill>
@@ -27991,7 +28002,7 @@
               </a:ln>
               <a:extLst>
                 <a:ext uri="{91240B29-F687-4f45-9708-019B960494DF}">
-                  <a14:hiddenLine xmlns="" xmlns:a14="http://schemas.microsoft.com/office/drawing/2010/main" w="9525">
+                  <a14:hiddenLine xmlns:a14="http://schemas.microsoft.com/office/drawing/2010/main" xmlns="" w="9525">
                     <a:solidFill>
                       <a:srgbClr val="000000"/>
                     </a:solidFill>
@@ -28053,7 +28064,7 @@
               </a:ln>
               <a:extLst>
                 <a:ext uri="{91240B29-F687-4f45-9708-019B960494DF}">
-                  <a14:hiddenLine xmlns="" xmlns:a14="http://schemas.microsoft.com/office/drawing/2010/main" w="9525">
+                  <a14:hiddenLine xmlns:a14="http://schemas.microsoft.com/office/drawing/2010/main" xmlns="" w="9525">
                     <a:solidFill>
                       <a:srgbClr val="000000"/>
                     </a:solidFill>
@@ -28115,7 +28126,7 @@
               </a:ln>
               <a:extLst>
                 <a:ext uri="{91240B29-F687-4f45-9708-019B960494DF}">
-                  <a14:hiddenLine xmlns="" xmlns:a14="http://schemas.microsoft.com/office/drawing/2010/main" w="9525">
+                  <a14:hiddenLine xmlns:a14="http://schemas.microsoft.com/office/drawing/2010/main" xmlns="" w="9525">
                     <a:solidFill>
                       <a:srgbClr val="000000"/>
                     </a:solidFill>
@@ -28205,7 +28216,7 @@
               </a:ln>
               <a:extLst>
                 <a:ext uri="{91240B29-F687-4f45-9708-019B960494DF}">
-                  <a14:hiddenLine xmlns="" xmlns:a14="http://schemas.microsoft.com/office/drawing/2010/main" w="9525">
+                  <a14:hiddenLine xmlns:a14="http://schemas.microsoft.com/office/drawing/2010/main" xmlns="" w="9525">
                     <a:solidFill>
                       <a:srgbClr val="000000"/>
                     </a:solidFill>
@@ -28295,7 +28306,7 @@
               </a:ln>
               <a:extLst>
                 <a:ext uri="{91240B29-F687-4f45-9708-019B960494DF}">
-                  <a14:hiddenLine xmlns="" xmlns:a14="http://schemas.microsoft.com/office/drawing/2010/main" w="9525">
+                  <a14:hiddenLine xmlns:a14="http://schemas.microsoft.com/office/drawing/2010/main" xmlns="" w="9525">
                     <a:solidFill>
                       <a:srgbClr val="000000"/>
                     </a:solidFill>
@@ -28357,7 +28368,7 @@
               </a:ln>
               <a:extLst>
                 <a:ext uri="{91240B29-F687-4f45-9708-019B960494DF}">
-                  <a14:hiddenLine xmlns="" xmlns:a14="http://schemas.microsoft.com/office/drawing/2010/main" w="9525">
+                  <a14:hiddenLine xmlns:a14="http://schemas.microsoft.com/office/drawing/2010/main" xmlns="" w="9525">
                     <a:solidFill>
                       <a:srgbClr val="000000"/>
                     </a:solidFill>
@@ -28467,7 +28478,7 @@
               </a:ln>
               <a:extLst>
                 <a:ext uri="{91240B29-F687-4f45-9708-019B960494DF}">
-                  <a14:hiddenLine xmlns="" xmlns:a14="http://schemas.microsoft.com/office/drawing/2010/main" w="9525">
+                  <a14:hiddenLine xmlns:a14="http://schemas.microsoft.com/office/drawing/2010/main" xmlns="" w="9525">
                     <a:solidFill>
                       <a:srgbClr val="000000"/>
                     </a:solidFill>
@@ -28551,7 +28562,7 @@
               </a:ln>
               <a:extLst>
                 <a:ext uri="{91240B29-F687-4f45-9708-019B960494DF}">
-                  <a14:hiddenLine xmlns="" xmlns:a14="http://schemas.microsoft.com/office/drawing/2010/main" w="9525">
+                  <a14:hiddenLine xmlns:a14="http://schemas.microsoft.com/office/drawing/2010/main" xmlns="" w="9525">
                     <a:solidFill>
                       <a:srgbClr val="000000"/>
                     </a:solidFill>
@@ -28613,7 +28624,7 @@
               </a:ln>
               <a:extLst>
                 <a:ext uri="{91240B29-F687-4f45-9708-019B960494DF}">
-                  <a14:hiddenLine xmlns="" xmlns:a14="http://schemas.microsoft.com/office/drawing/2010/main" w="9525">
+                  <a14:hiddenLine xmlns:a14="http://schemas.microsoft.com/office/drawing/2010/main" xmlns="" w="9525">
                     <a:solidFill>
                       <a:srgbClr val="000000"/>
                     </a:solidFill>
@@ -28675,7 +28686,7 @@
               </a:ln>
               <a:extLst>
                 <a:ext uri="{91240B29-F687-4f45-9708-019B960494DF}">
-                  <a14:hiddenLine xmlns="" xmlns:a14="http://schemas.microsoft.com/office/drawing/2010/main" w="9525">
+                  <a14:hiddenLine xmlns:a14="http://schemas.microsoft.com/office/drawing/2010/main" xmlns="" w="9525">
                     <a:solidFill>
                       <a:srgbClr val="000000"/>
                     </a:solidFill>
@@ -28765,7 +28776,7 @@
               </a:ln>
               <a:extLst>
                 <a:ext uri="{91240B29-F687-4f45-9708-019B960494DF}">
-                  <a14:hiddenLine xmlns="" xmlns:a14="http://schemas.microsoft.com/office/drawing/2010/main" w="9525">
+                  <a14:hiddenLine xmlns:a14="http://schemas.microsoft.com/office/drawing/2010/main" xmlns="" w="9525">
                     <a:solidFill>
                       <a:srgbClr val="000000"/>
                     </a:solidFill>
@@ -28799,7 +28810,7 @@
               </a:ln>
               <a:extLst>
                 <a:ext uri="{91240B29-F687-4f45-9708-019B960494DF}">
-                  <a14:hiddenLine xmlns="" xmlns:a14="http://schemas.microsoft.com/office/drawing/2010/main" w="9525">
+                  <a14:hiddenLine xmlns:a14="http://schemas.microsoft.com/office/drawing/2010/main" xmlns="" w="9525">
                     <a:solidFill>
                       <a:srgbClr val="000000"/>
                     </a:solidFill>
@@ -28864,7 +28875,7 @@
               </a:ln>
               <a:extLst>
                 <a:ext uri="{91240B29-F687-4f45-9708-019B960494DF}">
-                  <a14:hiddenLine xmlns="" xmlns:a14="http://schemas.microsoft.com/office/drawing/2010/main" w="9525">
+                  <a14:hiddenLine xmlns:a14="http://schemas.microsoft.com/office/drawing/2010/main" xmlns="" w="9525">
                     <a:solidFill>
                       <a:srgbClr val="000000"/>
                     </a:solidFill>
@@ -28954,7 +28965,7 @@
               </a:ln>
               <a:extLst>
                 <a:ext uri="{91240B29-F687-4f45-9708-019B960494DF}">
-                  <a14:hiddenLine xmlns="" xmlns:a14="http://schemas.microsoft.com/office/drawing/2010/main" w="9525">
+                  <a14:hiddenLine xmlns:a14="http://schemas.microsoft.com/office/drawing/2010/main" xmlns="" w="9525">
                     <a:solidFill>
                       <a:srgbClr val="000000"/>
                     </a:solidFill>
@@ -29016,7 +29027,7 @@
               </a:ln>
               <a:extLst>
                 <a:ext uri="{91240B29-F687-4f45-9708-019B960494DF}">
-                  <a14:hiddenLine xmlns="" xmlns:a14="http://schemas.microsoft.com/office/drawing/2010/main" w="9525">
+                  <a14:hiddenLine xmlns:a14="http://schemas.microsoft.com/office/drawing/2010/main" xmlns="" w="9525">
                     <a:solidFill>
                       <a:srgbClr val="000000"/>
                     </a:solidFill>
@@ -29106,7 +29117,7 @@
               </a:ln>
               <a:extLst>
                 <a:ext uri="{91240B29-F687-4f45-9708-019B960494DF}">
-                  <a14:hiddenLine xmlns="" xmlns:a14="http://schemas.microsoft.com/office/drawing/2010/main" w="9525">
+                  <a14:hiddenLine xmlns:a14="http://schemas.microsoft.com/office/drawing/2010/main" xmlns="" w="9525">
                     <a:solidFill>
                       <a:srgbClr val="000000"/>
                     </a:solidFill>
@@ -29171,7 +29182,7 @@
               </a:ln>
               <a:extLst>
                 <a:ext uri="{91240B29-F687-4f45-9708-019B960494DF}">
-                  <a14:hiddenLine xmlns="" xmlns:a14="http://schemas.microsoft.com/office/drawing/2010/main" w="9525">
+                  <a14:hiddenLine xmlns:a14="http://schemas.microsoft.com/office/drawing/2010/main" xmlns="" w="9525">
                     <a:solidFill>
                       <a:srgbClr val="000000"/>
                     </a:solidFill>
@@ -29233,7 +29244,7 @@
               </a:ln>
               <a:extLst>
                 <a:ext uri="{91240B29-F687-4f45-9708-019B960494DF}">
-                  <a14:hiddenLine xmlns="" xmlns:a14="http://schemas.microsoft.com/office/drawing/2010/main" w="9525">
+                  <a14:hiddenLine xmlns:a14="http://schemas.microsoft.com/office/drawing/2010/main" xmlns="" w="9525">
                     <a:solidFill>
                       <a:srgbClr val="000000"/>
                     </a:solidFill>
@@ -29323,7 +29334,7 @@
               </a:ln>
               <a:extLst>
                 <a:ext uri="{91240B29-F687-4f45-9708-019B960494DF}">
-                  <a14:hiddenLine xmlns="" xmlns:a14="http://schemas.microsoft.com/office/drawing/2010/main" w="9525">
+                  <a14:hiddenLine xmlns:a14="http://schemas.microsoft.com/office/drawing/2010/main" xmlns="" w="9525">
                     <a:solidFill>
                       <a:srgbClr val="000000"/>
                     </a:solidFill>
@@ -29413,7 +29424,7 @@
               </a:ln>
               <a:extLst>
                 <a:ext uri="{91240B29-F687-4f45-9708-019B960494DF}">
-                  <a14:hiddenLine xmlns="" xmlns:a14="http://schemas.microsoft.com/office/drawing/2010/main" w="9525">
+                  <a14:hiddenLine xmlns:a14="http://schemas.microsoft.com/office/drawing/2010/main" xmlns="" w="9525">
                     <a:solidFill>
                       <a:srgbClr val="000000"/>
                     </a:solidFill>
@@ -29478,7 +29489,7 @@
               </a:ln>
               <a:extLst>
                 <a:ext uri="{91240B29-F687-4f45-9708-019B960494DF}">
-                  <a14:hiddenLine xmlns="" xmlns:a14="http://schemas.microsoft.com/office/drawing/2010/main" w="9525">
+                  <a14:hiddenLine xmlns:a14="http://schemas.microsoft.com/office/drawing/2010/main" xmlns="" w="9525">
                     <a:solidFill>
                       <a:srgbClr val="000000"/>
                     </a:solidFill>
@@ -29598,7 +29609,7 @@
               </a:ln>
               <a:extLst>
                 <a:ext uri="{91240B29-F687-4f45-9708-019B960494DF}">
-                  <a14:hiddenLine xmlns="" xmlns:a14="http://schemas.microsoft.com/office/drawing/2010/main" w="9525">
+                  <a14:hiddenLine xmlns:a14="http://schemas.microsoft.com/office/drawing/2010/main" xmlns="" w="9525">
                     <a:solidFill>
                       <a:srgbClr val="000000"/>
                     </a:solidFill>
@@ -29696,7 +29707,7 @@
               </a:ln>
               <a:extLst>
                 <a:ext uri="{91240B29-F687-4f45-9708-019B960494DF}">
-                  <a14:hiddenLine xmlns="" xmlns:a14="http://schemas.microsoft.com/office/drawing/2010/main" w="9525">
+                  <a14:hiddenLine xmlns:a14="http://schemas.microsoft.com/office/drawing/2010/main" xmlns="" w="9525">
                     <a:solidFill>
                       <a:srgbClr val="000000"/>
                     </a:solidFill>
@@ -29811,7 +29822,7 @@
               </a:ln>
               <a:extLst>
                 <a:ext uri="{91240B29-F687-4f45-9708-019B960494DF}">
-                  <a14:hiddenLine xmlns="" xmlns:a14="http://schemas.microsoft.com/office/drawing/2010/main" w="9525">
+                  <a14:hiddenLine xmlns:a14="http://schemas.microsoft.com/office/drawing/2010/main" xmlns="" w="9525">
                     <a:solidFill>
                       <a:srgbClr val="000000"/>
                     </a:solidFill>
@@ -29901,7 +29912,7 @@
               </a:ln>
               <a:extLst>
                 <a:ext uri="{91240B29-F687-4f45-9708-019B960494DF}">
-                  <a14:hiddenLine xmlns="" xmlns:a14="http://schemas.microsoft.com/office/drawing/2010/main" w="9525">
+                  <a14:hiddenLine xmlns:a14="http://schemas.microsoft.com/office/drawing/2010/main" xmlns="" w="9525">
                     <a:solidFill>
                       <a:srgbClr val="000000"/>
                     </a:solidFill>
@@ -29966,7 +29977,7 @@
               </a:ln>
               <a:extLst>
                 <a:ext uri="{91240B29-F687-4f45-9708-019B960494DF}">
-                  <a14:hiddenLine xmlns="" xmlns:a14="http://schemas.microsoft.com/office/drawing/2010/main" w="9525">
+                  <a14:hiddenLine xmlns:a14="http://schemas.microsoft.com/office/drawing/2010/main" xmlns="" w="9525">
                     <a:solidFill>
                       <a:srgbClr val="000000"/>
                     </a:solidFill>
@@ -30056,7 +30067,7 @@
               </a:ln>
               <a:extLst>
                 <a:ext uri="{91240B29-F687-4f45-9708-019B960494DF}">
-                  <a14:hiddenLine xmlns="" xmlns:a14="http://schemas.microsoft.com/office/drawing/2010/main" w="9525">
+                  <a14:hiddenLine xmlns:a14="http://schemas.microsoft.com/office/drawing/2010/main" xmlns="" w="9525">
                     <a:solidFill>
                       <a:srgbClr val="000000"/>
                     </a:solidFill>
@@ -30124,7 +30135,7 @@
               </a:ln>
               <a:extLst>
                 <a:ext uri="{91240B29-F687-4f45-9708-019B960494DF}">
-                  <a14:hiddenLine xmlns="" xmlns:a14="http://schemas.microsoft.com/office/drawing/2010/main" w="9525">
+                  <a14:hiddenLine xmlns:a14="http://schemas.microsoft.com/office/drawing/2010/main" xmlns="" w="9525">
                     <a:solidFill>
                       <a:srgbClr val="000000"/>
                     </a:solidFill>
@@ -30214,7 +30225,7 @@
               </a:ln>
               <a:extLst>
                 <a:ext uri="{91240B29-F687-4f45-9708-019B960494DF}">
-                  <a14:hiddenLine xmlns="" xmlns:a14="http://schemas.microsoft.com/office/drawing/2010/main" w="9525">
+                  <a14:hiddenLine xmlns:a14="http://schemas.microsoft.com/office/drawing/2010/main" xmlns="" w="9525">
                     <a:solidFill>
                       <a:srgbClr val="000000"/>
                     </a:solidFill>
@@ -30282,7 +30293,7 @@
               </a:ln>
               <a:extLst>
                 <a:ext uri="{91240B29-F687-4f45-9708-019B960494DF}">
-                  <a14:hiddenLine xmlns="" xmlns:a14="http://schemas.microsoft.com/office/drawing/2010/main" w="9525">
+                  <a14:hiddenLine xmlns:a14="http://schemas.microsoft.com/office/drawing/2010/main" xmlns="" w="9525">
                     <a:solidFill>
                       <a:srgbClr val="000000"/>
                     </a:solidFill>
@@ -30372,7 +30383,7 @@
               </a:ln>
               <a:extLst>
                 <a:ext uri="{91240B29-F687-4f45-9708-019B960494DF}">
-                  <a14:hiddenLine xmlns="" xmlns:a14="http://schemas.microsoft.com/office/drawing/2010/main" w="9525">
+                  <a14:hiddenLine xmlns:a14="http://schemas.microsoft.com/office/drawing/2010/main" xmlns="" w="9525">
                     <a:solidFill>
                       <a:srgbClr val="000000"/>
                     </a:solidFill>
@@ -30406,7 +30417,7 @@
               </a:ln>
               <a:extLst>
                 <a:ext uri="{91240B29-F687-4f45-9708-019B960494DF}">
-                  <a14:hiddenLine xmlns="" xmlns:a14="http://schemas.microsoft.com/office/drawing/2010/main" w="9525">
+                  <a14:hiddenLine xmlns:a14="http://schemas.microsoft.com/office/drawing/2010/main" xmlns="" w="9525">
                     <a:solidFill>
                       <a:srgbClr val="000000"/>
                     </a:solidFill>
@@ -30546,7 +30557,7 @@
           <a:p>
             <a:fld id="{7F79E6DD-7D26-4810-9CFA-3D3006F5FBB0}" type="datetime1">
               <a:rPr lang="en-US" smtClean="0"/>
-              <a:t>3/10/2020</a:t>
+              <a:t>3/11/2020</a:t>
             </a:fld>
             <a:endParaRPr lang="en-US" dirty="0"/>
           </a:p>
@@ -33868,56 +33879,6 @@
       </p:grpSpPr>
       <p:sp>
         <p:nvSpPr>
-          <p:cNvPr id="2" name="Title 1">
-            <a:extLst>
-              <a:ext uri="{FF2B5EF4-FFF2-40B4-BE49-F238E27FC236}">
-                <a16:creationId xmlns:a16="http://schemas.microsoft.com/office/drawing/2014/main" id="{066C6028-DBC9-4496-A526-46252AFECA1A}"/>
-              </a:ext>
-            </a:extLst>
-          </p:cNvPr>
-          <p:cNvSpPr>
-            <a:spLocks noGrp="1"/>
-          </p:cNvSpPr>
-          <p:nvPr>
-            <p:ph type="title"/>
-          </p:nvPr>
-        </p:nvSpPr>
-        <p:spPr/>
-        <p:txBody>
-          <a:bodyPr/>
-          <a:lstStyle/>
-          <a:p>
-            <a:endParaRPr lang="en-IN" dirty="0"/>
-          </a:p>
-        </p:txBody>
-      </p:sp>
-      <p:sp>
-        <p:nvSpPr>
-          <p:cNvPr id="3" name="Content Placeholder 2">
-            <a:extLst>
-              <a:ext uri="{FF2B5EF4-FFF2-40B4-BE49-F238E27FC236}">
-                <a16:creationId xmlns:a16="http://schemas.microsoft.com/office/drawing/2014/main" id="{AA1338A7-9534-4C05-A636-44B8F080AD1E}"/>
-              </a:ext>
-            </a:extLst>
-          </p:cNvPr>
-          <p:cNvSpPr>
-            <a:spLocks noGrp="1"/>
-          </p:cNvSpPr>
-          <p:nvPr>
-            <p:ph idx="1"/>
-          </p:nvPr>
-        </p:nvSpPr>
-        <p:spPr/>
-        <p:txBody>
-          <a:bodyPr/>
-          <a:lstStyle/>
-          <a:p>
-            <a:endParaRPr lang="en-IN"/>
-          </a:p>
-        </p:txBody>
-      </p:sp>
-      <p:sp>
-        <p:nvSpPr>
           <p:cNvPr id="4" name="Footer Placeholder 3">
             <a:extLst>
               <a:ext uri="{FF2B5EF4-FFF2-40B4-BE49-F238E27FC236}">
@@ -33974,10 +33935,609 @@
           </a:p>
         </p:txBody>
       </p:sp>
+      <p:pic>
+        <p:nvPicPr>
+          <p:cNvPr id="6" name="Picture 5">
+            <a:extLst>
+              <a:ext uri="{FF2B5EF4-FFF2-40B4-BE49-F238E27FC236}">
+                <a16:creationId xmlns:a16="http://schemas.microsoft.com/office/drawing/2014/main" id="{BF530585-9595-4AB5-A2F7-CEE51630E37B}"/>
+              </a:ext>
+            </a:extLst>
+          </p:cNvPr>
+          <p:cNvPicPr>
+            <a:picLocks noChangeAspect="1"/>
+          </p:cNvPicPr>
+          <p:nvPr/>
+        </p:nvPicPr>
+        <p:blipFill rotWithShape="1">
+          <a:blip r:embed="rId2"/>
+          <a:srcRect l="17548" t="11542" r="22610" b="20737"/>
+          <a:stretch/>
+        </p:blipFill>
+        <p:spPr>
+          <a:xfrm>
+            <a:off x="2436268" y="2294093"/>
+            <a:ext cx="4271464" cy="2269814"/>
+          </a:xfrm>
+          <a:prstGeom prst="roundRect">
+            <a:avLst>
+              <a:gd name="adj" fmla="val 8594"/>
+            </a:avLst>
+          </a:prstGeom>
+          <a:solidFill>
+            <a:srgbClr val="FFFFFF">
+              <a:shade val="85000"/>
+            </a:srgbClr>
+          </a:solidFill>
+          <a:ln>
+            <a:noFill/>
+          </a:ln>
+          <a:effectLst>
+            <a:reflection blurRad="12700" stA="38000" endPos="28000" dist="5000" dir="5400000" sy="-100000" algn="bl" rotWithShape="0"/>
+          </a:effectLst>
+        </p:spPr>
+      </p:pic>
     </p:spTree>
     <p:extLst>
       <p:ext uri="{BB962C8B-B14F-4D97-AF65-F5344CB8AC3E}">
         <p14:creationId xmlns:p14="http://schemas.microsoft.com/office/powerpoint/2010/main" val="1470261760"/>
+      </p:ext>
+    </p:extLst>
+  </p:cSld>
+  <p:clrMapOvr>
+    <a:masterClrMapping/>
+  </p:clrMapOvr>
+</p:sld>
+</file>
+
+<file path=ppt/slides/slide26.xml><?xml version="1.0" encoding="utf-8"?>
+<p:sld xmlns:a="http://schemas.openxmlformats.org/drawingml/2006/main" xmlns:r="http://schemas.openxmlformats.org/officeDocument/2006/relationships" xmlns:p="http://schemas.openxmlformats.org/presentationml/2006/main">
+  <p:cSld>
+    <p:spTree>
+      <p:nvGrpSpPr>
+        <p:cNvPr id="1" name=""/>
+        <p:cNvGrpSpPr/>
+        <p:nvPr/>
+      </p:nvGrpSpPr>
+      <p:grpSpPr>
+        <a:xfrm>
+          <a:off x="0" y="0"/>
+          <a:ext cx="0" cy="0"/>
+          <a:chOff x="0" y="0"/>
+          <a:chExt cx="0" cy="0"/>
+        </a:xfrm>
+      </p:grpSpPr>
+      <p:sp>
+        <p:nvSpPr>
+          <p:cNvPr id="2" name="Title 1">
+            <a:extLst>
+              <a:ext uri="{FF2B5EF4-FFF2-40B4-BE49-F238E27FC236}">
+                <a16:creationId xmlns:a16="http://schemas.microsoft.com/office/drawing/2014/main" id="{C44ACD9C-58B5-438A-82F2-FB5A26E78EC8}"/>
+              </a:ext>
+            </a:extLst>
+          </p:cNvPr>
+          <p:cNvSpPr>
+            <a:spLocks noGrp="1"/>
+          </p:cNvSpPr>
+          <p:nvPr>
+            <p:ph type="title"/>
+          </p:nvPr>
+        </p:nvSpPr>
+        <p:spPr>
+          <a:xfrm>
+            <a:off x="1383030" y="2782486"/>
+            <a:ext cx="6377940" cy="1293028"/>
+          </a:xfrm>
+        </p:spPr>
+        <p:txBody>
+          <a:bodyPr/>
+          <a:lstStyle/>
+          <a:p>
+            <a:r>
+              <a:rPr lang="en-US" dirty="0"/>
+              <a:t>DISTRIBUTED COMPUTING</a:t>
+            </a:r>
+            <a:endParaRPr lang="en-IN" dirty="0"/>
+          </a:p>
+        </p:txBody>
+      </p:sp>
+      <p:sp>
+        <p:nvSpPr>
+          <p:cNvPr id="4" name="Footer Placeholder 3">
+            <a:extLst>
+              <a:ext uri="{FF2B5EF4-FFF2-40B4-BE49-F238E27FC236}">
+                <a16:creationId xmlns:a16="http://schemas.microsoft.com/office/drawing/2014/main" id="{5F4A0D01-5751-4813-A33A-A7CFAE46FBCA}"/>
+              </a:ext>
+            </a:extLst>
+          </p:cNvPr>
+          <p:cNvSpPr>
+            <a:spLocks noGrp="1"/>
+          </p:cNvSpPr>
+          <p:nvPr>
+            <p:ph type="ftr" sz="quarter" idx="11"/>
+          </p:nvPr>
+        </p:nvSpPr>
+        <p:spPr/>
+        <p:txBody>
+          <a:bodyPr/>
+          <a:lstStyle/>
+          <a:p>
+            <a:r>
+              <a:rPr lang="en-US"/>
+              <a:t>chandanshastri.github.io</a:t>
+            </a:r>
+            <a:endParaRPr lang="en-US" dirty="0"/>
+          </a:p>
+        </p:txBody>
+      </p:sp>
+      <p:sp>
+        <p:nvSpPr>
+          <p:cNvPr id="5" name="Slide Number Placeholder 4">
+            <a:extLst>
+              <a:ext uri="{FF2B5EF4-FFF2-40B4-BE49-F238E27FC236}">
+                <a16:creationId xmlns:a16="http://schemas.microsoft.com/office/drawing/2014/main" id="{71F9160B-6400-4EEB-8B81-9D035EF9659D}"/>
+              </a:ext>
+            </a:extLst>
+          </p:cNvPr>
+          <p:cNvSpPr>
+            <a:spLocks noGrp="1"/>
+          </p:cNvSpPr>
+          <p:nvPr>
+            <p:ph type="sldNum" sz="quarter" idx="12"/>
+          </p:nvPr>
+        </p:nvSpPr>
+        <p:spPr/>
+        <p:txBody>
+          <a:bodyPr/>
+          <a:lstStyle/>
+          <a:p>
+            <a:fld id="{6D22F896-40B5-4ADD-8801-0D06FADFA095}" type="slidenum">
+              <a:rPr lang="en-US" smtClean="0"/>
+              <a:t>26</a:t>
+            </a:fld>
+            <a:endParaRPr lang="en-US" dirty="0"/>
+          </a:p>
+        </p:txBody>
+      </p:sp>
+    </p:spTree>
+    <p:extLst>
+      <p:ext uri="{BB962C8B-B14F-4D97-AF65-F5344CB8AC3E}">
+        <p14:creationId xmlns:p14="http://schemas.microsoft.com/office/powerpoint/2010/main" val="194281817"/>
+      </p:ext>
+    </p:extLst>
+  </p:cSld>
+  <p:clrMapOvr>
+    <a:masterClrMapping/>
+  </p:clrMapOvr>
+</p:sld>
+</file>
+
+<file path=ppt/slides/slide27.xml><?xml version="1.0" encoding="utf-8"?>
+<p:sld xmlns:a="http://schemas.openxmlformats.org/drawingml/2006/main" xmlns:r="http://schemas.openxmlformats.org/officeDocument/2006/relationships" xmlns:p="http://schemas.openxmlformats.org/presentationml/2006/main">
+  <p:cSld>
+    <p:spTree>
+      <p:nvGrpSpPr>
+        <p:cNvPr id="1" name=""/>
+        <p:cNvGrpSpPr/>
+        <p:nvPr/>
+      </p:nvGrpSpPr>
+      <p:grpSpPr>
+        <a:xfrm>
+          <a:off x="0" y="0"/>
+          <a:ext cx="0" cy="0"/>
+          <a:chOff x="0" y="0"/>
+          <a:chExt cx="0" cy="0"/>
+        </a:xfrm>
+      </p:grpSpPr>
+      <p:sp>
+        <p:nvSpPr>
+          <p:cNvPr id="2" name="Title 1">
+            <a:extLst>
+              <a:ext uri="{FF2B5EF4-FFF2-40B4-BE49-F238E27FC236}">
+                <a16:creationId xmlns:a16="http://schemas.microsoft.com/office/drawing/2014/main" id="{116F9BD4-3AFC-447B-8750-4B35530F359C}"/>
+              </a:ext>
+            </a:extLst>
+          </p:cNvPr>
+          <p:cNvSpPr>
+            <a:spLocks noGrp="1"/>
+          </p:cNvSpPr>
+          <p:nvPr>
+            <p:ph type="title"/>
+          </p:nvPr>
+        </p:nvSpPr>
+        <p:spPr>
+          <a:xfrm>
+            <a:off x="2654014" y="137029"/>
+            <a:ext cx="3835972" cy="1293028"/>
+          </a:xfrm>
+        </p:spPr>
+        <p:txBody>
+          <a:bodyPr/>
+          <a:lstStyle/>
+          <a:p>
+            <a:r>
+              <a:rPr lang="en-US" dirty="0"/>
+              <a:t>MAP - REDUCE</a:t>
+            </a:r>
+            <a:endParaRPr lang="en-IN" dirty="0"/>
+          </a:p>
+        </p:txBody>
+      </p:sp>
+      <p:pic>
+        <p:nvPicPr>
+          <p:cNvPr id="7" name="Content Placeholder 6">
+            <a:extLst>
+              <a:ext uri="{FF2B5EF4-FFF2-40B4-BE49-F238E27FC236}">
+                <a16:creationId xmlns:a16="http://schemas.microsoft.com/office/drawing/2014/main" id="{2D211C33-4C4B-446C-A0AB-7F8996E74201}"/>
+              </a:ext>
+            </a:extLst>
+          </p:cNvPr>
+          <p:cNvPicPr>
+            <a:picLocks noGrp="1" noChangeAspect="1"/>
+          </p:cNvPicPr>
+          <p:nvPr>
+            <p:ph idx="1"/>
+          </p:nvPr>
+        </p:nvPicPr>
+        <p:blipFill>
+          <a:blip r:embed="rId2"/>
+          <a:stretch>
+            <a:fillRect/>
+          </a:stretch>
+        </p:blipFill>
+        <p:spPr>
+          <a:xfrm>
+            <a:off x="51326" y="1215129"/>
+            <a:ext cx="9041348" cy="4760667"/>
+          </a:xfrm>
+        </p:spPr>
+      </p:pic>
+      <p:sp>
+        <p:nvSpPr>
+          <p:cNvPr id="4" name="Footer Placeholder 3">
+            <a:extLst>
+              <a:ext uri="{FF2B5EF4-FFF2-40B4-BE49-F238E27FC236}">
+                <a16:creationId xmlns:a16="http://schemas.microsoft.com/office/drawing/2014/main" id="{71462FBB-9D3E-44F9-9D66-46F58C2E7217}"/>
+              </a:ext>
+            </a:extLst>
+          </p:cNvPr>
+          <p:cNvSpPr>
+            <a:spLocks noGrp="1"/>
+          </p:cNvSpPr>
+          <p:nvPr>
+            <p:ph type="ftr" sz="quarter" idx="11"/>
+          </p:nvPr>
+        </p:nvSpPr>
+        <p:spPr/>
+        <p:txBody>
+          <a:bodyPr/>
+          <a:lstStyle/>
+          <a:p>
+            <a:r>
+              <a:rPr lang="en-US"/>
+              <a:t>chandanshastri.github.io</a:t>
+            </a:r>
+            <a:endParaRPr lang="en-US" dirty="0"/>
+          </a:p>
+        </p:txBody>
+      </p:sp>
+      <p:sp>
+        <p:nvSpPr>
+          <p:cNvPr id="5" name="Slide Number Placeholder 4">
+            <a:extLst>
+              <a:ext uri="{FF2B5EF4-FFF2-40B4-BE49-F238E27FC236}">
+                <a16:creationId xmlns:a16="http://schemas.microsoft.com/office/drawing/2014/main" id="{323B9772-8FAD-4B4B-8F14-70CDF71DCAE9}"/>
+              </a:ext>
+            </a:extLst>
+          </p:cNvPr>
+          <p:cNvSpPr>
+            <a:spLocks noGrp="1"/>
+          </p:cNvSpPr>
+          <p:nvPr>
+            <p:ph type="sldNum" sz="quarter" idx="12"/>
+          </p:nvPr>
+        </p:nvSpPr>
+        <p:spPr/>
+        <p:txBody>
+          <a:bodyPr/>
+          <a:lstStyle/>
+          <a:p>
+            <a:fld id="{6D22F896-40B5-4ADD-8801-0D06FADFA095}" type="slidenum">
+              <a:rPr lang="en-US" smtClean="0"/>
+              <a:t>27</a:t>
+            </a:fld>
+            <a:endParaRPr lang="en-US" dirty="0"/>
+          </a:p>
+        </p:txBody>
+      </p:sp>
+    </p:spTree>
+    <p:extLst>
+      <p:ext uri="{BB962C8B-B14F-4D97-AF65-F5344CB8AC3E}">
+        <p14:creationId xmlns:p14="http://schemas.microsoft.com/office/powerpoint/2010/main" val="645217328"/>
+      </p:ext>
+    </p:extLst>
+  </p:cSld>
+  <p:clrMapOvr>
+    <a:masterClrMapping/>
+  </p:clrMapOvr>
+</p:sld>
+</file>
+
+<file path=ppt/slides/slide28.xml><?xml version="1.0" encoding="utf-8"?>
+<p:sld xmlns:a="http://schemas.openxmlformats.org/drawingml/2006/main" xmlns:r="http://schemas.openxmlformats.org/officeDocument/2006/relationships" xmlns:p="http://schemas.openxmlformats.org/presentationml/2006/main">
+  <p:cSld>
+    <p:spTree>
+      <p:nvGrpSpPr>
+        <p:cNvPr id="1" name=""/>
+        <p:cNvGrpSpPr/>
+        <p:nvPr/>
+      </p:nvGrpSpPr>
+      <p:grpSpPr>
+        <a:xfrm>
+          <a:off x="0" y="0"/>
+          <a:ext cx="0" cy="0"/>
+          <a:chOff x="0" y="0"/>
+          <a:chExt cx="0" cy="0"/>
+        </a:xfrm>
+      </p:grpSpPr>
+      <p:sp>
+        <p:nvSpPr>
+          <p:cNvPr id="2" name="Title 1">
+            <a:extLst>
+              <a:ext uri="{FF2B5EF4-FFF2-40B4-BE49-F238E27FC236}">
+                <a16:creationId xmlns:a16="http://schemas.microsoft.com/office/drawing/2014/main" id="{75D72AC8-9AE0-4C0A-84B0-5639660495EA}"/>
+              </a:ext>
+            </a:extLst>
+          </p:cNvPr>
+          <p:cNvSpPr>
+            <a:spLocks noGrp="1"/>
+          </p:cNvSpPr>
+          <p:nvPr>
+            <p:ph type="title"/>
+          </p:nvPr>
+        </p:nvSpPr>
+        <p:spPr/>
+        <p:txBody>
+          <a:bodyPr/>
+          <a:lstStyle/>
+          <a:p>
+            <a:endParaRPr lang="en-IN"/>
+          </a:p>
+        </p:txBody>
+      </p:sp>
+      <p:pic>
+        <p:nvPicPr>
+          <p:cNvPr id="7" name="Content Placeholder 6">
+            <a:extLst>
+              <a:ext uri="{FF2B5EF4-FFF2-40B4-BE49-F238E27FC236}">
+                <a16:creationId xmlns:a16="http://schemas.microsoft.com/office/drawing/2014/main" id="{CB4AC3C9-F1A4-4407-808F-85E45D1B68E9}"/>
+              </a:ext>
+            </a:extLst>
+          </p:cNvPr>
+          <p:cNvPicPr>
+            <a:picLocks noGrp="1" noChangeAspect="1"/>
+          </p:cNvPicPr>
+          <p:nvPr>
+            <p:ph idx="1"/>
+          </p:nvPr>
+        </p:nvPicPr>
+        <p:blipFill>
+          <a:blip r:embed="rId2"/>
+          <a:stretch>
+            <a:fillRect/>
+          </a:stretch>
+        </p:blipFill>
+        <p:spPr>
+          <a:xfrm>
+            <a:off x="1199876" y="589522"/>
+            <a:ext cx="6744248" cy="5678955"/>
+          </a:xfrm>
+        </p:spPr>
+      </p:pic>
+      <p:sp>
+        <p:nvSpPr>
+          <p:cNvPr id="4" name="Footer Placeholder 3">
+            <a:extLst>
+              <a:ext uri="{FF2B5EF4-FFF2-40B4-BE49-F238E27FC236}">
+                <a16:creationId xmlns:a16="http://schemas.microsoft.com/office/drawing/2014/main" id="{53B4DE63-ACEA-415E-8723-0B97312FE969}"/>
+              </a:ext>
+            </a:extLst>
+          </p:cNvPr>
+          <p:cNvSpPr>
+            <a:spLocks noGrp="1"/>
+          </p:cNvSpPr>
+          <p:nvPr>
+            <p:ph type="ftr" sz="quarter" idx="11"/>
+          </p:nvPr>
+        </p:nvSpPr>
+        <p:spPr/>
+        <p:txBody>
+          <a:bodyPr/>
+          <a:lstStyle/>
+          <a:p>
+            <a:r>
+              <a:rPr lang="en-US"/>
+              <a:t>chandanshastri.github.io</a:t>
+            </a:r>
+            <a:endParaRPr lang="en-US" dirty="0"/>
+          </a:p>
+        </p:txBody>
+      </p:sp>
+      <p:sp>
+        <p:nvSpPr>
+          <p:cNvPr id="5" name="Slide Number Placeholder 4">
+            <a:extLst>
+              <a:ext uri="{FF2B5EF4-FFF2-40B4-BE49-F238E27FC236}">
+                <a16:creationId xmlns:a16="http://schemas.microsoft.com/office/drawing/2014/main" id="{B7880FA2-6340-4C35-AB94-604D70DFB644}"/>
+              </a:ext>
+            </a:extLst>
+          </p:cNvPr>
+          <p:cNvSpPr>
+            <a:spLocks noGrp="1"/>
+          </p:cNvSpPr>
+          <p:nvPr>
+            <p:ph type="sldNum" sz="quarter" idx="12"/>
+          </p:nvPr>
+        </p:nvSpPr>
+        <p:spPr/>
+        <p:txBody>
+          <a:bodyPr/>
+          <a:lstStyle/>
+          <a:p>
+            <a:fld id="{6D22F896-40B5-4ADD-8801-0D06FADFA095}" type="slidenum">
+              <a:rPr lang="en-US" smtClean="0"/>
+              <a:t>28</a:t>
+            </a:fld>
+            <a:endParaRPr lang="en-US" dirty="0"/>
+          </a:p>
+        </p:txBody>
+      </p:sp>
+    </p:spTree>
+    <p:extLst>
+      <p:ext uri="{BB962C8B-B14F-4D97-AF65-F5344CB8AC3E}">
+        <p14:creationId xmlns:p14="http://schemas.microsoft.com/office/powerpoint/2010/main" val="3652923297"/>
+      </p:ext>
+    </p:extLst>
+  </p:cSld>
+  <p:clrMapOvr>
+    <a:masterClrMapping/>
+  </p:clrMapOvr>
+</p:sld>
+</file>
+
+<file path=ppt/slides/slide29.xml><?xml version="1.0" encoding="utf-8"?>
+<p:sld xmlns:a="http://schemas.openxmlformats.org/drawingml/2006/main" xmlns:r="http://schemas.openxmlformats.org/officeDocument/2006/relationships" xmlns:p="http://schemas.openxmlformats.org/presentationml/2006/main">
+  <p:cSld>
+    <p:spTree>
+      <p:nvGrpSpPr>
+        <p:cNvPr id="1" name=""/>
+        <p:cNvGrpSpPr/>
+        <p:nvPr/>
+      </p:nvGrpSpPr>
+      <p:grpSpPr>
+        <a:xfrm>
+          <a:off x="0" y="0"/>
+          <a:ext cx="0" cy="0"/>
+          <a:chOff x="0" y="0"/>
+          <a:chExt cx="0" cy="0"/>
+        </a:xfrm>
+      </p:grpSpPr>
+      <p:sp>
+        <p:nvSpPr>
+          <p:cNvPr id="2" name="Title 1">
+            <a:extLst>
+              <a:ext uri="{FF2B5EF4-FFF2-40B4-BE49-F238E27FC236}">
+                <a16:creationId xmlns:a16="http://schemas.microsoft.com/office/drawing/2014/main" id="{83A9F11D-6DAD-4B38-A3AB-641CCCE17B94}"/>
+              </a:ext>
+            </a:extLst>
+          </p:cNvPr>
+          <p:cNvSpPr>
+            <a:spLocks noGrp="1"/>
+          </p:cNvSpPr>
+          <p:nvPr>
+            <p:ph type="title"/>
+          </p:nvPr>
+        </p:nvSpPr>
+        <p:spPr/>
+        <p:txBody>
+          <a:bodyPr/>
+          <a:lstStyle/>
+          <a:p>
+            <a:endParaRPr lang="en-IN"/>
+          </a:p>
+        </p:txBody>
+      </p:sp>
+      <p:pic>
+        <p:nvPicPr>
+          <p:cNvPr id="7" name="Content Placeholder 6">
+            <a:extLst>
+              <a:ext uri="{FF2B5EF4-FFF2-40B4-BE49-F238E27FC236}">
+                <a16:creationId xmlns:a16="http://schemas.microsoft.com/office/drawing/2014/main" id="{FE20C9F3-31A5-4388-BA9A-4140E98AF36B}"/>
+              </a:ext>
+            </a:extLst>
+          </p:cNvPr>
+          <p:cNvPicPr>
+            <a:picLocks noGrp="1" noChangeAspect="1"/>
+          </p:cNvPicPr>
+          <p:nvPr>
+            <p:ph idx="1"/>
+          </p:nvPr>
+        </p:nvPicPr>
+        <p:blipFill>
+          <a:blip r:embed="rId2"/>
+          <a:stretch>
+            <a:fillRect/>
+          </a:stretch>
+        </p:blipFill>
+        <p:spPr>
+          <a:xfrm>
+            <a:off x="175486" y="952188"/>
+            <a:ext cx="8793027" cy="4766032"/>
+          </a:xfrm>
+        </p:spPr>
+      </p:pic>
+      <p:sp>
+        <p:nvSpPr>
+          <p:cNvPr id="4" name="Footer Placeholder 3">
+            <a:extLst>
+              <a:ext uri="{FF2B5EF4-FFF2-40B4-BE49-F238E27FC236}">
+                <a16:creationId xmlns:a16="http://schemas.microsoft.com/office/drawing/2014/main" id="{6AA6771F-4DBE-4371-95DD-B809A9496B8D}"/>
+              </a:ext>
+            </a:extLst>
+          </p:cNvPr>
+          <p:cNvSpPr>
+            <a:spLocks noGrp="1"/>
+          </p:cNvSpPr>
+          <p:nvPr>
+            <p:ph type="ftr" sz="quarter" idx="11"/>
+          </p:nvPr>
+        </p:nvSpPr>
+        <p:spPr/>
+        <p:txBody>
+          <a:bodyPr/>
+          <a:lstStyle/>
+          <a:p>
+            <a:r>
+              <a:rPr lang="en-US"/>
+              <a:t>chandanshastri.github.io</a:t>
+            </a:r>
+            <a:endParaRPr lang="en-US" dirty="0"/>
+          </a:p>
+        </p:txBody>
+      </p:sp>
+      <p:sp>
+        <p:nvSpPr>
+          <p:cNvPr id="5" name="Slide Number Placeholder 4">
+            <a:extLst>
+              <a:ext uri="{FF2B5EF4-FFF2-40B4-BE49-F238E27FC236}">
+                <a16:creationId xmlns:a16="http://schemas.microsoft.com/office/drawing/2014/main" id="{91692255-6C90-4A1A-BF8A-1F570294C2C1}"/>
+              </a:ext>
+            </a:extLst>
+          </p:cNvPr>
+          <p:cNvSpPr>
+            <a:spLocks noGrp="1"/>
+          </p:cNvSpPr>
+          <p:nvPr>
+            <p:ph type="sldNum" sz="quarter" idx="12"/>
+          </p:nvPr>
+        </p:nvSpPr>
+        <p:spPr/>
+        <p:txBody>
+          <a:bodyPr/>
+          <a:lstStyle/>
+          <a:p>
+            <a:fld id="{6D22F896-40B5-4ADD-8801-0D06FADFA095}" type="slidenum">
+              <a:rPr lang="en-US" smtClean="0"/>
+              <a:t>29</a:t>
+            </a:fld>
+            <a:endParaRPr lang="en-US" dirty="0"/>
+          </a:p>
+        </p:txBody>
+      </p:sp>
+    </p:spTree>
+    <p:extLst>
+      <p:ext uri="{BB962C8B-B14F-4D97-AF65-F5344CB8AC3E}">
+        <p14:creationId xmlns:p14="http://schemas.microsoft.com/office/powerpoint/2010/main" val="1580045859"/>
       </p:ext>
     </p:extLst>
   </p:cSld>
@@ -34166,6 +34726,961 @@
     <p:extLst>
       <p:ext uri="{BB962C8B-B14F-4D97-AF65-F5344CB8AC3E}">
         <p14:creationId xmlns:p14="http://schemas.microsoft.com/office/powerpoint/2010/main" val="220894650"/>
+      </p:ext>
+    </p:extLst>
+  </p:cSld>
+  <p:clrMapOvr>
+    <a:masterClrMapping/>
+  </p:clrMapOvr>
+</p:sld>
+</file>
+
+<file path=ppt/slides/slide30.xml><?xml version="1.0" encoding="utf-8"?>
+<p:sld xmlns:a="http://schemas.openxmlformats.org/drawingml/2006/main" xmlns:r="http://schemas.openxmlformats.org/officeDocument/2006/relationships" xmlns:p="http://schemas.openxmlformats.org/presentationml/2006/main">
+  <p:cSld>
+    <p:spTree>
+      <p:nvGrpSpPr>
+        <p:cNvPr id="1" name=""/>
+        <p:cNvGrpSpPr/>
+        <p:nvPr/>
+      </p:nvGrpSpPr>
+      <p:grpSpPr>
+        <a:xfrm>
+          <a:off x="0" y="0"/>
+          <a:ext cx="0" cy="0"/>
+          <a:chOff x="0" y="0"/>
+          <a:chExt cx="0" cy="0"/>
+        </a:xfrm>
+      </p:grpSpPr>
+      <p:sp>
+        <p:nvSpPr>
+          <p:cNvPr id="4" name="Footer Placeholder 3">
+            <a:extLst>
+              <a:ext uri="{FF2B5EF4-FFF2-40B4-BE49-F238E27FC236}">
+                <a16:creationId xmlns:a16="http://schemas.microsoft.com/office/drawing/2014/main" id="{4D1A686F-0B4A-4211-B02D-B0AB3A5B4D91}"/>
+              </a:ext>
+            </a:extLst>
+          </p:cNvPr>
+          <p:cNvSpPr>
+            <a:spLocks noGrp="1"/>
+          </p:cNvSpPr>
+          <p:nvPr>
+            <p:ph type="ftr" sz="quarter" idx="11"/>
+          </p:nvPr>
+        </p:nvSpPr>
+        <p:spPr/>
+        <p:txBody>
+          <a:bodyPr/>
+          <a:lstStyle/>
+          <a:p>
+            <a:r>
+              <a:rPr lang="en-US"/>
+              <a:t>chandanshastri.github.io</a:t>
+            </a:r>
+            <a:endParaRPr lang="en-US" dirty="0"/>
+          </a:p>
+        </p:txBody>
+      </p:sp>
+      <p:sp>
+        <p:nvSpPr>
+          <p:cNvPr id="5" name="Slide Number Placeholder 4">
+            <a:extLst>
+              <a:ext uri="{FF2B5EF4-FFF2-40B4-BE49-F238E27FC236}">
+                <a16:creationId xmlns:a16="http://schemas.microsoft.com/office/drawing/2014/main" id="{6541268A-96B0-4B51-BBE7-8CC0224077F5}"/>
+              </a:ext>
+            </a:extLst>
+          </p:cNvPr>
+          <p:cNvSpPr>
+            <a:spLocks noGrp="1"/>
+          </p:cNvSpPr>
+          <p:nvPr>
+            <p:ph type="sldNum" sz="quarter" idx="12"/>
+          </p:nvPr>
+        </p:nvSpPr>
+        <p:spPr/>
+        <p:txBody>
+          <a:bodyPr/>
+          <a:lstStyle/>
+          <a:p>
+            <a:fld id="{6D22F896-40B5-4ADD-8801-0D06FADFA095}" type="slidenum">
+              <a:rPr lang="en-US" smtClean="0"/>
+              <a:t>30</a:t>
+            </a:fld>
+            <a:endParaRPr lang="en-US" dirty="0"/>
+          </a:p>
+        </p:txBody>
+      </p:sp>
+      <p:pic>
+        <p:nvPicPr>
+          <p:cNvPr id="6" name="Picture 5">
+            <a:extLst>
+              <a:ext uri="{FF2B5EF4-FFF2-40B4-BE49-F238E27FC236}">
+                <a16:creationId xmlns:a16="http://schemas.microsoft.com/office/drawing/2014/main" id="{67A0313B-E34A-467E-BBA7-0FA9B900DA2A}"/>
+              </a:ext>
+            </a:extLst>
+          </p:cNvPr>
+          <p:cNvPicPr>
+            <a:picLocks noChangeAspect="1"/>
+          </p:cNvPicPr>
+          <p:nvPr/>
+        </p:nvPicPr>
+        <p:blipFill>
+          <a:blip r:embed="rId2"/>
+          <a:stretch>
+            <a:fillRect/>
+          </a:stretch>
+        </p:blipFill>
+        <p:spPr>
+          <a:xfrm>
+            <a:off x="2256337" y="1508931"/>
+            <a:ext cx="4018733" cy="3616860"/>
+          </a:xfrm>
+          <a:prstGeom prst="rect">
+            <a:avLst/>
+          </a:prstGeom>
+        </p:spPr>
+      </p:pic>
+    </p:spTree>
+    <p:extLst>
+      <p:ext uri="{BB962C8B-B14F-4D97-AF65-F5344CB8AC3E}">
+        <p14:creationId xmlns:p14="http://schemas.microsoft.com/office/powerpoint/2010/main" val="1131894550"/>
+      </p:ext>
+    </p:extLst>
+  </p:cSld>
+  <p:clrMapOvr>
+    <a:masterClrMapping/>
+  </p:clrMapOvr>
+</p:sld>
+</file>
+
+<file path=ppt/slides/slide31.xml><?xml version="1.0" encoding="utf-8"?>
+<p:sld xmlns:a="http://schemas.openxmlformats.org/drawingml/2006/main" xmlns:r="http://schemas.openxmlformats.org/officeDocument/2006/relationships" xmlns:p="http://schemas.openxmlformats.org/presentationml/2006/main">
+  <p:cSld>
+    <p:spTree>
+      <p:nvGrpSpPr>
+        <p:cNvPr id="1" name=""/>
+        <p:cNvGrpSpPr/>
+        <p:nvPr/>
+      </p:nvGrpSpPr>
+      <p:grpSpPr>
+        <a:xfrm>
+          <a:off x="0" y="0"/>
+          <a:ext cx="0" cy="0"/>
+          <a:chOff x="0" y="0"/>
+          <a:chExt cx="0" cy="0"/>
+        </a:xfrm>
+      </p:grpSpPr>
+      <p:sp>
+        <p:nvSpPr>
+          <p:cNvPr id="2" name="Title 1">
+            <a:extLst>
+              <a:ext uri="{FF2B5EF4-FFF2-40B4-BE49-F238E27FC236}">
+                <a16:creationId xmlns:a16="http://schemas.microsoft.com/office/drawing/2014/main" id="{23282FA6-520B-4026-89EC-927832F285CF}"/>
+              </a:ext>
+            </a:extLst>
+          </p:cNvPr>
+          <p:cNvSpPr>
+            <a:spLocks noGrp="1"/>
+          </p:cNvSpPr>
+          <p:nvPr>
+            <p:ph type="title"/>
+          </p:nvPr>
+        </p:nvSpPr>
+        <p:spPr/>
+        <p:txBody>
+          <a:bodyPr/>
+          <a:lstStyle/>
+          <a:p>
+            <a:endParaRPr lang="en-IN"/>
+          </a:p>
+        </p:txBody>
+      </p:sp>
+      <p:pic>
+        <p:nvPicPr>
+          <p:cNvPr id="7" name="Content Placeholder 6">
+            <a:extLst>
+              <a:ext uri="{FF2B5EF4-FFF2-40B4-BE49-F238E27FC236}">
+                <a16:creationId xmlns:a16="http://schemas.microsoft.com/office/drawing/2014/main" id="{6108E8A2-606C-416E-A79B-DA3FA36C9204}"/>
+              </a:ext>
+            </a:extLst>
+          </p:cNvPr>
+          <p:cNvPicPr>
+            <a:picLocks noGrp="1" noChangeAspect="1"/>
+          </p:cNvPicPr>
+          <p:nvPr>
+            <p:ph idx="1"/>
+          </p:nvPr>
+        </p:nvPicPr>
+        <p:blipFill>
+          <a:blip r:embed="rId2"/>
+          <a:stretch>
+            <a:fillRect/>
+          </a:stretch>
+        </p:blipFill>
+        <p:spPr>
+          <a:xfrm>
+            <a:off x="475805" y="15876"/>
+            <a:ext cx="8192389" cy="6339970"/>
+          </a:xfrm>
+        </p:spPr>
+      </p:pic>
+      <p:sp>
+        <p:nvSpPr>
+          <p:cNvPr id="4" name="Footer Placeholder 3">
+            <a:extLst>
+              <a:ext uri="{FF2B5EF4-FFF2-40B4-BE49-F238E27FC236}">
+                <a16:creationId xmlns:a16="http://schemas.microsoft.com/office/drawing/2014/main" id="{E1C7D8BC-5307-48EB-8201-E3D12E460229}"/>
+              </a:ext>
+            </a:extLst>
+          </p:cNvPr>
+          <p:cNvSpPr>
+            <a:spLocks noGrp="1"/>
+          </p:cNvSpPr>
+          <p:nvPr>
+            <p:ph type="ftr" sz="quarter" idx="11"/>
+          </p:nvPr>
+        </p:nvSpPr>
+        <p:spPr/>
+        <p:txBody>
+          <a:bodyPr/>
+          <a:lstStyle/>
+          <a:p>
+            <a:r>
+              <a:rPr lang="en-US"/>
+              <a:t>chandanshastri.github.io</a:t>
+            </a:r>
+            <a:endParaRPr lang="en-US" dirty="0"/>
+          </a:p>
+        </p:txBody>
+      </p:sp>
+      <p:sp>
+        <p:nvSpPr>
+          <p:cNvPr id="5" name="Slide Number Placeholder 4">
+            <a:extLst>
+              <a:ext uri="{FF2B5EF4-FFF2-40B4-BE49-F238E27FC236}">
+                <a16:creationId xmlns:a16="http://schemas.microsoft.com/office/drawing/2014/main" id="{E65B226D-059C-4818-8944-15788247432E}"/>
+              </a:ext>
+            </a:extLst>
+          </p:cNvPr>
+          <p:cNvSpPr>
+            <a:spLocks noGrp="1"/>
+          </p:cNvSpPr>
+          <p:nvPr>
+            <p:ph type="sldNum" sz="quarter" idx="12"/>
+          </p:nvPr>
+        </p:nvSpPr>
+        <p:spPr/>
+        <p:txBody>
+          <a:bodyPr/>
+          <a:lstStyle/>
+          <a:p>
+            <a:fld id="{6D22F896-40B5-4ADD-8801-0D06FADFA095}" type="slidenum">
+              <a:rPr lang="en-US" smtClean="0"/>
+              <a:t>31</a:t>
+            </a:fld>
+            <a:endParaRPr lang="en-US" dirty="0"/>
+          </a:p>
+        </p:txBody>
+      </p:sp>
+    </p:spTree>
+    <p:extLst>
+      <p:ext uri="{BB962C8B-B14F-4D97-AF65-F5344CB8AC3E}">
+        <p14:creationId xmlns:p14="http://schemas.microsoft.com/office/powerpoint/2010/main" val="1831330806"/>
+      </p:ext>
+    </p:extLst>
+  </p:cSld>
+  <p:clrMapOvr>
+    <a:masterClrMapping/>
+  </p:clrMapOvr>
+</p:sld>
+</file>
+
+<file path=ppt/slides/slide32.xml><?xml version="1.0" encoding="utf-8"?>
+<p:sld xmlns:a="http://schemas.openxmlformats.org/drawingml/2006/main" xmlns:r="http://schemas.openxmlformats.org/officeDocument/2006/relationships" xmlns:p="http://schemas.openxmlformats.org/presentationml/2006/main">
+  <p:cSld>
+    <p:spTree>
+      <p:nvGrpSpPr>
+        <p:cNvPr id="1" name=""/>
+        <p:cNvGrpSpPr/>
+        <p:nvPr/>
+      </p:nvGrpSpPr>
+      <p:grpSpPr>
+        <a:xfrm>
+          <a:off x="0" y="0"/>
+          <a:ext cx="0" cy="0"/>
+          <a:chOff x="0" y="0"/>
+          <a:chExt cx="0" cy="0"/>
+        </a:xfrm>
+      </p:grpSpPr>
+      <p:sp>
+        <p:nvSpPr>
+          <p:cNvPr id="2" name="Title 1">
+            <a:extLst>
+              <a:ext uri="{FF2B5EF4-FFF2-40B4-BE49-F238E27FC236}">
+                <a16:creationId xmlns:a16="http://schemas.microsoft.com/office/drawing/2014/main" id="{15858447-D33A-4A81-9D94-0AF1D42F7C4F}"/>
+              </a:ext>
+            </a:extLst>
+          </p:cNvPr>
+          <p:cNvSpPr>
+            <a:spLocks noGrp="1"/>
+          </p:cNvSpPr>
+          <p:nvPr>
+            <p:ph type="title"/>
+          </p:nvPr>
+        </p:nvSpPr>
+        <p:spPr/>
+        <p:txBody>
+          <a:bodyPr/>
+          <a:lstStyle/>
+          <a:p>
+            <a:endParaRPr lang="en-IN"/>
+          </a:p>
+        </p:txBody>
+      </p:sp>
+      <p:pic>
+        <p:nvPicPr>
+          <p:cNvPr id="7" name="Content Placeholder 6">
+            <a:extLst>
+              <a:ext uri="{FF2B5EF4-FFF2-40B4-BE49-F238E27FC236}">
+                <a16:creationId xmlns:a16="http://schemas.microsoft.com/office/drawing/2014/main" id="{F18478C8-8F81-4713-952B-EC1F3AF83B96}"/>
+              </a:ext>
+            </a:extLst>
+          </p:cNvPr>
+          <p:cNvPicPr>
+            <a:picLocks noGrp="1" noChangeAspect="1"/>
+          </p:cNvPicPr>
+          <p:nvPr>
+            <p:ph idx="1"/>
+          </p:nvPr>
+        </p:nvPicPr>
+        <p:blipFill>
+          <a:blip r:embed="rId2"/>
+          <a:stretch>
+            <a:fillRect/>
+          </a:stretch>
+        </p:blipFill>
+        <p:spPr>
+          <a:xfrm>
+            <a:off x="196819" y="964956"/>
+            <a:ext cx="8750361" cy="4928088"/>
+          </a:xfrm>
+        </p:spPr>
+      </p:pic>
+      <p:sp>
+        <p:nvSpPr>
+          <p:cNvPr id="4" name="Footer Placeholder 3">
+            <a:extLst>
+              <a:ext uri="{FF2B5EF4-FFF2-40B4-BE49-F238E27FC236}">
+                <a16:creationId xmlns:a16="http://schemas.microsoft.com/office/drawing/2014/main" id="{6E238139-201D-4088-969F-0E38295EC7AD}"/>
+              </a:ext>
+            </a:extLst>
+          </p:cNvPr>
+          <p:cNvSpPr>
+            <a:spLocks noGrp="1"/>
+          </p:cNvSpPr>
+          <p:nvPr>
+            <p:ph type="ftr" sz="quarter" idx="11"/>
+          </p:nvPr>
+        </p:nvSpPr>
+        <p:spPr/>
+        <p:txBody>
+          <a:bodyPr/>
+          <a:lstStyle/>
+          <a:p>
+            <a:r>
+              <a:rPr lang="en-US"/>
+              <a:t>chandanshastri.github.io</a:t>
+            </a:r>
+            <a:endParaRPr lang="en-US" dirty="0"/>
+          </a:p>
+        </p:txBody>
+      </p:sp>
+      <p:sp>
+        <p:nvSpPr>
+          <p:cNvPr id="5" name="Slide Number Placeholder 4">
+            <a:extLst>
+              <a:ext uri="{FF2B5EF4-FFF2-40B4-BE49-F238E27FC236}">
+                <a16:creationId xmlns:a16="http://schemas.microsoft.com/office/drawing/2014/main" id="{F7D32E39-75C0-4088-A3E0-D28D94196C25}"/>
+              </a:ext>
+            </a:extLst>
+          </p:cNvPr>
+          <p:cNvSpPr>
+            <a:spLocks noGrp="1"/>
+          </p:cNvSpPr>
+          <p:nvPr>
+            <p:ph type="sldNum" sz="quarter" idx="12"/>
+          </p:nvPr>
+        </p:nvSpPr>
+        <p:spPr/>
+        <p:txBody>
+          <a:bodyPr/>
+          <a:lstStyle/>
+          <a:p>
+            <a:fld id="{6D22F896-40B5-4ADD-8801-0D06FADFA095}" type="slidenum">
+              <a:rPr lang="en-US" smtClean="0"/>
+              <a:t>32</a:t>
+            </a:fld>
+            <a:endParaRPr lang="en-US" dirty="0"/>
+          </a:p>
+        </p:txBody>
+      </p:sp>
+    </p:spTree>
+    <p:extLst>
+      <p:ext uri="{BB962C8B-B14F-4D97-AF65-F5344CB8AC3E}">
+        <p14:creationId xmlns:p14="http://schemas.microsoft.com/office/powerpoint/2010/main" val="3811247948"/>
+      </p:ext>
+    </p:extLst>
+  </p:cSld>
+  <p:clrMapOvr>
+    <a:masterClrMapping/>
+  </p:clrMapOvr>
+</p:sld>
+</file>
+
+<file path=ppt/slides/slide33.xml><?xml version="1.0" encoding="utf-8"?>
+<p:sld xmlns:a="http://schemas.openxmlformats.org/drawingml/2006/main" xmlns:r="http://schemas.openxmlformats.org/officeDocument/2006/relationships" xmlns:p="http://schemas.openxmlformats.org/presentationml/2006/main">
+  <p:cSld>
+    <p:spTree>
+      <p:nvGrpSpPr>
+        <p:cNvPr id="1" name=""/>
+        <p:cNvGrpSpPr/>
+        <p:nvPr/>
+      </p:nvGrpSpPr>
+      <p:grpSpPr>
+        <a:xfrm>
+          <a:off x="0" y="0"/>
+          <a:ext cx="0" cy="0"/>
+          <a:chOff x="0" y="0"/>
+          <a:chExt cx="0" cy="0"/>
+        </a:xfrm>
+      </p:grpSpPr>
+      <p:sp>
+        <p:nvSpPr>
+          <p:cNvPr id="4" name="Footer Placeholder 3">
+            <a:extLst>
+              <a:ext uri="{FF2B5EF4-FFF2-40B4-BE49-F238E27FC236}">
+                <a16:creationId xmlns:a16="http://schemas.microsoft.com/office/drawing/2014/main" id="{89CB4F04-49FE-4143-9EDC-912FB266CEB6}"/>
+              </a:ext>
+            </a:extLst>
+          </p:cNvPr>
+          <p:cNvSpPr>
+            <a:spLocks noGrp="1"/>
+          </p:cNvSpPr>
+          <p:nvPr>
+            <p:ph type="ftr" sz="quarter" idx="11"/>
+          </p:nvPr>
+        </p:nvSpPr>
+        <p:spPr/>
+        <p:txBody>
+          <a:bodyPr/>
+          <a:lstStyle/>
+          <a:p>
+            <a:r>
+              <a:rPr lang="en-US"/>
+              <a:t>chandanshastri.github.io</a:t>
+            </a:r>
+            <a:endParaRPr lang="en-US" dirty="0"/>
+          </a:p>
+        </p:txBody>
+      </p:sp>
+      <p:sp>
+        <p:nvSpPr>
+          <p:cNvPr id="5" name="Slide Number Placeholder 4">
+            <a:extLst>
+              <a:ext uri="{FF2B5EF4-FFF2-40B4-BE49-F238E27FC236}">
+                <a16:creationId xmlns:a16="http://schemas.microsoft.com/office/drawing/2014/main" id="{A77479BC-0F43-42E0-A7C3-DBA24ED6FDC1}"/>
+              </a:ext>
+            </a:extLst>
+          </p:cNvPr>
+          <p:cNvSpPr>
+            <a:spLocks noGrp="1"/>
+          </p:cNvSpPr>
+          <p:nvPr>
+            <p:ph type="sldNum" sz="quarter" idx="12"/>
+          </p:nvPr>
+        </p:nvSpPr>
+        <p:spPr/>
+        <p:txBody>
+          <a:bodyPr/>
+          <a:lstStyle/>
+          <a:p>
+            <a:fld id="{6D22F896-40B5-4ADD-8801-0D06FADFA095}" type="slidenum">
+              <a:rPr lang="en-US" smtClean="0"/>
+              <a:t>33</a:t>
+            </a:fld>
+            <a:endParaRPr lang="en-US" dirty="0"/>
+          </a:p>
+        </p:txBody>
+      </p:sp>
+      <p:pic>
+        <p:nvPicPr>
+          <p:cNvPr id="6" name="Picture 5">
+            <a:extLst>
+              <a:ext uri="{FF2B5EF4-FFF2-40B4-BE49-F238E27FC236}">
+                <a16:creationId xmlns:a16="http://schemas.microsoft.com/office/drawing/2014/main" id="{65AD263C-87C4-4908-B55C-6828D30F4F0E}"/>
+              </a:ext>
+            </a:extLst>
+          </p:cNvPr>
+          <p:cNvPicPr>
+            <a:picLocks noChangeAspect="1"/>
+          </p:cNvPicPr>
+          <p:nvPr/>
+        </p:nvPicPr>
+        <p:blipFill>
+          <a:blip r:embed="rId2"/>
+          <a:stretch>
+            <a:fillRect/>
+          </a:stretch>
+        </p:blipFill>
+        <p:spPr>
+          <a:xfrm>
+            <a:off x="1094387" y="1485257"/>
+            <a:ext cx="6955226" cy="3622513"/>
+          </a:xfrm>
+          <a:prstGeom prst="roundRect">
+            <a:avLst>
+              <a:gd name="adj" fmla="val 8594"/>
+            </a:avLst>
+          </a:prstGeom>
+          <a:solidFill>
+            <a:srgbClr val="FFFFFF">
+              <a:shade val="85000"/>
+            </a:srgbClr>
+          </a:solidFill>
+          <a:ln>
+            <a:noFill/>
+          </a:ln>
+          <a:effectLst>
+            <a:reflection blurRad="12700" stA="38000" endPos="28000" dist="5000" dir="5400000" sy="-100000" algn="bl" rotWithShape="0"/>
+          </a:effectLst>
+        </p:spPr>
+      </p:pic>
+    </p:spTree>
+    <p:extLst>
+      <p:ext uri="{BB962C8B-B14F-4D97-AF65-F5344CB8AC3E}">
+        <p14:creationId xmlns:p14="http://schemas.microsoft.com/office/powerpoint/2010/main" val="1163326801"/>
+      </p:ext>
+    </p:extLst>
+  </p:cSld>
+  <p:clrMapOvr>
+    <a:masterClrMapping/>
+  </p:clrMapOvr>
+</p:sld>
+</file>
+
+<file path=ppt/slides/slide34.xml><?xml version="1.0" encoding="utf-8"?>
+<p:sld xmlns:a="http://schemas.openxmlformats.org/drawingml/2006/main" xmlns:r="http://schemas.openxmlformats.org/officeDocument/2006/relationships" xmlns:p="http://schemas.openxmlformats.org/presentationml/2006/main">
+  <p:cSld>
+    <p:spTree>
+      <p:nvGrpSpPr>
+        <p:cNvPr id="1" name=""/>
+        <p:cNvGrpSpPr/>
+        <p:nvPr/>
+      </p:nvGrpSpPr>
+      <p:grpSpPr>
+        <a:xfrm>
+          <a:off x="0" y="0"/>
+          <a:ext cx="0" cy="0"/>
+          <a:chOff x="0" y="0"/>
+          <a:chExt cx="0" cy="0"/>
+        </a:xfrm>
+      </p:grpSpPr>
+      <p:sp>
+        <p:nvSpPr>
+          <p:cNvPr id="2" name="Title 1">
+            <a:extLst>
+              <a:ext uri="{FF2B5EF4-FFF2-40B4-BE49-F238E27FC236}">
+                <a16:creationId xmlns:a16="http://schemas.microsoft.com/office/drawing/2014/main" id="{2B5EAD73-1765-47BE-8F85-695B6799EDFD}"/>
+              </a:ext>
+            </a:extLst>
+          </p:cNvPr>
+          <p:cNvSpPr>
+            <a:spLocks noGrp="1"/>
+          </p:cNvSpPr>
+          <p:nvPr>
+            <p:ph type="title"/>
+          </p:nvPr>
+        </p:nvSpPr>
+        <p:spPr/>
+        <p:txBody>
+          <a:bodyPr/>
+          <a:lstStyle/>
+          <a:p>
+            <a:endParaRPr lang="en-IN"/>
+          </a:p>
+        </p:txBody>
+      </p:sp>
+      <p:pic>
+        <p:nvPicPr>
+          <p:cNvPr id="7" name="Content Placeholder 6">
+            <a:extLst>
+              <a:ext uri="{FF2B5EF4-FFF2-40B4-BE49-F238E27FC236}">
+                <a16:creationId xmlns:a16="http://schemas.microsoft.com/office/drawing/2014/main" id="{E7A9EA66-00D4-4125-A9B3-E73E41B2F277}"/>
+              </a:ext>
+            </a:extLst>
+          </p:cNvPr>
+          <p:cNvPicPr>
+            <a:picLocks noGrp="1" noChangeAspect="1"/>
+          </p:cNvPicPr>
+          <p:nvPr>
+            <p:ph idx="1"/>
+          </p:nvPr>
+        </p:nvPicPr>
+        <p:blipFill>
+          <a:blip r:embed="rId2"/>
+          <a:stretch>
+            <a:fillRect/>
+          </a:stretch>
+        </p:blipFill>
+        <p:spPr>
+          <a:xfrm>
+            <a:off x="114003" y="921376"/>
+            <a:ext cx="8915994" cy="5015247"/>
+          </a:xfrm>
+        </p:spPr>
+      </p:pic>
+      <p:sp>
+        <p:nvSpPr>
+          <p:cNvPr id="4" name="Footer Placeholder 3">
+            <a:extLst>
+              <a:ext uri="{FF2B5EF4-FFF2-40B4-BE49-F238E27FC236}">
+                <a16:creationId xmlns:a16="http://schemas.microsoft.com/office/drawing/2014/main" id="{EA8ED24F-F8E8-4C1B-B49F-C3653B4C7662}"/>
+              </a:ext>
+            </a:extLst>
+          </p:cNvPr>
+          <p:cNvSpPr>
+            <a:spLocks noGrp="1"/>
+          </p:cNvSpPr>
+          <p:nvPr>
+            <p:ph type="ftr" sz="quarter" idx="11"/>
+          </p:nvPr>
+        </p:nvSpPr>
+        <p:spPr/>
+        <p:txBody>
+          <a:bodyPr/>
+          <a:lstStyle/>
+          <a:p>
+            <a:r>
+              <a:rPr lang="en-US"/>
+              <a:t>chandanshastri.github.io</a:t>
+            </a:r>
+            <a:endParaRPr lang="en-US" dirty="0"/>
+          </a:p>
+        </p:txBody>
+      </p:sp>
+      <p:sp>
+        <p:nvSpPr>
+          <p:cNvPr id="5" name="Slide Number Placeholder 4">
+            <a:extLst>
+              <a:ext uri="{FF2B5EF4-FFF2-40B4-BE49-F238E27FC236}">
+                <a16:creationId xmlns:a16="http://schemas.microsoft.com/office/drawing/2014/main" id="{F30A5F4F-F135-44B8-9234-0FBFAAE617E0}"/>
+              </a:ext>
+            </a:extLst>
+          </p:cNvPr>
+          <p:cNvSpPr>
+            <a:spLocks noGrp="1"/>
+          </p:cNvSpPr>
+          <p:nvPr>
+            <p:ph type="sldNum" sz="quarter" idx="12"/>
+          </p:nvPr>
+        </p:nvSpPr>
+        <p:spPr/>
+        <p:txBody>
+          <a:bodyPr/>
+          <a:lstStyle/>
+          <a:p>
+            <a:fld id="{6D22F896-40B5-4ADD-8801-0D06FADFA095}" type="slidenum">
+              <a:rPr lang="en-US" smtClean="0"/>
+              <a:t>34</a:t>
+            </a:fld>
+            <a:endParaRPr lang="en-US" dirty="0"/>
+          </a:p>
+        </p:txBody>
+      </p:sp>
+    </p:spTree>
+    <p:extLst>
+      <p:ext uri="{BB962C8B-B14F-4D97-AF65-F5344CB8AC3E}">
+        <p14:creationId xmlns:p14="http://schemas.microsoft.com/office/powerpoint/2010/main" val="3625295140"/>
+      </p:ext>
+    </p:extLst>
+  </p:cSld>
+  <p:clrMapOvr>
+    <a:masterClrMapping/>
+  </p:clrMapOvr>
+</p:sld>
+</file>
+
+<file path=ppt/slides/slide35.xml><?xml version="1.0" encoding="utf-8"?>
+<p:sld xmlns:a="http://schemas.openxmlformats.org/drawingml/2006/main" xmlns:r="http://schemas.openxmlformats.org/officeDocument/2006/relationships" xmlns:p="http://schemas.openxmlformats.org/presentationml/2006/main">
+  <p:cSld>
+    <p:spTree>
+      <p:nvGrpSpPr>
+        <p:cNvPr id="1" name=""/>
+        <p:cNvGrpSpPr/>
+        <p:nvPr/>
+      </p:nvGrpSpPr>
+      <p:grpSpPr>
+        <a:xfrm>
+          <a:off x="0" y="0"/>
+          <a:ext cx="0" cy="0"/>
+          <a:chOff x="0" y="0"/>
+          <a:chExt cx="0" cy="0"/>
+        </a:xfrm>
+      </p:grpSpPr>
+      <p:sp>
+        <p:nvSpPr>
+          <p:cNvPr id="2" name="Title 1">
+            <a:extLst>
+              <a:ext uri="{FF2B5EF4-FFF2-40B4-BE49-F238E27FC236}">
+                <a16:creationId xmlns:a16="http://schemas.microsoft.com/office/drawing/2014/main" id="{1C044FD7-8582-46F0-8654-332CB3E9C8FA}"/>
+              </a:ext>
+            </a:extLst>
+          </p:cNvPr>
+          <p:cNvSpPr>
+            <a:spLocks noGrp="1"/>
+          </p:cNvSpPr>
+          <p:nvPr>
+            <p:ph type="title"/>
+          </p:nvPr>
+        </p:nvSpPr>
+        <p:spPr/>
+        <p:txBody>
+          <a:bodyPr/>
+          <a:lstStyle/>
+          <a:p>
+            <a:endParaRPr lang="en-IN"/>
+          </a:p>
+        </p:txBody>
+      </p:sp>
+      <p:pic>
+        <p:nvPicPr>
+          <p:cNvPr id="7" name="Content Placeholder 6">
+            <a:extLst>
+              <a:ext uri="{FF2B5EF4-FFF2-40B4-BE49-F238E27FC236}">
+                <a16:creationId xmlns:a16="http://schemas.microsoft.com/office/drawing/2014/main" id="{D941676A-6D1C-4096-BBBA-0FC1C4E6FBDD}"/>
+              </a:ext>
+            </a:extLst>
+          </p:cNvPr>
+          <p:cNvPicPr>
+            <a:picLocks noGrp="1" noChangeAspect="1"/>
+          </p:cNvPicPr>
+          <p:nvPr>
+            <p:ph idx="1"/>
+          </p:nvPr>
+        </p:nvPicPr>
+        <p:blipFill>
+          <a:blip r:embed="rId2"/>
+          <a:stretch>
+            <a:fillRect/>
+          </a:stretch>
+        </p:blipFill>
+        <p:spPr>
+          <a:xfrm>
+            <a:off x="-830264" y="1020226"/>
+            <a:ext cx="10804528" cy="4817548"/>
+          </a:xfrm>
+        </p:spPr>
+      </p:pic>
+      <p:sp>
+        <p:nvSpPr>
+          <p:cNvPr id="4" name="Footer Placeholder 3">
+            <a:extLst>
+              <a:ext uri="{FF2B5EF4-FFF2-40B4-BE49-F238E27FC236}">
+                <a16:creationId xmlns:a16="http://schemas.microsoft.com/office/drawing/2014/main" id="{1A031420-5D00-408E-96C8-E9E0D482BF97}"/>
+              </a:ext>
+            </a:extLst>
+          </p:cNvPr>
+          <p:cNvSpPr>
+            <a:spLocks noGrp="1"/>
+          </p:cNvSpPr>
+          <p:nvPr>
+            <p:ph type="ftr" sz="quarter" idx="11"/>
+          </p:nvPr>
+        </p:nvSpPr>
+        <p:spPr/>
+        <p:txBody>
+          <a:bodyPr/>
+          <a:lstStyle/>
+          <a:p>
+            <a:r>
+              <a:rPr lang="en-US"/>
+              <a:t>chandanshastri.github.io</a:t>
+            </a:r>
+            <a:endParaRPr lang="en-US" dirty="0"/>
+          </a:p>
+        </p:txBody>
+      </p:sp>
+      <p:sp>
+        <p:nvSpPr>
+          <p:cNvPr id="5" name="Slide Number Placeholder 4">
+            <a:extLst>
+              <a:ext uri="{FF2B5EF4-FFF2-40B4-BE49-F238E27FC236}">
+                <a16:creationId xmlns:a16="http://schemas.microsoft.com/office/drawing/2014/main" id="{B99A665E-0067-41A1-BC1A-040FD1BE36D2}"/>
+              </a:ext>
+            </a:extLst>
+          </p:cNvPr>
+          <p:cNvSpPr>
+            <a:spLocks noGrp="1"/>
+          </p:cNvSpPr>
+          <p:nvPr>
+            <p:ph type="sldNum" sz="quarter" idx="12"/>
+          </p:nvPr>
+        </p:nvSpPr>
+        <p:spPr/>
+        <p:txBody>
+          <a:bodyPr/>
+          <a:lstStyle/>
+          <a:p>
+            <a:fld id="{6D22F896-40B5-4ADD-8801-0D06FADFA095}" type="slidenum">
+              <a:rPr lang="en-US" smtClean="0"/>
+              <a:t>35</a:t>
+            </a:fld>
+            <a:endParaRPr lang="en-US" dirty="0"/>
+          </a:p>
+        </p:txBody>
+      </p:sp>
+    </p:spTree>
+    <p:extLst>
+      <p:ext uri="{BB962C8B-B14F-4D97-AF65-F5344CB8AC3E}">
+        <p14:creationId xmlns:p14="http://schemas.microsoft.com/office/powerpoint/2010/main" val="3935488876"/>
+      </p:ext>
+    </p:extLst>
+  </p:cSld>
+  <p:clrMapOvr>
+    <a:masterClrMapping/>
+  </p:clrMapOvr>
+</p:sld>
+</file>
+
+<file path=ppt/slides/slide36.xml><?xml version="1.0" encoding="utf-8"?>
+<p:sld xmlns:a="http://schemas.openxmlformats.org/drawingml/2006/main" xmlns:r="http://schemas.openxmlformats.org/officeDocument/2006/relationships" xmlns:p="http://schemas.openxmlformats.org/presentationml/2006/main">
+  <p:cSld>
+    <p:spTree>
+      <p:nvGrpSpPr>
+        <p:cNvPr id="1" name=""/>
+        <p:cNvGrpSpPr/>
+        <p:nvPr/>
+      </p:nvGrpSpPr>
+      <p:grpSpPr>
+        <a:xfrm>
+          <a:off x="0" y="0"/>
+          <a:ext cx="0" cy="0"/>
+          <a:chOff x="0" y="0"/>
+          <a:chExt cx="0" cy="0"/>
+        </a:xfrm>
+      </p:grpSpPr>
+      <p:sp>
+        <p:nvSpPr>
+          <p:cNvPr id="2" name="Title 1">
+            <a:extLst>
+              <a:ext uri="{FF2B5EF4-FFF2-40B4-BE49-F238E27FC236}">
+                <a16:creationId xmlns:a16="http://schemas.microsoft.com/office/drawing/2014/main" id="{19AAF1D9-D8E8-4BCE-8704-ACAD5A2EDB0D}"/>
+              </a:ext>
+            </a:extLst>
+          </p:cNvPr>
+          <p:cNvSpPr>
+            <a:spLocks noGrp="1"/>
+          </p:cNvSpPr>
+          <p:nvPr>
+            <p:ph type="title"/>
+          </p:nvPr>
+        </p:nvSpPr>
+        <p:spPr/>
+        <p:txBody>
+          <a:bodyPr/>
+          <a:lstStyle/>
+          <a:p>
+            <a:endParaRPr lang="en-IN"/>
+          </a:p>
+        </p:txBody>
+      </p:sp>
+      <p:sp>
+        <p:nvSpPr>
+          <p:cNvPr id="3" name="Content Placeholder 2">
+            <a:extLst>
+              <a:ext uri="{FF2B5EF4-FFF2-40B4-BE49-F238E27FC236}">
+                <a16:creationId xmlns:a16="http://schemas.microsoft.com/office/drawing/2014/main" id="{99A329B8-FAB2-4952-935A-B4E95F5B711C}"/>
+              </a:ext>
+            </a:extLst>
+          </p:cNvPr>
+          <p:cNvSpPr>
+            <a:spLocks noGrp="1"/>
+          </p:cNvSpPr>
+          <p:nvPr>
+            <p:ph idx="1"/>
+          </p:nvPr>
+        </p:nvSpPr>
+        <p:spPr/>
+        <p:txBody>
+          <a:bodyPr/>
+          <a:lstStyle/>
+          <a:p>
+            <a:endParaRPr lang="en-IN"/>
+          </a:p>
+        </p:txBody>
+      </p:sp>
+      <p:sp>
+        <p:nvSpPr>
+          <p:cNvPr id="4" name="Footer Placeholder 3">
+            <a:extLst>
+              <a:ext uri="{FF2B5EF4-FFF2-40B4-BE49-F238E27FC236}">
+                <a16:creationId xmlns:a16="http://schemas.microsoft.com/office/drawing/2014/main" id="{BBB87A05-5CF9-42FF-B782-636BB43B8911}"/>
+              </a:ext>
+            </a:extLst>
+          </p:cNvPr>
+          <p:cNvSpPr>
+            <a:spLocks noGrp="1"/>
+          </p:cNvSpPr>
+          <p:nvPr>
+            <p:ph type="ftr" sz="quarter" idx="11"/>
+          </p:nvPr>
+        </p:nvSpPr>
+        <p:spPr/>
+        <p:txBody>
+          <a:bodyPr/>
+          <a:lstStyle/>
+          <a:p>
+            <a:r>
+              <a:rPr lang="en-US"/>
+              <a:t>chandanshastri.github.io</a:t>
+            </a:r>
+            <a:endParaRPr lang="en-US" dirty="0"/>
+          </a:p>
+        </p:txBody>
+      </p:sp>
+      <p:sp>
+        <p:nvSpPr>
+          <p:cNvPr id="5" name="Slide Number Placeholder 4">
+            <a:extLst>
+              <a:ext uri="{FF2B5EF4-FFF2-40B4-BE49-F238E27FC236}">
+                <a16:creationId xmlns:a16="http://schemas.microsoft.com/office/drawing/2014/main" id="{42E29468-5B65-4F23-AF35-C2DD7996F0C1}"/>
+              </a:ext>
+            </a:extLst>
+          </p:cNvPr>
+          <p:cNvSpPr>
+            <a:spLocks noGrp="1"/>
+          </p:cNvSpPr>
+          <p:nvPr>
+            <p:ph type="sldNum" sz="quarter" idx="12"/>
+          </p:nvPr>
+        </p:nvSpPr>
+        <p:spPr/>
+        <p:txBody>
+          <a:bodyPr/>
+          <a:lstStyle/>
+          <a:p>
+            <a:fld id="{6D22F896-40B5-4ADD-8801-0D06FADFA095}" type="slidenum">
+              <a:rPr lang="en-US" smtClean="0"/>
+              <a:t>36</a:t>
+            </a:fld>
+            <a:endParaRPr lang="en-US" dirty="0"/>
+          </a:p>
+        </p:txBody>
+      </p:sp>
+    </p:spTree>
+    <p:extLst>
+      <p:ext uri="{BB962C8B-B14F-4D97-AF65-F5344CB8AC3E}">
+        <p14:creationId xmlns:p14="http://schemas.microsoft.com/office/powerpoint/2010/main" val="3499211341"/>
       </p:ext>
     </p:extLst>
   </p:cSld>
